--- a/Predicting Air Quality in Salt Lake City PowerPoint.pptx
+++ b/Predicting Air Quality in Salt Lake City PowerPoint.pptx
@@ -2,7 +2,7 @@
 <file path=ppt/presentation.xml><?xml version="1.0" encoding="utf-8"?>
 <p:presentation xmlns:a="http://schemas.openxmlformats.org/drawingml/2006/main" xmlns:r="http://schemas.openxmlformats.org/officeDocument/2006/relationships" xmlns:p="http://schemas.openxmlformats.org/presentationml/2006/main" autoCompressPictures="0">
   <p:sldMasterIdLst>
-    <p:sldMasterId id="2147483840" r:id="rId1"/>
+    <p:sldMasterId id="2147483648" r:id="rId1"/>
   </p:sldMasterIdLst>
   <p:sldIdLst>
     <p:sldId id="256" r:id="rId2"/>
@@ -114,7 +114,7 @@
 </file>
 
 <file path=ppt/slideLayouts/slideLayout1.xml><?xml version="1.0" encoding="utf-8"?>
-<p:sldLayout xmlns:a="http://schemas.openxmlformats.org/drawingml/2006/main" xmlns:r="http://schemas.openxmlformats.org/officeDocument/2006/relationships" xmlns:p="http://schemas.openxmlformats.org/presentationml/2006/main" showMasterSp="0" type="title" preserve="1">
+<p:sldLayout xmlns:a="http://schemas.openxmlformats.org/drawingml/2006/main" xmlns:r="http://schemas.openxmlformats.org/officeDocument/2006/relationships" xmlns:p="http://schemas.openxmlformats.org/presentationml/2006/main" type="title" preserve="1">
   <p:cSld name="Title Slide">
     <p:spTree>
       <p:nvGrpSpPr>
@@ -132,35 +132,101 @@
       </p:grpSpPr>
       <p:sp>
         <p:nvSpPr>
-          <p:cNvPr id="7" name="Rectangle 6"/>
+          <p:cNvPr id="11" name="Freeform 6"/>
           <p:cNvSpPr/>
           <p:nvPr/>
         </p:nvSpPr>
-        <p:spPr>
+        <p:spPr bwMode="auto">
           <a:xfrm>
-            <a:off x="0" y="761999"/>
-            <a:ext cx="9141619" cy="5334001"/>
+            <a:off x="0" y="-3175"/>
+            <a:ext cx="12192000" cy="5203825"/>
           </a:xfrm>
-          <a:prstGeom prst="rect">
+          <a:custGeom>
             <a:avLst/>
-          </a:prstGeom>
-          <a:solidFill>
-            <a:schemeClr val="accent1"/>
-          </a:solidFill>
-          <a:ln>
-            <a:noFill/>
-          </a:ln>
+            <a:gdLst/>
+            <a:ahLst/>
+            <a:cxnLst/>
+            <a:rect l="0" t="0" r="r" b="b"/>
+            <a:pathLst>
+              <a:path w="5760" h="3278">
+                <a:moveTo>
+                  <a:pt x="5760" y="0"/>
+                </a:moveTo>
+                <a:lnTo>
+                  <a:pt x="0" y="0"/>
+                </a:lnTo>
+                <a:lnTo>
+                  <a:pt x="0" y="3090"/>
+                </a:lnTo>
+                <a:lnTo>
+                  <a:pt x="943" y="3090"/>
+                </a:lnTo>
+                <a:lnTo>
+                  <a:pt x="1123" y="3270"/>
+                </a:lnTo>
+                <a:lnTo>
+                  <a:pt x="1123" y="3270"/>
+                </a:lnTo>
+                <a:lnTo>
+                  <a:pt x="1127" y="3272"/>
+                </a:lnTo>
+                <a:lnTo>
+                  <a:pt x="1133" y="3275"/>
+                </a:lnTo>
+                <a:lnTo>
+                  <a:pt x="1139" y="3278"/>
+                </a:lnTo>
+                <a:lnTo>
+                  <a:pt x="1144" y="3278"/>
+                </a:lnTo>
+                <a:lnTo>
+                  <a:pt x="1150" y="3278"/>
+                </a:lnTo>
+                <a:lnTo>
+                  <a:pt x="1155" y="3275"/>
+                </a:lnTo>
+                <a:lnTo>
+                  <a:pt x="1161" y="3272"/>
+                </a:lnTo>
+                <a:lnTo>
+                  <a:pt x="1165" y="3270"/>
+                </a:lnTo>
+                <a:lnTo>
+                  <a:pt x="1345" y="3090"/>
+                </a:lnTo>
+                <a:lnTo>
+                  <a:pt x="5760" y="3090"/>
+                </a:lnTo>
+                <a:lnTo>
+                  <a:pt x="5760" y="0"/>
+                </a:lnTo>
+                <a:close/>
+              </a:path>
+            </a:pathLst>
+          </a:custGeom>
+          <a:ln/>
+          <a:effectLst/>
+          <a:extLst>
+            <a:ext uri="{91240B29-F687-4f45-9708-019B960494DF}">
+              <a14:hiddenLine xmlns:a14="http://schemas.microsoft.com/office/drawing/2010/main" xmlns="" w="9525">
+                <a:solidFill>
+                  <a:srgbClr val="000000"/>
+                </a:solidFill>
+                <a:round/>
+                <a:headEnd/>
+                <a:tailEnd/>
+              </a14:hiddenLine>
+            </a:ext>
+          </a:extLst>
         </p:spPr>
         <p:style>
-          <a:lnRef idx="2">
-            <a:schemeClr val="accent1">
-              <a:shade val="50000"/>
-            </a:schemeClr>
+          <a:lnRef idx="1">
+            <a:schemeClr val="accent1"/>
           </a:lnRef>
-          <a:fillRef idx="1">
+          <a:fillRef idx="3">
             <a:schemeClr val="accent1"/>
           </a:fillRef>
-          <a:effectRef idx="0">
+          <a:effectRef idx="2">
             <a:schemeClr val="accent1"/>
           </a:effectRef>
           <a:fontRef idx="minor">
@@ -170,145 +236,142 @@
       </p:sp>
       <p:sp>
         <p:nvSpPr>
-          <p:cNvPr id="8" name="Rectangle 7"/>
-          <p:cNvSpPr/>
-          <p:nvPr/>
+          <p:cNvPr id="2" name="Title 1"/>
+          <p:cNvSpPr>
+            <a:spLocks noGrp="1"/>
+          </p:cNvSpPr>
+          <p:nvPr>
+            <p:ph type="ctrTitle"/>
+          </p:nvPr>
         </p:nvSpPr>
         <p:spPr>
           <a:xfrm>
-            <a:off x="9270263" y="761999"/>
-            <a:ext cx="2925318" cy="5334001"/>
+            <a:off x="810001" y="1449147"/>
+            <a:ext cx="10572000" cy="2971051"/>
           </a:xfrm>
-          <a:prstGeom prst="rect">
-            <a:avLst/>
-          </a:prstGeom>
-          <a:solidFill>
-            <a:srgbClr val="C8C8C8">
-              <a:alpha val="49804"/>
-            </a:srgbClr>
-          </a:solidFill>
-          <a:ln>
-            <a:noFill/>
-          </a:ln>
         </p:spPr>
-        <p:style>
-          <a:lnRef idx="2">
-            <a:schemeClr val="accent1">
-              <a:shade val="50000"/>
-            </a:schemeClr>
-          </a:lnRef>
-          <a:fillRef idx="1">
-            <a:schemeClr val="accent1"/>
-          </a:fillRef>
-          <a:effectRef idx="0">
-            <a:schemeClr val="accent1"/>
-          </a:effectRef>
-          <a:fontRef idx="minor">
-            <a:schemeClr val="lt1"/>
-          </a:fontRef>
-        </p:style>
-      </p:sp>
-      <p:sp>
-        <p:nvSpPr>
-          <p:cNvPr id="2" name="Title 1"/>
-          <p:cNvSpPr>
-            <a:spLocks noGrp="1"/>
-          </p:cNvSpPr>
-          <p:nvPr>
-            <p:ph type="ctrTitle"/>
+        <p:txBody>
+          <a:bodyPr/>
+          <a:lstStyle>
+            <a:lvl1pPr>
+              <a:defRPr sz="5400"/>
+            </a:lvl1pPr>
+          </a:lstStyle>
+          <a:p>
+            <a:r>
+              <a:rPr lang="en-US"/>
+              <a:t>Click to edit Master title style</a:t>
+            </a:r>
+            <a:endParaRPr lang="en-US" dirty="0"/>
+          </a:p>
+        </p:txBody>
+      </p:sp>
+      <p:sp>
+        <p:nvSpPr>
+          <p:cNvPr id="3" name="Subtitle 2"/>
+          <p:cNvSpPr>
+            <a:spLocks noGrp="1"/>
+          </p:cNvSpPr>
+          <p:nvPr>
+            <p:ph type="subTitle" idx="1"/>
           </p:nvPr>
         </p:nvSpPr>
         <p:spPr>
           <a:xfrm>
-            <a:off x="1069848" y="1298448"/>
-            <a:ext cx="7315200" cy="3255264"/>
+            <a:off x="810001" y="5280847"/>
+            <a:ext cx="10572000" cy="434974"/>
           </a:xfrm>
         </p:spPr>
         <p:txBody>
-          <a:bodyPr anchor="b">
-            <a:normAutofit/>
-          </a:bodyPr>
-          <a:lstStyle>
-            <a:lvl1pPr algn="l">
-              <a:defRPr sz="5900" spc="-100" baseline="0">
-                <a:solidFill>
-                  <a:srgbClr val="FFFFFF"/>
-                </a:solidFill>
-              </a:defRPr>
-            </a:lvl1pPr>
-          </a:lstStyle>
-          <a:p>
-            <a:r>
-              <a:rPr lang="en-US"/>
-              <a:t>Click to edit Master title style</a:t>
-            </a:r>
-            <a:endParaRPr lang="en-US" dirty="0"/>
-          </a:p>
-        </p:txBody>
-      </p:sp>
-      <p:sp>
-        <p:nvSpPr>
-          <p:cNvPr id="3" name="Subtitle 2"/>
-          <p:cNvSpPr>
-            <a:spLocks noGrp="1"/>
-          </p:cNvSpPr>
-          <p:nvPr>
-            <p:ph type="subTitle" idx="1"/>
-          </p:nvPr>
-        </p:nvSpPr>
-        <p:spPr>
-          <a:xfrm>
-            <a:off x="1100015" y="4670246"/>
-            <a:ext cx="7315200" cy="914400"/>
-          </a:xfrm>
-        </p:spPr>
-        <p:txBody>
-          <a:bodyPr anchor="t">
-            <a:normAutofit/>
-          </a:bodyPr>
+          <a:bodyPr anchor="t"/>
           <a:lstStyle>
             <a:lvl1pPr marL="0" indent="0" algn="l">
               <a:buNone/>
-              <a:defRPr sz="2200" cap="none" spc="0" baseline="0">
+              <a:defRPr>
                 <a:solidFill>
-                  <a:schemeClr val="accent1">
-                    <a:lumMod val="20000"/>
-                    <a:lumOff val="80000"/>
-                  </a:schemeClr>
+                  <a:schemeClr val="tx1"/>
                 </a:solidFill>
               </a:defRPr>
             </a:lvl1pPr>
             <a:lvl2pPr marL="457200" indent="0" algn="ctr">
               <a:buNone/>
-              <a:defRPr sz="2200"/>
+              <a:defRPr>
+                <a:solidFill>
+                  <a:schemeClr val="tx1">
+                    <a:tint val="75000"/>
+                  </a:schemeClr>
+                </a:solidFill>
+              </a:defRPr>
             </a:lvl2pPr>
             <a:lvl3pPr marL="914400" indent="0" algn="ctr">
               <a:buNone/>
-              <a:defRPr sz="2200"/>
+              <a:defRPr>
+                <a:solidFill>
+                  <a:schemeClr val="tx1">
+                    <a:tint val="75000"/>
+                  </a:schemeClr>
+                </a:solidFill>
+              </a:defRPr>
             </a:lvl3pPr>
             <a:lvl4pPr marL="1371600" indent="0" algn="ctr">
               <a:buNone/>
-              <a:defRPr sz="2000"/>
+              <a:defRPr>
+                <a:solidFill>
+                  <a:schemeClr val="tx1">
+                    <a:tint val="75000"/>
+                  </a:schemeClr>
+                </a:solidFill>
+              </a:defRPr>
             </a:lvl4pPr>
             <a:lvl5pPr marL="1828800" indent="0" algn="ctr">
               <a:buNone/>
-              <a:defRPr sz="2000"/>
+              <a:defRPr>
+                <a:solidFill>
+                  <a:schemeClr val="tx1">
+                    <a:tint val="75000"/>
+                  </a:schemeClr>
+                </a:solidFill>
+              </a:defRPr>
             </a:lvl5pPr>
             <a:lvl6pPr marL="2286000" indent="0" algn="ctr">
               <a:buNone/>
-              <a:defRPr sz="2000"/>
+              <a:defRPr>
+                <a:solidFill>
+                  <a:schemeClr val="tx1">
+                    <a:tint val="75000"/>
+                  </a:schemeClr>
+                </a:solidFill>
+              </a:defRPr>
             </a:lvl6pPr>
             <a:lvl7pPr marL="2743200" indent="0" algn="ctr">
               <a:buNone/>
-              <a:defRPr sz="2000"/>
+              <a:defRPr>
+                <a:solidFill>
+                  <a:schemeClr val="tx1">
+                    <a:tint val="75000"/>
+                  </a:schemeClr>
+                </a:solidFill>
+              </a:defRPr>
             </a:lvl7pPr>
             <a:lvl8pPr marL="3200400" indent="0" algn="ctr">
               <a:buNone/>
-              <a:defRPr sz="2000"/>
+              <a:defRPr>
+                <a:solidFill>
+                  <a:schemeClr val="tx1">
+                    <a:tint val="75000"/>
+                  </a:schemeClr>
+                </a:solidFill>
+              </a:defRPr>
             </a:lvl8pPr>
             <a:lvl9pPr marL="3657600" indent="0" algn="ctr">
               <a:buNone/>
-              <a:defRPr sz="2000"/>
+              <a:defRPr>
+                <a:solidFill>
+                  <a:schemeClr val="tx1">
+                    <a:tint val="75000"/>
+                  </a:schemeClr>
+                </a:solidFill>
+              </a:defRPr>
             </a:lvl9pPr>
           </a:lstStyle>
           <a:p>
@@ -335,10 +398,10 @@
           <a:bodyPr/>
           <a:lstStyle/>
           <a:p>
-            <a:fld id="{5586B75A-687E-405C-8A0B-8D00578BA2C3}" type="datetimeFigureOut">
+            <a:fld id="{08B9EBBA-996F-894A-B54A-D6246ED52CEA}" type="datetimeFigureOut">
               <a:rPr lang="en-US" dirty="0"/>
               <a:pPr/>
-              <a:t>12/26/2016</a:t>
+              <a:t>12/28/2016</a:t>
             </a:fld>
             <a:endParaRPr lang="en-US" dirty="0"/>
           </a:p>
@@ -378,7 +441,7 @@
           <a:bodyPr/>
           <a:lstStyle/>
           <a:p>
-            <a:fld id="{4FAB73BC-B049-4115-A692-8D63A059BFB8}" type="slidenum">
+            <a:fld id="{D57F1E4F-1CFF-5643-939E-217C01CDF565}" type="slidenum">
               <a:rPr lang="en-US" dirty="0"/>
               <a:pPr/>
               <a:t>‹#›</a:t>
@@ -396,6 +459,1172 @@
 </file>
 
 <file path=ppt/slideLayouts/slideLayout10.xml><?xml version="1.0" encoding="utf-8"?>
+<p:sldLayout xmlns:a="http://schemas.openxmlformats.org/drawingml/2006/main" xmlns:r="http://schemas.openxmlformats.org/officeDocument/2006/relationships" xmlns:p="http://schemas.openxmlformats.org/presentationml/2006/main" preserve="1">
+  <p:cSld name="Panoramic Picture with Caption">
+    <p:spTree>
+      <p:nvGrpSpPr>
+        <p:cNvPr id="1" name=""/>
+        <p:cNvGrpSpPr/>
+        <p:nvPr/>
+      </p:nvGrpSpPr>
+      <p:grpSpPr>
+        <a:xfrm>
+          <a:off x="0" y="0"/>
+          <a:ext cx="0" cy="0"/>
+          <a:chOff x="0" y="0"/>
+          <a:chExt cx="0" cy="0"/>
+        </a:xfrm>
+      </p:grpSpPr>
+      <p:sp>
+        <p:nvSpPr>
+          <p:cNvPr id="2" name="Title 1"/>
+          <p:cNvSpPr>
+            <a:spLocks noGrp="1"/>
+          </p:cNvSpPr>
+          <p:nvPr>
+            <p:ph type="title"/>
+          </p:nvPr>
+        </p:nvSpPr>
+        <p:spPr>
+          <a:xfrm>
+            <a:off x="810000" y="4800600"/>
+            <a:ext cx="10561418" cy="566738"/>
+          </a:xfrm>
+        </p:spPr>
+        <p:txBody>
+          <a:bodyPr anchor="b">
+            <a:normAutofit/>
+          </a:bodyPr>
+          <a:lstStyle>
+            <a:lvl1pPr algn="l">
+              <a:defRPr sz="2400" b="0"/>
+            </a:lvl1pPr>
+          </a:lstStyle>
+          <a:p>
+            <a:r>
+              <a:rPr lang="en-US"/>
+              <a:t>Click to edit Master title style</a:t>
+            </a:r>
+            <a:endParaRPr lang="en-US" dirty="0"/>
+          </a:p>
+        </p:txBody>
+      </p:sp>
+      <p:sp>
+        <p:nvSpPr>
+          <p:cNvPr id="15" name="Picture Placeholder 14"/>
+          <p:cNvSpPr>
+            <a:spLocks noGrp="1" noChangeAspect="1"/>
+          </p:cNvSpPr>
+          <p:nvPr>
+            <p:ph type="pic" sz="quarter" idx="13"/>
+          </p:nvPr>
+        </p:nvSpPr>
+        <p:spPr bwMode="auto">
+          <a:xfrm>
+            <a:off x="0" y="0"/>
+            <a:ext cx="12192000" cy="4800600"/>
+          </a:xfrm>
+          <a:custGeom>
+            <a:avLst/>
+            <a:gdLst/>
+            <a:ahLst/>
+            <a:cxnLst/>
+            <a:rect l="0" t="0" r="r" b="b"/>
+            <a:pathLst>
+              <a:path w="5760" h="3289">
+                <a:moveTo>
+                  <a:pt x="5760" y="0"/>
+                </a:moveTo>
+                <a:lnTo>
+                  <a:pt x="0" y="0"/>
+                </a:lnTo>
+                <a:lnTo>
+                  <a:pt x="0" y="3100"/>
+                </a:lnTo>
+                <a:lnTo>
+                  <a:pt x="943" y="3100"/>
+                </a:lnTo>
+                <a:lnTo>
+                  <a:pt x="1123" y="3281"/>
+                </a:lnTo>
+                <a:lnTo>
+                  <a:pt x="1123" y="3281"/>
+                </a:lnTo>
+                <a:lnTo>
+                  <a:pt x="1127" y="3283"/>
+                </a:lnTo>
+                <a:lnTo>
+                  <a:pt x="1133" y="3286"/>
+                </a:lnTo>
+                <a:lnTo>
+                  <a:pt x="1139" y="3289"/>
+                </a:lnTo>
+                <a:lnTo>
+                  <a:pt x="1144" y="3289"/>
+                </a:lnTo>
+                <a:lnTo>
+                  <a:pt x="1150" y="3289"/>
+                </a:lnTo>
+                <a:lnTo>
+                  <a:pt x="1155" y="3286"/>
+                </a:lnTo>
+                <a:lnTo>
+                  <a:pt x="1161" y="3283"/>
+                </a:lnTo>
+                <a:lnTo>
+                  <a:pt x="1165" y="3281"/>
+                </a:lnTo>
+                <a:lnTo>
+                  <a:pt x="1345" y="3100"/>
+                </a:lnTo>
+                <a:lnTo>
+                  <a:pt x="5760" y="3100"/>
+                </a:lnTo>
+                <a:lnTo>
+                  <a:pt x="5760" y="0"/>
+                </a:lnTo>
+                <a:close/>
+              </a:path>
+            </a:pathLst>
+          </a:custGeom>
+          <a:noFill/>
+          <a:ln>
+            <a:solidFill>
+              <a:schemeClr val="tx2"/>
+            </a:solidFill>
+          </a:ln>
+        </p:spPr>
+        <p:style>
+          <a:lnRef idx="1">
+            <a:schemeClr val="accent1"/>
+          </a:lnRef>
+          <a:fillRef idx="3">
+            <a:schemeClr val="accent1"/>
+          </a:fillRef>
+          <a:effectRef idx="2">
+            <a:schemeClr val="accent1"/>
+          </a:effectRef>
+          <a:fontRef idx="minor">
+            <a:schemeClr val="lt1"/>
+          </a:fontRef>
+        </p:style>
+        <p:txBody>
+          <a:bodyPr wrap="square" numCol="1" anchor="t" anchorCtr="0" compatLnSpc="1">
+            <a:prstTxWarp prst="textNoShape">
+              <a:avLst/>
+            </a:prstTxWarp>
+            <a:normAutofit/>
+          </a:bodyPr>
+          <a:lstStyle>
+            <a:lvl1pPr marL="0" indent="0" algn="ctr">
+              <a:buFontTx/>
+              <a:buNone/>
+              <a:defRPr sz="1600"/>
+            </a:lvl1pPr>
+          </a:lstStyle>
+          <a:p>
+            <a:r>
+              <a:rPr lang="en-US"/>
+              <a:t>Click icon to add picture</a:t>
+            </a:r>
+            <a:endParaRPr lang="en-US" dirty="0"/>
+          </a:p>
+        </p:txBody>
+      </p:sp>
+      <p:sp>
+        <p:nvSpPr>
+          <p:cNvPr id="4" name="Text Placeholder 3"/>
+          <p:cNvSpPr>
+            <a:spLocks noGrp="1"/>
+          </p:cNvSpPr>
+          <p:nvPr>
+            <p:ph type="body" sz="half" idx="2"/>
+          </p:nvPr>
+        </p:nvSpPr>
+        <p:spPr>
+          <a:xfrm>
+            <a:off x="810000" y="5367338"/>
+            <a:ext cx="10561418" cy="493712"/>
+          </a:xfrm>
+        </p:spPr>
+        <p:txBody>
+          <a:bodyPr>
+            <a:normAutofit/>
+          </a:bodyPr>
+          <a:lstStyle>
+            <a:lvl1pPr marL="0" indent="0">
+              <a:buNone/>
+              <a:defRPr sz="1200"/>
+            </a:lvl1pPr>
+            <a:lvl2pPr marL="457200" indent="0">
+              <a:buNone/>
+              <a:defRPr sz="1200"/>
+            </a:lvl2pPr>
+            <a:lvl3pPr marL="914400" indent="0">
+              <a:buNone/>
+              <a:defRPr sz="1000"/>
+            </a:lvl3pPr>
+            <a:lvl4pPr marL="1371600" indent="0">
+              <a:buNone/>
+              <a:defRPr sz="900"/>
+            </a:lvl4pPr>
+            <a:lvl5pPr marL="1828800" indent="0">
+              <a:buNone/>
+              <a:defRPr sz="900"/>
+            </a:lvl5pPr>
+            <a:lvl6pPr marL="2286000" indent="0">
+              <a:buNone/>
+              <a:defRPr sz="900"/>
+            </a:lvl6pPr>
+            <a:lvl7pPr marL="2743200" indent="0">
+              <a:buNone/>
+              <a:defRPr sz="900"/>
+            </a:lvl7pPr>
+            <a:lvl8pPr marL="3200400" indent="0">
+              <a:buNone/>
+              <a:defRPr sz="900"/>
+            </a:lvl8pPr>
+            <a:lvl9pPr marL="3657600" indent="0">
+              <a:buNone/>
+              <a:defRPr sz="900"/>
+            </a:lvl9pPr>
+          </a:lstStyle>
+          <a:p>
+            <a:pPr lvl="0"/>
+            <a:r>
+              <a:rPr lang="en-US"/>
+              <a:t>Edit Master text styles</a:t>
+            </a:r>
+          </a:p>
+        </p:txBody>
+      </p:sp>
+      <p:sp>
+        <p:nvSpPr>
+          <p:cNvPr id="5" name="Date Placeholder 4"/>
+          <p:cNvSpPr>
+            <a:spLocks noGrp="1"/>
+          </p:cNvSpPr>
+          <p:nvPr>
+            <p:ph type="dt" sz="half" idx="10"/>
+          </p:nvPr>
+        </p:nvSpPr>
+        <p:spPr/>
+        <p:txBody>
+          <a:bodyPr/>
+          <a:lstStyle/>
+          <a:p>
+            <a:fld id="{18C79C5D-2A6F-F04D-97DA-BEF2467B64E4}" type="datetimeFigureOut">
+              <a:rPr lang="en-US" dirty="0"/>
+              <a:pPr/>
+              <a:t>12/28/2016</a:t>
+            </a:fld>
+            <a:endParaRPr lang="en-US" dirty="0"/>
+          </a:p>
+        </p:txBody>
+      </p:sp>
+      <p:sp>
+        <p:nvSpPr>
+          <p:cNvPr id="6" name="Footer Placeholder 5"/>
+          <p:cNvSpPr>
+            <a:spLocks noGrp="1"/>
+          </p:cNvSpPr>
+          <p:nvPr>
+            <p:ph type="ftr" sz="quarter" idx="11"/>
+          </p:nvPr>
+        </p:nvSpPr>
+        <p:spPr/>
+        <p:txBody>
+          <a:bodyPr/>
+          <a:lstStyle/>
+          <a:p>
+            <a:endParaRPr lang="en-US" dirty="0"/>
+          </a:p>
+        </p:txBody>
+      </p:sp>
+      <p:sp>
+        <p:nvSpPr>
+          <p:cNvPr id="7" name="Slide Number Placeholder 6"/>
+          <p:cNvSpPr>
+            <a:spLocks noGrp="1"/>
+          </p:cNvSpPr>
+          <p:nvPr>
+            <p:ph type="sldNum" sz="quarter" idx="12"/>
+          </p:nvPr>
+        </p:nvSpPr>
+        <p:spPr/>
+        <p:txBody>
+          <a:bodyPr/>
+          <a:lstStyle/>
+          <a:p>
+            <a:fld id="{D57F1E4F-1CFF-5643-939E-217C01CDF565}" type="slidenum">
+              <a:rPr lang="en-US" dirty="0"/>
+              <a:pPr/>
+              <a:t>‹#›</a:t>
+            </a:fld>
+            <a:endParaRPr lang="en-US" dirty="0"/>
+          </a:p>
+        </p:txBody>
+      </p:sp>
+    </p:spTree>
+  </p:cSld>
+  <p:clrMapOvr>
+    <a:masterClrMapping/>
+  </p:clrMapOvr>
+</p:sldLayout>
+</file>
+
+<file path=ppt/slideLayouts/slideLayout11.xml><?xml version="1.0" encoding="utf-8"?>
+<p:sldLayout xmlns:a="http://schemas.openxmlformats.org/drawingml/2006/main" xmlns:r="http://schemas.openxmlformats.org/officeDocument/2006/relationships" xmlns:p="http://schemas.openxmlformats.org/presentationml/2006/main" preserve="1">
+  <p:cSld name="Quote with Caption">
+    <p:spTree>
+      <p:nvGrpSpPr>
+        <p:cNvPr id="1" name=""/>
+        <p:cNvGrpSpPr/>
+        <p:nvPr/>
+      </p:nvGrpSpPr>
+      <p:grpSpPr>
+        <a:xfrm>
+          <a:off x="0" y="0"/>
+          <a:ext cx="0" cy="0"/>
+          <a:chOff x="0" y="0"/>
+          <a:chExt cx="0" cy="0"/>
+        </a:xfrm>
+      </p:grpSpPr>
+      <p:sp>
+        <p:nvSpPr>
+          <p:cNvPr id="8" name="Freeform 6"/>
+          <p:cNvSpPr>
+            <a:spLocks noChangeAspect="1"/>
+          </p:cNvSpPr>
+          <p:nvPr/>
+        </p:nvSpPr>
+        <p:spPr bwMode="auto">
+          <a:xfrm>
+            <a:off x="631697" y="1081456"/>
+            <a:ext cx="6332416" cy="3239188"/>
+          </a:xfrm>
+          <a:custGeom>
+            <a:avLst/>
+            <a:gdLst/>
+            <a:ahLst/>
+            <a:cxnLst/>
+            <a:rect l="0" t="0" r="r" b="b"/>
+            <a:pathLst>
+              <a:path w="3384" h="2308">
+                <a:moveTo>
+                  <a:pt x="3340" y="0"/>
+                </a:moveTo>
+                <a:lnTo>
+                  <a:pt x="44" y="0"/>
+                </a:lnTo>
+                <a:lnTo>
+                  <a:pt x="44" y="0"/>
+                </a:lnTo>
+                <a:lnTo>
+                  <a:pt x="34" y="0"/>
+                </a:lnTo>
+                <a:lnTo>
+                  <a:pt x="26" y="4"/>
+                </a:lnTo>
+                <a:lnTo>
+                  <a:pt x="20" y="8"/>
+                </a:lnTo>
+                <a:lnTo>
+                  <a:pt x="12" y="12"/>
+                </a:lnTo>
+                <a:lnTo>
+                  <a:pt x="8" y="20"/>
+                </a:lnTo>
+                <a:lnTo>
+                  <a:pt x="4" y="26"/>
+                </a:lnTo>
+                <a:lnTo>
+                  <a:pt x="0" y="34"/>
+                </a:lnTo>
+                <a:lnTo>
+                  <a:pt x="0" y="44"/>
+                </a:lnTo>
+                <a:lnTo>
+                  <a:pt x="0" y="2076"/>
+                </a:lnTo>
+                <a:lnTo>
+                  <a:pt x="0" y="2076"/>
+                </a:lnTo>
+                <a:lnTo>
+                  <a:pt x="0" y="2086"/>
+                </a:lnTo>
+                <a:lnTo>
+                  <a:pt x="4" y="2094"/>
+                </a:lnTo>
+                <a:lnTo>
+                  <a:pt x="8" y="2100"/>
+                </a:lnTo>
+                <a:lnTo>
+                  <a:pt x="12" y="2108"/>
+                </a:lnTo>
+                <a:lnTo>
+                  <a:pt x="20" y="2112"/>
+                </a:lnTo>
+                <a:lnTo>
+                  <a:pt x="26" y="2116"/>
+                </a:lnTo>
+                <a:lnTo>
+                  <a:pt x="34" y="2120"/>
+                </a:lnTo>
+                <a:lnTo>
+                  <a:pt x="44" y="2120"/>
+                </a:lnTo>
+                <a:lnTo>
+                  <a:pt x="474" y="2120"/>
+                </a:lnTo>
+                <a:lnTo>
+                  <a:pt x="650" y="2296"/>
+                </a:lnTo>
+                <a:lnTo>
+                  <a:pt x="650" y="2296"/>
+                </a:lnTo>
+                <a:lnTo>
+                  <a:pt x="656" y="2300"/>
+                </a:lnTo>
+                <a:lnTo>
+                  <a:pt x="664" y="2304"/>
+                </a:lnTo>
+                <a:lnTo>
+                  <a:pt x="672" y="2308"/>
+                </a:lnTo>
+                <a:lnTo>
+                  <a:pt x="680" y="2308"/>
+                </a:lnTo>
+                <a:lnTo>
+                  <a:pt x="688" y="2308"/>
+                </a:lnTo>
+                <a:lnTo>
+                  <a:pt x="696" y="2304"/>
+                </a:lnTo>
+                <a:lnTo>
+                  <a:pt x="704" y="2300"/>
+                </a:lnTo>
+                <a:lnTo>
+                  <a:pt x="710" y="2296"/>
+                </a:lnTo>
+                <a:lnTo>
+                  <a:pt x="886" y="2120"/>
+                </a:lnTo>
+                <a:lnTo>
+                  <a:pt x="3340" y="2120"/>
+                </a:lnTo>
+                <a:lnTo>
+                  <a:pt x="3340" y="2120"/>
+                </a:lnTo>
+                <a:lnTo>
+                  <a:pt x="3350" y="2120"/>
+                </a:lnTo>
+                <a:lnTo>
+                  <a:pt x="3358" y="2116"/>
+                </a:lnTo>
+                <a:lnTo>
+                  <a:pt x="3364" y="2112"/>
+                </a:lnTo>
+                <a:lnTo>
+                  <a:pt x="3372" y="2108"/>
+                </a:lnTo>
+                <a:lnTo>
+                  <a:pt x="3376" y="2100"/>
+                </a:lnTo>
+                <a:lnTo>
+                  <a:pt x="3380" y="2094"/>
+                </a:lnTo>
+                <a:lnTo>
+                  <a:pt x="3384" y="2086"/>
+                </a:lnTo>
+                <a:lnTo>
+                  <a:pt x="3384" y="2076"/>
+                </a:lnTo>
+                <a:lnTo>
+                  <a:pt x="3384" y="44"/>
+                </a:lnTo>
+                <a:lnTo>
+                  <a:pt x="3384" y="44"/>
+                </a:lnTo>
+                <a:lnTo>
+                  <a:pt x="3384" y="34"/>
+                </a:lnTo>
+                <a:lnTo>
+                  <a:pt x="3380" y="26"/>
+                </a:lnTo>
+                <a:lnTo>
+                  <a:pt x="3376" y="20"/>
+                </a:lnTo>
+                <a:lnTo>
+                  <a:pt x="3372" y="12"/>
+                </a:lnTo>
+                <a:lnTo>
+                  <a:pt x="3364" y="8"/>
+                </a:lnTo>
+                <a:lnTo>
+                  <a:pt x="3358" y="4"/>
+                </a:lnTo>
+                <a:lnTo>
+                  <a:pt x="3350" y="0"/>
+                </a:lnTo>
+                <a:lnTo>
+                  <a:pt x="3340" y="0"/>
+                </a:lnTo>
+                <a:lnTo>
+                  <a:pt x="3340" y="0"/>
+                </a:lnTo>
+                <a:close/>
+              </a:path>
+            </a:pathLst>
+          </a:custGeom>
+          <a:ln>
+            <a:solidFill>
+              <a:schemeClr val="accent1"/>
+            </a:solidFill>
+          </a:ln>
+        </p:spPr>
+        <p:style>
+          <a:lnRef idx="1">
+            <a:schemeClr val="accent1"/>
+          </a:lnRef>
+          <a:fillRef idx="3">
+            <a:schemeClr val="accent1"/>
+          </a:fillRef>
+          <a:effectRef idx="2">
+            <a:schemeClr val="accent1"/>
+          </a:effectRef>
+          <a:fontRef idx="minor">
+            <a:schemeClr val="lt1"/>
+          </a:fontRef>
+        </p:style>
+      </p:sp>
+      <p:sp>
+        <p:nvSpPr>
+          <p:cNvPr id="2" name="Title 1"/>
+          <p:cNvSpPr>
+            <a:spLocks noGrp="1"/>
+          </p:cNvSpPr>
+          <p:nvPr>
+            <p:ph type="title"/>
+          </p:nvPr>
+        </p:nvSpPr>
+        <p:spPr>
+          <a:xfrm>
+            <a:off x="850985" y="1238502"/>
+            <a:ext cx="5893840" cy="2645912"/>
+          </a:xfrm>
+        </p:spPr>
+        <p:txBody>
+          <a:bodyPr anchor="b"/>
+          <a:lstStyle>
+            <a:lvl1pPr algn="l">
+              <a:defRPr sz="4200" b="1" cap="none"/>
+            </a:lvl1pPr>
+          </a:lstStyle>
+          <a:p>
+            <a:r>
+              <a:rPr lang="en-US"/>
+              <a:t>Click to edit Master title style</a:t>
+            </a:r>
+            <a:endParaRPr lang="en-US" dirty="0"/>
+          </a:p>
+        </p:txBody>
+      </p:sp>
+      <p:sp>
+        <p:nvSpPr>
+          <p:cNvPr id="3" name="Text Placeholder 2"/>
+          <p:cNvSpPr>
+            <a:spLocks noGrp="1"/>
+          </p:cNvSpPr>
+          <p:nvPr>
+            <p:ph type="body" idx="1"/>
+          </p:nvPr>
+        </p:nvSpPr>
+        <p:spPr>
+          <a:xfrm>
+            <a:off x="853190" y="4443680"/>
+            <a:ext cx="5891636" cy="713241"/>
+          </a:xfrm>
+        </p:spPr>
+        <p:txBody>
+          <a:bodyPr anchor="t">
+            <a:noAutofit/>
+          </a:bodyPr>
+          <a:lstStyle>
+            <a:lvl1pPr marL="0" indent="0" algn="l">
+              <a:buNone/>
+              <a:defRPr sz="1800">
+                <a:solidFill>
+                  <a:schemeClr val="tx1"/>
+                </a:solidFill>
+              </a:defRPr>
+            </a:lvl1pPr>
+            <a:lvl2pPr marL="457200" indent="0">
+              <a:buNone/>
+              <a:defRPr sz="1800">
+                <a:solidFill>
+                  <a:schemeClr val="tx1">
+                    <a:tint val="75000"/>
+                  </a:schemeClr>
+                </a:solidFill>
+              </a:defRPr>
+            </a:lvl2pPr>
+            <a:lvl3pPr marL="914400" indent="0">
+              <a:buNone/>
+              <a:defRPr sz="1600">
+                <a:solidFill>
+                  <a:schemeClr val="tx1">
+                    <a:tint val="75000"/>
+                  </a:schemeClr>
+                </a:solidFill>
+              </a:defRPr>
+            </a:lvl3pPr>
+            <a:lvl4pPr marL="1371600" indent="0">
+              <a:buNone/>
+              <a:defRPr sz="1400">
+                <a:solidFill>
+                  <a:schemeClr val="tx1">
+                    <a:tint val="75000"/>
+                  </a:schemeClr>
+                </a:solidFill>
+              </a:defRPr>
+            </a:lvl4pPr>
+            <a:lvl5pPr marL="1828800" indent="0">
+              <a:buNone/>
+              <a:defRPr sz="1400">
+                <a:solidFill>
+                  <a:schemeClr val="tx1">
+                    <a:tint val="75000"/>
+                  </a:schemeClr>
+                </a:solidFill>
+              </a:defRPr>
+            </a:lvl5pPr>
+            <a:lvl6pPr marL="2286000" indent="0">
+              <a:buNone/>
+              <a:defRPr sz="1400">
+                <a:solidFill>
+                  <a:schemeClr val="tx1">
+                    <a:tint val="75000"/>
+                  </a:schemeClr>
+                </a:solidFill>
+              </a:defRPr>
+            </a:lvl6pPr>
+            <a:lvl7pPr marL="2743200" indent="0">
+              <a:buNone/>
+              <a:defRPr sz="1400">
+                <a:solidFill>
+                  <a:schemeClr val="tx1">
+                    <a:tint val="75000"/>
+                  </a:schemeClr>
+                </a:solidFill>
+              </a:defRPr>
+            </a:lvl7pPr>
+            <a:lvl8pPr marL="3200400" indent="0">
+              <a:buNone/>
+              <a:defRPr sz="1400">
+                <a:solidFill>
+                  <a:schemeClr val="tx1">
+                    <a:tint val="75000"/>
+                  </a:schemeClr>
+                </a:solidFill>
+              </a:defRPr>
+            </a:lvl8pPr>
+            <a:lvl9pPr marL="3657600" indent="0">
+              <a:buNone/>
+              <a:defRPr sz="1400">
+                <a:solidFill>
+                  <a:schemeClr val="tx1">
+                    <a:tint val="75000"/>
+                  </a:schemeClr>
+                </a:solidFill>
+              </a:defRPr>
+            </a:lvl9pPr>
+          </a:lstStyle>
+          <a:p>
+            <a:pPr lvl="0"/>
+            <a:r>
+              <a:rPr lang="en-US"/>
+              <a:t>Edit Master text styles</a:t>
+            </a:r>
+          </a:p>
+        </p:txBody>
+      </p:sp>
+      <p:sp>
+        <p:nvSpPr>
+          <p:cNvPr id="9" name="Text Placeholder 5"/>
+          <p:cNvSpPr>
+            <a:spLocks noGrp="1"/>
+          </p:cNvSpPr>
+          <p:nvPr>
+            <p:ph type="body" sz="quarter" idx="16"/>
+          </p:nvPr>
+        </p:nvSpPr>
+        <p:spPr>
+          <a:xfrm>
+            <a:off x="7574642" y="1081456"/>
+            <a:ext cx="3810001" cy="4075465"/>
+          </a:xfrm>
+        </p:spPr>
+        <p:txBody>
+          <a:bodyPr anchor="t"/>
+          <a:lstStyle>
+            <a:lvl1pPr marL="0" indent="0">
+              <a:buFontTx/>
+              <a:buNone/>
+              <a:defRPr/>
+            </a:lvl1pPr>
+          </a:lstStyle>
+          <a:p>
+            <a:pPr lvl="0"/>
+            <a:r>
+              <a:rPr lang="en-US"/>
+              <a:t>Edit Master text styles</a:t>
+            </a:r>
+          </a:p>
+        </p:txBody>
+      </p:sp>
+      <p:sp>
+        <p:nvSpPr>
+          <p:cNvPr id="4" name="Date Placeholder 3"/>
+          <p:cNvSpPr>
+            <a:spLocks noGrp="1"/>
+          </p:cNvSpPr>
+          <p:nvPr>
+            <p:ph type="dt" sz="half" idx="10"/>
+          </p:nvPr>
+        </p:nvSpPr>
+        <p:spPr/>
+        <p:txBody>
+          <a:bodyPr/>
+          <a:lstStyle/>
+          <a:p>
+            <a:fld id="{8DFA1846-DA80-1C48-A609-854EA85C59AD}" type="datetimeFigureOut">
+              <a:rPr lang="en-US" dirty="0"/>
+              <a:pPr/>
+              <a:t>12/28/2016</a:t>
+            </a:fld>
+            <a:endParaRPr lang="en-US" dirty="0"/>
+          </a:p>
+        </p:txBody>
+      </p:sp>
+      <p:sp>
+        <p:nvSpPr>
+          <p:cNvPr id="5" name="Footer Placeholder 4"/>
+          <p:cNvSpPr>
+            <a:spLocks noGrp="1"/>
+          </p:cNvSpPr>
+          <p:nvPr>
+            <p:ph type="ftr" sz="quarter" idx="11"/>
+          </p:nvPr>
+        </p:nvSpPr>
+        <p:spPr/>
+        <p:txBody>
+          <a:bodyPr/>
+          <a:lstStyle/>
+          <a:p>
+            <a:endParaRPr lang="en-US" dirty="0"/>
+          </a:p>
+        </p:txBody>
+      </p:sp>
+      <p:sp>
+        <p:nvSpPr>
+          <p:cNvPr id="6" name="Slide Number Placeholder 5"/>
+          <p:cNvSpPr>
+            <a:spLocks noGrp="1"/>
+          </p:cNvSpPr>
+          <p:nvPr>
+            <p:ph type="sldNum" sz="quarter" idx="12"/>
+          </p:nvPr>
+        </p:nvSpPr>
+        <p:spPr/>
+        <p:txBody>
+          <a:bodyPr/>
+          <a:lstStyle/>
+          <a:p>
+            <a:fld id="{D57F1E4F-1CFF-5643-939E-217C01CDF565}" type="slidenum">
+              <a:rPr lang="en-US" dirty="0"/>
+              <a:pPr/>
+              <a:t>‹#›</a:t>
+            </a:fld>
+            <a:endParaRPr lang="en-US" dirty="0"/>
+          </a:p>
+        </p:txBody>
+      </p:sp>
+    </p:spTree>
+  </p:cSld>
+  <p:clrMapOvr>
+    <a:masterClrMapping/>
+  </p:clrMapOvr>
+</p:sldLayout>
+</file>
+
+<file path=ppt/slideLayouts/slideLayout12.xml><?xml version="1.0" encoding="utf-8"?>
+<p:sldLayout xmlns:a="http://schemas.openxmlformats.org/drawingml/2006/main" xmlns:r="http://schemas.openxmlformats.org/officeDocument/2006/relationships" xmlns:p="http://schemas.openxmlformats.org/presentationml/2006/main" preserve="1">
+  <p:cSld name="Name Card">
+    <p:spTree>
+      <p:nvGrpSpPr>
+        <p:cNvPr id="1" name=""/>
+        <p:cNvGrpSpPr/>
+        <p:nvPr/>
+      </p:nvGrpSpPr>
+      <p:grpSpPr>
+        <a:xfrm>
+          <a:off x="0" y="0"/>
+          <a:ext cx="0" cy="0"/>
+          <a:chOff x="0" y="0"/>
+          <a:chExt cx="0" cy="0"/>
+        </a:xfrm>
+      </p:grpSpPr>
+      <p:sp>
+        <p:nvSpPr>
+          <p:cNvPr id="9" name="Freeform 6"/>
+          <p:cNvSpPr>
+            <a:spLocks noChangeAspect="1"/>
+          </p:cNvSpPr>
+          <p:nvPr/>
+        </p:nvSpPr>
+        <p:spPr bwMode="auto">
+          <a:xfrm>
+            <a:off x="1140884" y="2286585"/>
+            <a:ext cx="4895115" cy="2503972"/>
+          </a:xfrm>
+          <a:custGeom>
+            <a:avLst/>
+            <a:gdLst/>
+            <a:ahLst/>
+            <a:cxnLst/>
+            <a:rect l="0" t="0" r="r" b="b"/>
+            <a:pathLst>
+              <a:path w="3384" h="2308">
+                <a:moveTo>
+                  <a:pt x="3340" y="0"/>
+                </a:moveTo>
+                <a:lnTo>
+                  <a:pt x="44" y="0"/>
+                </a:lnTo>
+                <a:lnTo>
+                  <a:pt x="44" y="0"/>
+                </a:lnTo>
+                <a:lnTo>
+                  <a:pt x="34" y="0"/>
+                </a:lnTo>
+                <a:lnTo>
+                  <a:pt x="26" y="4"/>
+                </a:lnTo>
+                <a:lnTo>
+                  <a:pt x="20" y="8"/>
+                </a:lnTo>
+                <a:lnTo>
+                  <a:pt x="12" y="12"/>
+                </a:lnTo>
+                <a:lnTo>
+                  <a:pt x="8" y="20"/>
+                </a:lnTo>
+                <a:lnTo>
+                  <a:pt x="4" y="26"/>
+                </a:lnTo>
+                <a:lnTo>
+                  <a:pt x="0" y="34"/>
+                </a:lnTo>
+                <a:lnTo>
+                  <a:pt x="0" y="44"/>
+                </a:lnTo>
+                <a:lnTo>
+                  <a:pt x="0" y="2076"/>
+                </a:lnTo>
+                <a:lnTo>
+                  <a:pt x="0" y="2076"/>
+                </a:lnTo>
+                <a:lnTo>
+                  <a:pt x="0" y="2086"/>
+                </a:lnTo>
+                <a:lnTo>
+                  <a:pt x="4" y="2094"/>
+                </a:lnTo>
+                <a:lnTo>
+                  <a:pt x="8" y="2100"/>
+                </a:lnTo>
+                <a:lnTo>
+                  <a:pt x="12" y="2108"/>
+                </a:lnTo>
+                <a:lnTo>
+                  <a:pt x="20" y="2112"/>
+                </a:lnTo>
+                <a:lnTo>
+                  <a:pt x="26" y="2116"/>
+                </a:lnTo>
+                <a:lnTo>
+                  <a:pt x="34" y="2120"/>
+                </a:lnTo>
+                <a:lnTo>
+                  <a:pt x="44" y="2120"/>
+                </a:lnTo>
+                <a:lnTo>
+                  <a:pt x="474" y="2120"/>
+                </a:lnTo>
+                <a:lnTo>
+                  <a:pt x="650" y="2296"/>
+                </a:lnTo>
+                <a:lnTo>
+                  <a:pt x="650" y="2296"/>
+                </a:lnTo>
+                <a:lnTo>
+                  <a:pt x="656" y="2300"/>
+                </a:lnTo>
+                <a:lnTo>
+                  <a:pt x="664" y="2304"/>
+                </a:lnTo>
+                <a:lnTo>
+                  <a:pt x="672" y="2308"/>
+                </a:lnTo>
+                <a:lnTo>
+                  <a:pt x="680" y="2308"/>
+                </a:lnTo>
+                <a:lnTo>
+                  <a:pt x="688" y="2308"/>
+                </a:lnTo>
+                <a:lnTo>
+                  <a:pt x="696" y="2304"/>
+                </a:lnTo>
+                <a:lnTo>
+                  <a:pt x="704" y="2300"/>
+                </a:lnTo>
+                <a:lnTo>
+                  <a:pt x="710" y="2296"/>
+                </a:lnTo>
+                <a:lnTo>
+                  <a:pt x="886" y="2120"/>
+                </a:lnTo>
+                <a:lnTo>
+                  <a:pt x="3340" y="2120"/>
+                </a:lnTo>
+                <a:lnTo>
+                  <a:pt x="3340" y="2120"/>
+                </a:lnTo>
+                <a:lnTo>
+                  <a:pt x="3350" y="2120"/>
+                </a:lnTo>
+                <a:lnTo>
+                  <a:pt x="3358" y="2116"/>
+                </a:lnTo>
+                <a:lnTo>
+                  <a:pt x="3364" y="2112"/>
+                </a:lnTo>
+                <a:lnTo>
+                  <a:pt x="3372" y="2108"/>
+                </a:lnTo>
+                <a:lnTo>
+                  <a:pt x="3376" y="2100"/>
+                </a:lnTo>
+                <a:lnTo>
+                  <a:pt x="3380" y="2094"/>
+                </a:lnTo>
+                <a:lnTo>
+                  <a:pt x="3384" y="2086"/>
+                </a:lnTo>
+                <a:lnTo>
+                  <a:pt x="3384" y="2076"/>
+                </a:lnTo>
+                <a:lnTo>
+                  <a:pt x="3384" y="44"/>
+                </a:lnTo>
+                <a:lnTo>
+                  <a:pt x="3384" y="44"/>
+                </a:lnTo>
+                <a:lnTo>
+                  <a:pt x="3384" y="34"/>
+                </a:lnTo>
+                <a:lnTo>
+                  <a:pt x="3380" y="26"/>
+                </a:lnTo>
+                <a:lnTo>
+                  <a:pt x="3376" y="20"/>
+                </a:lnTo>
+                <a:lnTo>
+                  <a:pt x="3372" y="12"/>
+                </a:lnTo>
+                <a:lnTo>
+                  <a:pt x="3364" y="8"/>
+                </a:lnTo>
+                <a:lnTo>
+                  <a:pt x="3358" y="4"/>
+                </a:lnTo>
+                <a:lnTo>
+                  <a:pt x="3350" y="0"/>
+                </a:lnTo>
+                <a:lnTo>
+                  <a:pt x="3340" y="0"/>
+                </a:lnTo>
+                <a:lnTo>
+                  <a:pt x="3340" y="0"/>
+                </a:lnTo>
+                <a:close/>
+              </a:path>
+            </a:pathLst>
+          </a:custGeom>
+          <a:ln>
+            <a:solidFill>
+              <a:schemeClr val="accent1"/>
+            </a:solidFill>
+          </a:ln>
+        </p:spPr>
+        <p:style>
+          <a:lnRef idx="1">
+            <a:schemeClr val="accent1"/>
+          </a:lnRef>
+          <a:fillRef idx="3">
+            <a:schemeClr val="accent1"/>
+          </a:fillRef>
+          <a:effectRef idx="2">
+            <a:schemeClr val="accent1"/>
+          </a:effectRef>
+          <a:fontRef idx="minor">
+            <a:schemeClr val="lt1"/>
+          </a:fontRef>
+        </p:style>
+      </p:sp>
+      <p:sp>
+        <p:nvSpPr>
+          <p:cNvPr id="38" name="Title 1"/>
+          <p:cNvSpPr>
+            <a:spLocks noGrp="1"/>
+          </p:cNvSpPr>
+          <p:nvPr>
+            <p:ph type="title"/>
+          </p:nvPr>
+        </p:nvSpPr>
+        <p:spPr>
+          <a:xfrm>
+            <a:off x="1357089" y="2435957"/>
+            <a:ext cx="4382521" cy="2007789"/>
+          </a:xfrm>
+        </p:spPr>
+        <p:txBody>
+          <a:bodyPr/>
+          <a:lstStyle>
+            <a:lvl1pPr>
+              <a:defRPr sz="3200"/>
+            </a:lvl1pPr>
+          </a:lstStyle>
+          <a:p>
+            <a:r>
+              <a:rPr lang="en-US"/>
+              <a:t>Click to edit Master title style</a:t>
+            </a:r>
+            <a:endParaRPr lang="en-US" dirty="0"/>
+          </a:p>
+        </p:txBody>
+      </p:sp>
+      <p:sp>
+        <p:nvSpPr>
+          <p:cNvPr id="6" name="Text Placeholder 5"/>
+          <p:cNvSpPr>
+            <a:spLocks noGrp="1"/>
+          </p:cNvSpPr>
+          <p:nvPr>
+            <p:ph type="body" sz="quarter" idx="16"/>
+          </p:nvPr>
+        </p:nvSpPr>
+        <p:spPr>
+          <a:xfrm>
+            <a:off x="6156000" y="2286000"/>
+            <a:ext cx="4880300" cy="2295525"/>
+          </a:xfrm>
+        </p:spPr>
+        <p:txBody>
+          <a:bodyPr anchor="t"/>
+          <a:lstStyle>
+            <a:lvl1pPr marL="0" indent="0">
+              <a:buFontTx/>
+              <a:buNone/>
+              <a:defRPr/>
+            </a:lvl1pPr>
+          </a:lstStyle>
+          <a:p>
+            <a:pPr lvl="0"/>
+            <a:r>
+              <a:rPr lang="en-US"/>
+              <a:t>Edit Master text styles</a:t>
+            </a:r>
+          </a:p>
+        </p:txBody>
+      </p:sp>
+      <p:sp>
+        <p:nvSpPr>
+          <p:cNvPr id="2" name="Date Placeholder 1"/>
+          <p:cNvSpPr>
+            <a:spLocks noGrp="1"/>
+          </p:cNvSpPr>
+          <p:nvPr>
+            <p:ph type="dt" sz="half" idx="10"/>
+          </p:nvPr>
+        </p:nvSpPr>
+        <p:spPr/>
+        <p:txBody>
+          <a:bodyPr/>
+          <a:lstStyle/>
+          <a:p>
+            <a:fld id="{FBF54567-0DE4-3F47-BF90-CB84690072F9}" type="datetimeFigureOut">
+              <a:rPr lang="en-US" dirty="0"/>
+              <a:pPr/>
+              <a:t>12/28/2016</a:t>
+            </a:fld>
+            <a:endParaRPr lang="en-US" dirty="0"/>
+          </a:p>
+        </p:txBody>
+      </p:sp>
+      <p:sp>
+        <p:nvSpPr>
+          <p:cNvPr id="3" name="Footer Placeholder 2"/>
+          <p:cNvSpPr>
+            <a:spLocks noGrp="1"/>
+          </p:cNvSpPr>
+          <p:nvPr>
+            <p:ph type="ftr" sz="quarter" idx="11"/>
+          </p:nvPr>
+        </p:nvSpPr>
+        <p:spPr/>
+        <p:txBody>
+          <a:bodyPr/>
+          <a:lstStyle/>
+          <a:p>
+            <a:endParaRPr lang="en-US" dirty="0"/>
+          </a:p>
+        </p:txBody>
+      </p:sp>
+      <p:sp>
+        <p:nvSpPr>
+          <p:cNvPr id="4" name="Slide Number Placeholder 3"/>
+          <p:cNvSpPr>
+            <a:spLocks noGrp="1"/>
+          </p:cNvSpPr>
+          <p:nvPr>
+            <p:ph type="sldNum" sz="quarter" idx="12"/>
+          </p:nvPr>
+        </p:nvSpPr>
+        <p:spPr/>
+        <p:txBody>
+          <a:bodyPr/>
+          <a:lstStyle/>
+          <a:p>
+            <a:fld id="{D57F1E4F-1CFF-5643-939E-217C01CDF565}" type="slidenum">
+              <a:rPr lang="en-US" dirty="0"/>
+              <a:pPr/>
+              <a:t>‹#›</a:t>
+            </a:fld>
+            <a:endParaRPr lang="en-US" dirty="0"/>
+          </a:p>
+        </p:txBody>
+      </p:sp>
+    </p:spTree>
+  </p:cSld>
+  <p:clrMapOvr>
+    <a:masterClrMapping/>
+  </p:clrMapOvr>
+</p:sldLayout>
+</file>
+
+<file path=ppt/slideLayouts/slideLayout13.xml><?xml version="1.0" encoding="utf-8"?>
 <p:sldLayout xmlns:a="http://schemas.openxmlformats.org/drawingml/2006/main" xmlns:r="http://schemas.openxmlformats.org/officeDocument/2006/relationships" xmlns:p="http://schemas.openxmlformats.org/presentationml/2006/main" type="vertTx" preserve="1">
   <p:cSld name="Title and Vertical Text">
     <p:spTree>
@@ -414,6 +1643,109 @@
       </p:grpSpPr>
       <p:sp>
         <p:nvSpPr>
+          <p:cNvPr id="7" name="Freeform 6"/>
+          <p:cNvSpPr/>
+          <p:nvPr/>
+        </p:nvSpPr>
+        <p:spPr bwMode="auto">
+          <a:xfrm>
+            <a:off x="0" y="0"/>
+            <a:ext cx="12192000" cy="2185988"/>
+          </a:xfrm>
+          <a:custGeom>
+            <a:avLst/>
+            <a:gdLst/>
+            <a:ahLst/>
+            <a:cxnLst/>
+            <a:rect l="0" t="0" r="r" b="b"/>
+            <a:pathLst>
+              <a:path w="5760" h="1377">
+                <a:moveTo>
+                  <a:pt x="5760" y="0"/>
+                </a:moveTo>
+                <a:lnTo>
+                  <a:pt x="0" y="0"/>
+                </a:lnTo>
+                <a:lnTo>
+                  <a:pt x="0" y="1189"/>
+                </a:lnTo>
+                <a:lnTo>
+                  <a:pt x="943" y="1189"/>
+                </a:lnTo>
+                <a:lnTo>
+                  <a:pt x="1123" y="1369"/>
+                </a:lnTo>
+                <a:lnTo>
+                  <a:pt x="1123" y="1369"/>
+                </a:lnTo>
+                <a:lnTo>
+                  <a:pt x="1127" y="1371"/>
+                </a:lnTo>
+                <a:lnTo>
+                  <a:pt x="1133" y="1374"/>
+                </a:lnTo>
+                <a:lnTo>
+                  <a:pt x="1139" y="1377"/>
+                </a:lnTo>
+                <a:lnTo>
+                  <a:pt x="1144" y="1377"/>
+                </a:lnTo>
+                <a:lnTo>
+                  <a:pt x="1150" y="1377"/>
+                </a:lnTo>
+                <a:lnTo>
+                  <a:pt x="1155" y="1374"/>
+                </a:lnTo>
+                <a:lnTo>
+                  <a:pt x="1161" y="1371"/>
+                </a:lnTo>
+                <a:lnTo>
+                  <a:pt x="1165" y="1369"/>
+                </a:lnTo>
+                <a:lnTo>
+                  <a:pt x="1345" y="1189"/>
+                </a:lnTo>
+                <a:lnTo>
+                  <a:pt x="5760" y="1189"/>
+                </a:lnTo>
+                <a:lnTo>
+                  <a:pt x="5760" y="0"/>
+                </a:lnTo>
+                <a:close/>
+              </a:path>
+            </a:pathLst>
+          </a:custGeom>
+          <a:ln/>
+          <a:extLst>
+            <a:ext uri="{91240B29-F687-4f45-9708-019B960494DF}">
+              <a14:hiddenLine xmlns:a14="http://schemas.microsoft.com/office/drawing/2010/main" xmlns="" w="9525">
+                <a:solidFill>
+                  <a:srgbClr val="000000"/>
+                </a:solidFill>
+                <a:round/>
+                <a:headEnd/>
+                <a:tailEnd/>
+              </a14:hiddenLine>
+            </a:ext>
+          </a:extLst>
+        </p:spPr>
+        <p:style>
+          <a:lnRef idx="1">
+            <a:schemeClr val="accent1"/>
+          </a:lnRef>
+          <a:fillRef idx="3">
+            <a:schemeClr val="accent1"/>
+          </a:fillRef>
+          <a:effectRef idx="2">
+            <a:schemeClr val="accent1"/>
+          </a:effectRef>
+          <a:fontRef idx="minor">
+            <a:schemeClr val="lt1"/>
+          </a:fontRef>
+        </p:style>
+      </p:sp>
+      <p:sp>
+        <p:nvSpPr>
           <p:cNvPr id="2" name="Title 1"/>
           <p:cNvSpPr>
             <a:spLocks noGrp="1"/>
@@ -489,7 +1821,7 @@
       </p:sp>
       <p:sp>
         <p:nvSpPr>
-          <p:cNvPr id="7" name="Date Placeholder 6"/>
+          <p:cNvPr id="4" name="Date Placeholder 3"/>
           <p:cNvSpPr>
             <a:spLocks noGrp="1"/>
           </p:cNvSpPr>
@@ -502,10 +1834,10 @@
           <a:bodyPr/>
           <a:lstStyle/>
           <a:p>
-            <a:fld id="{5586B75A-687E-405C-8A0B-8D00578BA2C3}" type="datetimeFigureOut">
+            <a:fld id="{C6C52C72-DE31-F449-A4ED-4C594FD91407}" type="datetimeFigureOut">
               <a:rPr lang="en-US" dirty="0"/>
               <a:pPr/>
-              <a:t>12/26/2016</a:t>
+              <a:t>12/28/2016</a:t>
             </a:fld>
             <a:endParaRPr lang="en-US" dirty="0"/>
           </a:p>
@@ -513,7 +1845,7 @@
       </p:sp>
       <p:sp>
         <p:nvSpPr>
-          <p:cNvPr id="8" name="Footer Placeholder 7"/>
+          <p:cNvPr id="5" name="Footer Placeholder 4"/>
           <p:cNvSpPr>
             <a:spLocks noGrp="1"/>
           </p:cNvSpPr>
@@ -532,7 +1864,7 @@
       </p:sp>
       <p:sp>
         <p:nvSpPr>
-          <p:cNvPr id="9" name="Slide Number Placeholder 8"/>
+          <p:cNvPr id="6" name="Slide Number Placeholder 5"/>
           <p:cNvSpPr>
             <a:spLocks noGrp="1"/>
           </p:cNvSpPr>
@@ -545,7 +1877,7 @@
           <a:bodyPr/>
           <a:lstStyle/>
           <a:p>
-            <a:fld id="{4FAB73BC-B049-4115-A692-8D63A059BFB8}" type="slidenum">
+            <a:fld id="{D57F1E4F-1CFF-5643-939E-217C01CDF565}" type="slidenum">
               <a:rPr lang="en-US" dirty="0"/>
               <a:pPr/>
               <a:t>‹#›</a:t>
@@ -562,7 +1894,7 @@
 </p:sldLayout>
 </file>
 
-<file path=ppt/slideLayouts/slideLayout11.xml><?xml version="1.0" encoding="utf-8"?>
+<file path=ppt/slideLayouts/slideLayout14.xml><?xml version="1.0" encoding="utf-8"?>
 <p:sldLayout xmlns:a="http://schemas.openxmlformats.org/drawingml/2006/main" xmlns:r="http://schemas.openxmlformats.org/officeDocument/2006/relationships" xmlns:p="http://schemas.openxmlformats.org/presentationml/2006/main" type="vertTitleAndTx" preserve="1">
   <p:cSld name="Vertical Title and Text">
     <p:spTree>
@@ -581,6 +1913,111 @@
       </p:grpSpPr>
       <p:sp>
         <p:nvSpPr>
+          <p:cNvPr id="12" name="Freeform 6"/>
+          <p:cNvSpPr>
+            <a:spLocks noChangeAspect="1"/>
+          </p:cNvSpPr>
+          <p:nvPr/>
+        </p:nvSpPr>
+        <p:spPr bwMode="auto">
+          <a:xfrm>
+            <a:off x="7669651" y="446089"/>
+            <a:ext cx="4522349" cy="5414962"/>
+          </a:xfrm>
+          <a:custGeom>
+            <a:avLst/>
+            <a:gdLst/>
+            <a:ahLst/>
+            <a:cxnLst/>
+            <a:rect l="0" t="0" r="r" b="b"/>
+            <a:pathLst>
+              <a:path w="2879" h="4320">
+                <a:moveTo>
+                  <a:pt x="183" y="0"/>
+                </a:moveTo>
+                <a:lnTo>
+                  <a:pt x="183" y="1197"/>
+                </a:lnTo>
+                <a:lnTo>
+                  <a:pt x="8" y="1372"/>
+                </a:lnTo>
+                <a:lnTo>
+                  <a:pt x="8" y="1372"/>
+                </a:lnTo>
+                <a:lnTo>
+                  <a:pt x="6" y="1376"/>
+                </a:lnTo>
+                <a:lnTo>
+                  <a:pt x="3" y="1382"/>
+                </a:lnTo>
+                <a:lnTo>
+                  <a:pt x="0" y="1387"/>
+                </a:lnTo>
+                <a:lnTo>
+                  <a:pt x="0" y="1393"/>
+                </a:lnTo>
+                <a:lnTo>
+                  <a:pt x="0" y="1399"/>
+                </a:lnTo>
+                <a:lnTo>
+                  <a:pt x="3" y="1404"/>
+                </a:lnTo>
+                <a:lnTo>
+                  <a:pt x="6" y="1410"/>
+                </a:lnTo>
+                <a:lnTo>
+                  <a:pt x="8" y="1414"/>
+                </a:lnTo>
+                <a:lnTo>
+                  <a:pt x="183" y="1589"/>
+                </a:lnTo>
+                <a:lnTo>
+                  <a:pt x="183" y="4320"/>
+                </a:lnTo>
+                <a:lnTo>
+                  <a:pt x="2879" y="4320"/>
+                </a:lnTo>
+                <a:lnTo>
+                  <a:pt x="2879" y="0"/>
+                </a:lnTo>
+                <a:lnTo>
+                  <a:pt x="183" y="0"/>
+                </a:lnTo>
+                <a:close/>
+              </a:path>
+            </a:pathLst>
+          </a:custGeom>
+          <a:ln/>
+          <a:extLst>
+            <a:ext uri="{91240B29-F687-4f45-9708-019B960494DF}">
+              <a14:hiddenLine xmlns:a14="http://schemas.microsoft.com/office/drawing/2010/main" xmlns="" w="9525">
+                <a:solidFill>
+                  <a:srgbClr val="000000"/>
+                </a:solidFill>
+                <a:round/>
+                <a:headEnd/>
+                <a:tailEnd/>
+              </a14:hiddenLine>
+            </a:ext>
+          </a:extLst>
+        </p:spPr>
+        <p:style>
+          <a:lnRef idx="1">
+            <a:schemeClr val="accent1"/>
+          </a:lnRef>
+          <a:fillRef idx="3">
+            <a:schemeClr val="accent1"/>
+          </a:fillRef>
+          <a:effectRef idx="2">
+            <a:schemeClr val="accent1"/>
+          </a:effectRef>
+          <a:fontRef idx="minor">
+            <a:schemeClr val="lt1"/>
+          </a:fontRef>
+        </p:style>
+      </p:sp>
+      <p:sp>
+        <p:nvSpPr>
           <p:cNvPr id="2" name="Vertical Title 1"/>
           <p:cNvSpPr>
             <a:spLocks noGrp="1"/>
@@ -591,8 +2028,8 @@
         </p:nvSpPr>
         <p:spPr>
           <a:xfrm>
-            <a:off x="381000" y="990600"/>
-            <a:ext cx="2819400" cy="4953000"/>
+            <a:off x="8183540" y="586171"/>
+            <a:ext cx="2494791" cy="5134798"/>
           </a:xfrm>
         </p:spPr>
         <p:txBody>
@@ -619,8 +2056,8 @@
         </p:nvSpPr>
         <p:spPr>
           <a:xfrm>
-            <a:off x="3867912" y="868680"/>
-            <a:ext cx="7315200" cy="5120640"/>
+            <a:off x="810001" y="446089"/>
+            <a:ext cx="6611540" cy="5414962"/>
           </a:xfrm>
         </p:spPr>
         <p:txBody>
@@ -666,7 +2103,7 @@
       </p:sp>
       <p:sp>
         <p:nvSpPr>
-          <p:cNvPr id="7" name="Date Placeholder 6"/>
+          <p:cNvPr id="4" name="Date Placeholder 3"/>
           <p:cNvSpPr>
             <a:spLocks noGrp="1"/>
           </p:cNvSpPr>
@@ -679,10 +2116,10 @@
           <a:bodyPr/>
           <a:lstStyle/>
           <a:p>
-            <a:fld id="{5586B75A-687E-405C-8A0B-8D00578BA2C3}" type="datetimeFigureOut">
+            <a:fld id="{ED62726E-379B-B349-9EED-81ED093FA806}" type="datetimeFigureOut">
               <a:rPr lang="en-US" dirty="0"/>
               <a:pPr/>
-              <a:t>12/26/2016</a:t>
+              <a:t>12/28/2016</a:t>
             </a:fld>
             <a:endParaRPr lang="en-US" dirty="0"/>
           </a:p>
@@ -690,7 +2127,7 @@
       </p:sp>
       <p:sp>
         <p:nvSpPr>
-          <p:cNvPr id="8" name="Footer Placeholder 7"/>
+          <p:cNvPr id="5" name="Footer Placeholder 4"/>
           <p:cNvSpPr>
             <a:spLocks noGrp="1"/>
           </p:cNvSpPr>
@@ -709,7 +2146,7 @@
       </p:sp>
       <p:sp>
         <p:nvSpPr>
-          <p:cNvPr id="9" name="Slide Number Placeholder 8"/>
+          <p:cNvPr id="6" name="Slide Number Placeholder 5"/>
           <p:cNvSpPr>
             <a:spLocks noGrp="1"/>
           </p:cNvSpPr>
@@ -722,7 +2159,7 @@
           <a:bodyPr/>
           <a:lstStyle/>
           <a:p>
-            <a:fld id="{4FAB73BC-B049-4115-A692-8D63A059BFB8}" type="slidenum">
+            <a:fld id="{D57F1E4F-1CFF-5643-939E-217C01CDF565}" type="slidenum">
               <a:rPr lang="en-US" dirty="0"/>
               <a:pPr/>
               <a:t>‹#›</a:t>
@@ -758,6 +2195,109 @@
       </p:grpSpPr>
       <p:sp>
         <p:nvSpPr>
+          <p:cNvPr id="11" name="Freeform 6"/>
+          <p:cNvSpPr/>
+          <p:nvPr/>
+        </p:nvSpPr>
+        <p:spPr bwMode="auto">
+          <a:xfrm>
+            <a:off x="0" y="0"/>
+            <a:ext cx="12192000" cy="2185988"/>
+          </a:xfrm>
+          <a:custGeom>
+            <a:avLst/>
+            <a:gdLst/>
+            <a:ahLst/>
+            <a:cxnLst/>
+            <a:rect l="0" t="0" r="r" b="b"/>
+            <a:pathLst>
+              <a:path w="5760" h="1377">
+                <a:moveTo>
+                  <a:pt x="5760" y="0"/>
+                </a:moveTo>
+                <a:lnTo>
+                  <a:pt x="0" y="0"/>
+                </a:lnTo>
+                <a:lnTo>
+                  <a:pt x="0" y="1189"/>
+                </a:lnTo>
+                <a:lnTo>
+                  <a:pt x="943" y="1189"/>
+                </a:lnTo>
+                <a:lnTo>
+                  <a:pt x="1123" y="1369"/>
+                </a:lnTo>
+                <a:lnTo>
+                  <a:pt x="1123" y="1369"/>
+                </a:lnTo>
+                <a:lnTo>
+                  <a:pt x="1127" y="1371"/>
+                </a:lnTo>
+                <a:lnTo>
+                  <a:pt x="1133" y="1374"/>
+                </a:lnTo>
+                <a:lnTo>
+                  <a:pt x="1139" y="1377"/>
+                </a:lnTo>
+                <a:lnTo>
+                  <a:pt x="1144" y="1377"/>
+                </a:lnTo>
+                <a:lnTo>
+                  <a:pt x="1150" y="1377"/>
+                </a:lnTo>
+                <a:lnTo>
+                  <a:pt x="1155" y="1374"/>
+                </a:lnTo>
+                <a:lnTo>
+                  <a:pt x="1161" y="1371"/>
+                </a:lnTo>
+                <a:lnTo>
+                  <a:pt x="1165" y="1369"/>
+                </a:lnTo>
+                <a:lnTo>
+                  <a:pt x="1345" y="1189"/>
+                </a:lnTo>
+                <a:lnTo>
+                  <a:pt x="5760" y="1189"/>
+                </a:lnTo>
+                <a:lnTo>
+                  <a:pt x="5760" y="0"/>
+                </a:lnTo>
+                <a:close/>
+              </a:path>
+            </a:pathLst>
+          </a:custGeom>
+          <a:ln/>
+          <a:extLst>
+            <a:ext uri="{91240B29-F687-4f45-9708-019B960494DF}">
+              <a14:hiddenLine xmlns:a14="http://schemas.microsoft.com/office/drawing/2010/main" xmlns="" w="9525">
+                <a:solidFill>
+                  <a:srgbClr val="000000"/>
+                </a:solidFill>
+                <a:round/>
+                <a:headEnd/>
+                <a:tailEnd/>
+              </a14:hiddenLine>
+            </a:ext>
+          </a:extLst>
+        </p:spPr>
+        <p:style>
+          <a:lnRef idx="1">
+            <a:schemeClr val="accent1"/>
+          </a:lnRef>
+          <a:fillRef idx="3">
+            <a:schemeClr val="accent1"/>
+          </a:fillRef>
+          <a:effectRef idx="2">
+            <a:schemeClr val="accent1"/>
+          </a:effectRef>
+          <a:fontRef idx="minor">
+            <a:schemeClr val="lt1"/>
+          </a:fontRef>
+        </p:style>
+      </p:sp>
+      <p:sp>
+        <p:nvSpPr>
           <p:cNvPr id="2" name="Title 1"/>
           <p:cNvSpPr>
             <a:spLocks noGrp="1"/>
@@ -766,90 +2306,100 @@
             <p:ph type="title"/>
           </p:nvPr>
         </p:nvSpPr>
+        <p:spPr>
+          <a:xfrm>
+            <a:off x="810000" y="447188"/>
+            <a:ext cx="10571998" cy="970450"/>
+          </a:xfrm>
+        </p:spPr>
+        <p:txBody>
+          <a:bodyPr/>
+          <a:lstStyle/>
+          <a:p>
+            <a:r>
+              <a:rPr lang="en-US"/>
+              <a:t>Click to edit Master title style</a:t>
+            </a:r>
+            <a:endParaRPr lang="en-US" dirty="0"/>
+          </a:p>
+        </p:txBody>
+      </p:sp>
+      <p:sp>
+        <p:nvSpPr>
+          <p:cNvPr id="3" name="Content Placeholder 2"/>
+          <p:cNvSpPr>
+            <a:spLocks noGrp="1"/>
+          </p:cNvSpPr>
+          <p:nvPr>
+            <p:ph idx="1"/>
+          </p:nvPr>
+        </p:nvSpPr>
+        <p:spPr>
+          <a:xfrm>
+            <a:off x="818712" y="2222287"/>
+            <a:ext cx="10554574" cy="3636511"/>
+          </a:xfrm>
+        </p:spPr>
+        <p:txBody>
+          <a:bodyPr/>
+          <a:lstStyle/>
+          <a:p>
+            <a:pPr lvl="0"/>
+            <a:r>
+              <a:rPr lang="en-US"/>
+              <a:t>Edit Master text styles</a:t>
+            </a:r>
+          </a:p>
+          <a:p>
+            <a:pPr lvl="1"/>
+            <a:r>
+              <a:rPr lang="en-US"/>
+              <a:t>Second level</a:t>
+            </a:r>
+          </a:p>
+          <a:p>
+            <a:pPr lvl="2"/>
+            <a:r>
+              <a:rPr lang="en-US"/>
+              <a:t>Third level</a:t>
+            </a:r>
+          </a:p>
+          <a:p>
+            <a:pPr lvl="3"/>
+            <a:r>
+              <a:rPr lang="en-US"/>
+              <a:t>Fourth level</a:t>
+            </a:r>
+          </a:p>
+          <a:p>
+            <a:pPr lvl="4"/>
+            <a:r>
+              <a:rPr lang="en-US"/>
+              <a:t>Fifth level</a:t>
+            </a:r>
+            <a:endParaRPr lang="en-US" dirty="0"/>
+          </a:p>
+        </p:txBody>
+      </p:sp>
+      <p:sp>
+        <p:nvSpPr>
+          <p:cNvPr id="4" name="Date Placeholder 3"/>
+          <p:cNvSpPr>
+            <a:spLocks noGrp="1"/>
+          </p:cNvSpPr>
+          <p:nvPr>
+            <p:ph type="dt" sz="half" idx="10"/>
+          </p:nvPr>
+        </p:nvSpPr>
         <p:spPr/>
         <p:txBody>
           <a:bodyPr/>
           <a:lstStyle/>
           <a:p>
-            <a:r>
-              <a:rPr lang="en-US"/>
-              <a:t>Click to edit Master title style</a:t>
-            </a:r>
-            <a:endParaRPr lang="en-US" dirty="0"/>
-          </a:p>
-        </p:txBody>
-      </p:sp>
-      <p:sp>
-        <p:nvSpPr>
-          <p:cNvPr id="3" name="Content Placeholder 2"/>
-          <p:cNvSpPr>
-            <a:spLocks noGrp="1"/>
-          </p:cNvSpPr>
-          <p:nvPr>
-            <p:ph idx="1"/>
-          </p:nvPr>
-        </p:nvSpPr>
-        <p:spPr/>
-        <p:txBody>
-          <a:bodyPr/>
-          <a:lstStyle/>
-          <a:p>
-            <a:pPr lvl="0"/>
-            <a:r>
-              <a:rPr lang="en-US"/>
-              <a:t>Edit Master text styles</a:t>
-            </a:r>
-          </a:p>
-          <a:p>
-            <a:pPr lvl="1"/>
-            <a:r>
-              <a:rPr lang="en-US"/>
-              <a:t>Second level</a:t>
-            </a:r>
-          </a:p>
-          <a:p>
-            <a:pPr lvl="2"/>
-            <a:r>
-              <a:rPr lang="en-US"/>
-              <a:t>Third level</a:t>
-            </a:r>
-          </a:p>
-          <a:p>
-            <a:pPr lvl="3"/>
-            <a:r>
-              <a:rPr lang="en-US"/>
-              <a:t>Fourth level</a:t>
-            </a:r>
-          </a:p>
-          <a:p>
-            <a:pPr lvl="4"/>
-            <a:r>
-              <a:rPr lang="en-US"/>
-              <a:t>Fifth level</a:t>
-            </a:r>
-            <a:endParaRPr lang="en-US" dirty="0"/>
-          </a:p>
-        </p:txBody>
-      </p:sp>
-      <p:sp>
-        <p:nvSpPr>
-          <p:cNvPr id="4" name="Date Placeholder 3"/>
-          <p:cNvSpPr>
-            <a:spLocks noGrp="1"/>
-          </p:cNvSpPr>
-          <p:nvPr>
-            <p:ph type="dt" sz="half" idx="10"/>
-          </p:nvPr>
-        </p:nvSpPr>
-        <p:spPr/>
-        <p:txBody>
-          <a:bodyPr/>
-          <a:lstStyle/>
-          <a:p>
-            <a:fld id="{5586B75A-687E-405C-8A0B-8D00578BA2C3}" type="datetimeFigureOut">
+            <a:fld id="{9B3A1323-8D79-1946-B0D7-40001CF92E9D}" type="datetimeFigureOut">
               <a:rPr lang="en-US" dirty="0"/>
               <a:pPr/>
-              <a:t>12/26/2016</a:t>
+              <a:t>12/28/2016</a:t>
             </a:fld>
             <a:endParaRPr lang="en-US" dirty="0"/>
           </a:p>
@@ -889,7 +2439,7 @@
           <a:bodyPr/>
           <a:lstStyle/>
           <a:p>
-            <a:fld id="{4FAB73BC-B049-4115-A692-8D63A059BFB8}" type="slidenum">
+            <a:fld id="{D57F1E4F-1CFF-5643-939E-217C01CDF565}" type="slidenum">
               <a:rPr lang="en-US" dirty="0"/>
               <a:pPr/>
               <a:t>‹#›</a:t>
@@ -925,6 +2475,103 @@
       </p:grpSpPr>
       <p:sp>
         <p:nvSpPr>
+          <p:cNvPr id="10" name="Freeform 7"/>
+          <p:cNvSpPr/>
+          <p:nvPr/>
+        </p:nvSpPr>
+        <p:spPr bwMode="auto">
+          <a:xfrm>
+            <a:off x="0" y="1"/>
+            <a:ext cx="12192000" cy="5203825"/>
+          </a:xfrm>
+          <a:custGeom>
+            <a:avLst/>
+            <a:gdLst/>
+            <a:ahLst/>
+            <a:cxnLst/>
+            <a:rect l="0" t="0" r="r" b="b"/>
+            <a:pathLst>
+              <a:path w="5760" h="3278">
+                <a:moveTo>
+                  <a:pt x="0" y="0"/>
+                </a:moveTo>
+                <a:lnTo>
+                  <a:pt x="5760" y="0"/>
+                </a:lnTo>
+                <a:lnTo>
+                  <a:pt x="5760" y="3090"/>
+                </a:lnTo>
+                <a:lnTo>
+                  <a:pt x="4817" y="3090"/>
+                </a:lnTo>
+                <a:lnTo>
+                  <a:pt x="4637" y="3270"/>
+                </a:lnTo>
+                <a:lnTo>
+                  <a:pt x="4637" y="3270"/>
+                </a:lnTo>
+                <a:lnTo>
+                  <a:pt x="4633" y="3272"/>
+                </a:lnTo>
+                <a:lnTo>
+                  <a:pt x="4627" y="3275"/>
+                </a:lnTo>
+                <a:lnTo>
+                  <a:pt x="4621" y="3278"/>
+                </a:lnTo>
+                <a:lnTo>
+                  <a:pt x="4616" y="3278"/>
+                </a:lnTo>
+                <a:lnTo>
+                  <a:pt x="4610" y="3278"/>
+                </a:lnTo>
+                <a:lnTo>
+                  <a:pt x="4605" y="3275"/>
+                </a:lnTo>
+                <a:lnTo>
+                  <a:pt x="4599" y="3272"/>
+                </a:lnTo>
+                <a:lnTo>
+                  <a:pt x="4595" y="3270"/>
+                </a:lnTo>
+                <a:lnTo>
+                  <a:pt x="4415" y="3090"/>
+                </a:lnTo>
+                <a:lnTo>
+                  <a:pt x="0" y="3090"/>
+                </a:lnTo>
+                <a:lnTo>
+                  <a:pt x="0" y="0"/>
+                </a:lnTo>
+                <a:lnTo>
+                  <a:pt x="0" y="0"/>
+                </a:lnTo>
+                <a:close/>
+              </a:path>
+            </a:pathLst>
+          </a:custGeom>
+          <a:ln>
+            <a:headEnd/>
+            <a:tailEnd/>
+          </a:ln>
+        </p:spPr>
+        <p:style>
+          <a:lnRef idx="1">
+            <a:schemeClr val="accent1"/>
+          </a:lnRef>
+          <a:fillRef idx="3">
+            <a:schemeClr val="accent1"/>
+          </a:fillRef>
+          <a:effectRef idx="2">
+            <a:schemeClr val="accent1"/>
+          </a:effectRef>
+          <a:fontRef idx="minor">
+            <a:schemeClr val="lt1"/>
+          </a:fontRef>
+        </p:style>
+      </p:sp>
+      <p:sp>
+        <p:nvSpPr>
           <p:cNvPr id="2" name="Title 1"/>
           <p:cNvSpPr>
             <a:spLocks noGrp="1"/>
@@ -935,64 +2582,52 @@
         </p:nvSpPr>
         <p:spPr>
           <a:xfrm>
-            <a:off x="3867912" y="1298448"/>
-            <a:ext cx="7315200" cy="3255264"/>
+            <a:off x="810000" y="2951396"/>
+            <a:ext cx="10561418" cy="1468800"/>
           </a:xfrm>
         </p:spPr>
         <p:txBody>
-          <a:bodyPr anchor="b">
-            <a:normAutofit/>
+          <a:bodyPr anchor="b"/>
+          <a:lstStyle>
+            <a:lvl1pPr algn="r">
+              <a:defRPr sz="4800" b="1" cap="none"/>
+            </a:lvl1pPr>
+          </a:lstStyle>
+          <a:p>
+            <a:r>
+              <a:rPr lang="en-US"/>
+              <a:t>Click to edit Master title style</a:t>
+            </a:r>
+            <a:endParaRPr lang="en-US" dirty="0"/>
+          </a:p>
+        </p:txBody>
+      </p:sp>
+      <p:sp>
+        <p:nvSpPr>
+          <p:cNvPr id="3" name="Text Placeholder 2"/>
+          <p:cNvSpPr>
+            <a:spLocks noGrp="1"/>
+          </p:cNvSpPr>
+          <p:nvPr>
+            <p:ph type="body" idx="1"/>
+          </p:nvPr>
+        </p:nvSpPr>
+        <p:spPr>
+          <a:xfrm>
+            <a:off x="810000" y="5281201"/>
+            <a:ext cx="10561418" cy="433955"/>
+          </a:xfrm>
+        </p:spPr>
+        <p:txBody>
+          <a:bodyPr anchor="t">
+            <a:noAutofit/>
           </a:bodyPr>
           <a:lstStyle>
-            <a:lvl1pPr>
-              <a:defRPr sz="5900" b="0" spc="-100" baseline="0">
+            <a:lvl1pPr marL="0" indent="0" algn="r">
+              <a:buNone/>
+              <a:defRPr sz="1800">
                 <a:solidFill>
-                  <a:schemeClr val="tx1">
-                    <a:lumMod val="65000"/>
-                    <a:lumOff val="35000"/>
-                  </a:schemeClr>
-                </a:solidFill>
-              </a:defRPr>
-            </a:lvl1pPr>
-          </a:lstStyle>
-          <a:p>
-            <a:r>
-              <a:rPr lang="en-US"/>
-              <a:t>Click to edit Master title style</a:t>
-            </a:r>
-            <a:endParaRPr lang="en-US" dirty="0"/>
-          </a:p>
-        </p:txBody>
-      </p:sp>
-      <p:sp>
-        <p:nvSpPr>
-          <p:cNvPr id="3" name="Text Placeholder 2"/>
-          <p:cNvSpPr>
-            <a:spLocks noGrp="1"/>
-          </p:cNvSpPr>
-          <p:nvPr>
-            <p:ph type="body" idx="1"/>
-          </p:nvPr>
-        </p:nvSpPr>
-        <p:spPr>
-          <a:xfrm>
-            <a:off x="3886200" y="4672584"/>
-            <a:ext cx="7315200" cy="914400"/>
-          </a:xfrm>
-        </p:spPr>
-        <p:txBody>
-          <a:bodyPr anchor="t">
-            <a:normAutofit/>
-          </a:bodyPr>
-          <a:lstStyle>
-            <a:lvl1pPr marL="0" indent="0">
-              <a:buNone/>
-              <a:defRPr sz="2200" cap="none" spc="0" baseline="0">
-                <a:solidFill>
-                  <a:schemeClr val="tx1">
-                    <a:lumMod val="65000"/>
-                    <a:lumOff val="35000"/>
-                  </a:schemeClr>
+                  <a:schemeClr val="tx1"/>
                 </a:solidFill>
               </a:defRPr>
             </a:lvl1pPr>
@@ -1101,10 +2736,10 @@
           <a:bodyPr/>
           <a:lstStyle/>
           <a:p>
-            <a:fld id="{5586B75A-687E-405C-8A0B-8D00578BA2C3}" type="datetimeFigureOut">
+            <a:fld id="{8DFA1846-DA80-1C48-A609-854EA85C59AD}" type="datetimeFigureOut">
               <a:rPr lang="en-US" dirty="0"/>
               <a:pPr/>
-              <a:t>12/26/2016</a:t>
+              <a:t>12/28/2016</a:t>
             </a:fld>
             <a:endParaRPr lang="en-US" dirty="0"/>
           </a:p>
@@ -1144,7 +2779,7 @@
           <a:bodyPr/>
           <a:lstStyle/>
           <a:p>
-            <a:fld id="{4FAB73BC-B049-4115-A692-8D63A059BFB8}" type="slidenum">
+            <a:fld id="{D57F1E4F-1CFF-5643-939E-217C01CDF565}" type="slidenum">
               <a:rPr lang="en-US" dirty="0"/>
               <a:pPr/>
               <a:t>‹#›</a:t>
@@ -1180,6 +2815,109 @@
       </p:grpSpPr>
       <p:sp>
         <p:nvSpPr>
+          <p:cNvPr id="8" name="Freeform 6"/>
+          <p:cNvSpPr/>
+          <p:nvPr/>
+        </p:nvSpPr>
+        <p:spPr bwMode="auto">
+          <a:xfrm>
+            <a:off x="0" y="0"/>
+            <a:ext cx="12192000" cy="2185988"/>
+          </a:xfrm>
+          <a:custGeom>
+            <a:avLst/>
+            <a:gdLst/>
+            <a:ahLst/>
+            <a:cxnLst/>
+            <a:rect l="0" t="0" r="r" b="b"/>
+            <a:pathLst>
+              <a:path w="5760" h="1377">
+                <a:moveTo>
+                  <a:pt x="5760" y="0"/>
+                </a:moveTo>
+                <a:lnTo>
+                  <a:pt x="0" y="0"/>
+                </a:lnTo>
+                <a:lnTo>
+                  <a:pt x="0" y="1189"/>
+                </a:lnTo>
+                <a:lnTo>
+                  <a:pt x="943" y="1189"/>
+                </a:lnTo>
+                <a:lnTo>
+                  <a:pt x="1123" y="1369"/>
+                </a:lnTo>
+                <a:lnTo>
+                  <a:pt x="1123" y="1369"/>
+                </a:lnTo>
+                <a:lnTo>
+                  <a:pt x="1127" y="1371"/>
+                </a:lnTo>
+                <a:lnTo>
+                  <a:pt x="1133" y="1374"/>
+                </a:lnTo>
+                <a:lnTo>
+                  <a:pt x="1139" y="1377"/>
+                </a:lnTo>
+                <a:lnTo>
+                  <a:pt x="1144" y="1377"/>
+                </a:lnTo>
+                <a:lnTo>
+                  <a:pt x="1150" y="1377"/>
+                </a:lnTo>
+                <a:lnTo>
+                  <a:pt x="1155" y="1374"/>
+                </a:lnTo>
+                <a:lnTo>
+                  <a:pt x="1161" y="1371"/>
+                </a:lnTo>
+                <a:lnTo>
+                  <a:pt x="1165" y="1369"/>
+                </a:lnTo>
+                <a:lnTo>
+                  <a:pt x="1345" y="1189"/>
+                </a:lnTo>
+                <a:lnTo>
+                  <a:pt x="5760" y="1189"/>
+                </a:lnTo>
+                <a:lnTo>
+                  <a:pt x="5760" y="0"/>
+                </a:lnTo>
+                <a:close/>
+              </a:path>
+            </a:pathLst>
+          </a:custGeom>
+          <a:ln/>
+          <a:extLst>
+            <a:ext uri="{91240B29-F687-4f45-9708-019B960494DF}">
+              <a14:hiddenLine xmlns:a14="http://schemas.microsoft.com/office/drawing/2010/main" xmlns="" w="9525">
+                <a:solidFill>
+                  <a:srgbClr val="000000"/>
+                </a:solidFill>
+                <a:round/>
+                <a:headEnd/>
+                <a:tailEnd/>
+              </a14:hiddenLine>
+            </a:ext>
+          </a:extLst>
+        </p:spPr>
+        <p:style>
+          <a:lnRef idx="1">
+            <a:schemeClr val="accent1"/>
+          </a:lnRef>
+          <a:fillRef idx="3">
+            <a:schemeClr val="accent1"/>
+          </a:fillRef>
+          <a:effectRef idx="2">
+            <a:schemeClr val="accent1"/>
+          </a:effectRef>
+          <a:fontRef idx="minor">
+            <a:schemeClr val="lt1"/>
+          </a:fontRef>
+        </p:style>
+      </p:sp>
+      <p:sp>
+        <p:nvSpPr>
           <p:cNvPr id="2" name="Title 1"/>
           <p:cNvSpPr>
             <a:spLocks noGrp="1"/>
@@ -1213,41 +2951,15 @@
         </p:nvSpPr>
         <p:spPr>
           <a:xfrm>
-            <a:off x="3867912" y="868680"/>
-            <a:ext cx="3474720" cy="5120640"/>
+            <a:off x="818712" y="2222287"/>
+            <a:ext cx="5185873" cy="3638763"/>
           </a:xfrm>
         </p:spPr>
         <p:txBody>
-          <a:bodyPr/>
-          <a:lstStyle>
-            <a:lvl1pPr>
-              <a:defRPr sz="2000"/>
-            </a:lvl1pPr>
-            <a:lvl2pPr>
-              <a:defRPr sz="1800"/>
-            </a:lvl2pPr>
-            <a:lvl3pPr>
-              <a:defRPr sz="1600"/>
-            </a:lvl3pPr>
-            <a:lvl4pPr>
-              <a:defRPr sz="1400"/>
-            </a:lvl4pPr>
-            <a:lvl5pPr>
-              <a:defRPr sz="1400"/>
-            </a:lvl5pPr>
-            <a:lvl6pPr>
-              <a:defRPr sz="1400"/>
-            </a:lvl6pPr>
-            <a:lvl7pPr>
-              <a:defRPr sz="1400"/>
-            </a:lvl7pPr>
-            <a:lvl8pPr>
-              <a:defRPr sz="1400"/>
-            </a:lvl8pPr>
-            <a:lvl9pPr>
-              <a:defRPr sz="1400"/>
-            </a:lvl9pPr>
-          </a:lstStyle>
+          <a:bodyPr>
+            <a:normAutofit/>
+          </a:bodyPr>
+          <a:lstStyle/>
           <a:p>
             <a:pPr lvl="0"/>
             <a:r>
@@ -1298,41 +3010,15 @@
         </p:nvSpPr>
         <p:spPr>
           <a:xfrm>
-            <a:off x="7818120" y="868680"/>
-            <a:ext cx="3474720" cy="5120640"/>
+            <a:off x="6187415" y="2222287"/>
+            <a:ext cx="5194583" cy="3638764"/>
           </a:xfrm>
         </p:spPr>
         <p:txBody>
-          <a:bodyPr/>
-          <a:lstStyle>
-            <a:lvl1pPr>
-              <a:defRPr sz="2000"/>
-            </a:lvl1pPr>
-            <a:lvl2pPr>
-              <a:defRPr sz="1800"/>
-            </a:lvl2pPr>
-            <a:lvl3pPr>
-              <a:defRPr sz="1600"/>
-            </a:lvl3pPr>
-            <a:lvl4pPr>
-              <a:defRPr sz="1400"/>
-            </a:lvl4pPr>
-            <a:lvl5pPr>
-              <a:defRPr sz="1400"/>
-            </a:lvl5pPr>
-            <a:lvl6pPr>
-              <a:defRPr sz="1400"/>
-            </a:lvl6pPr>
-            <a:lvl7pPr>
-              <a:defRPr sz="1400"/>
-            </a:lvl7pPr>
-            <a:lvl8pPr>
-              <a:defRPr sz="1400"/>
-            </a:lvl8pPr>
-            <a:lvl9pPr>
-              <a:defRPr sz="1400"/>
-            </a:lvl9pPr>
-          </a:lstStyle>
+          <a:bodyPr>
+            <a:normAutofit/>
+          </a:bodyPr>
+          <a:lstStyle/>
           <a:p>
             <a:pPr lvl="0"/>
             <a:r>
@@ -1373,7 +3059,7 @@
       </p:sp>
       <p:sp>
         <p:nvSpPr>
-          <p:cNvPr id="8" name="Date Placeholder 7"/>
+          <p:cNvPr id="5" name="Date Placeholder 4"/>
           <p:cNvSpPr>
             <a:spLocks noGrp="1"/>
           </p:cNvSpPr>
@@ -1386,10 +3072,10 @@
           <a:bodyPr/>
           <a:lstStyle/>
           <a:p>
-            <a:fld id="{5586B75A-687E-405C-8A0B-8D00578BA2C3}" type="datetimeFigureOut">
+            <a:fld id="{57302355-E14B-8545-A8F8-0FE83CC9D524}" type="datetimeFigureOut">
               <a:rPr lang="en-US" dirty="0"/>
               <a:pPr/>
-              <a:t>12/26/2016</a:t>
+              <a:t>12/28/2016</a:t>
             </a:fld>
             <a:endParaRPr lang="en-US" dirty="0"/>
           </a:p>
@@ -1397,7 +3083,7 @@
       </p:sp>
       <p:sp>
         <p:nvSpPr>
-          <p:cNvPr id="9" name="Footer Placeholder 8"/>
+          <p:cNvPr id="6" name="Footer Placeholder 5"/>
           <p:cNvSpPr>
             <a:spLocks noGrp="1"/>
           </p:cNvSpPr>
@@ -1416,7 +3102,7 @@
       </p:sp>
       <p:sp>
         <p:nvSpPr>
-          <p:cNvPr id="10" name="Slide Number Placeholder 9"/>
+          <p:cNvPr id="7" name="Slide Number Placeholder 6"/>
           <p:cNvSpPr>
             <a:spLocks noGrp="1"/>
           </p:cNvSpPr>
@@ -1429,7 +3115,7 @@
           <a:bodyPr/>
           <a:lstStyle/>
           <a:p>
-            <a:fld id="{4FAB73BC-B049-4115-A692-8D63A059BFB8}" type="slidenum">
+            <a:fld id="{D57F1E4F-1CFF-5643-939E-217C01CDF565}" type="slidenum">
               <a:rPr lang="en-US" dirty="0"/>
               <a:pPr/>
               <a:t>‹#›</a:t>
@@ -1465,7 +3151,110 @@
       </p:grpSpPr>
       <p:sp>
         <p:nvSpPr>
-          <p:cNvPr id="10" name="Title 9"/>
+          <p:cNvPr id="10" name="Freeform 6"/>
+          <p:cNvSpPr/>
+          <p:nvPr/>
+        </p:nvSpPr>
+        <p:spPr bwMode="auto">
+          <a:xfrm>
+            <a:off x="0" y="0"/>
+            <a:ext cx="12192000" cy="2185988"/>
+          </a:xfrm>
+          <a:custGeom>
+            <a:avLst/>
+            <a:gdLst/>
+            <a:ahLst/>
+            <a:cxnLst/>
+            <a:rect l="0" t="0" r="r" b="b"/>
+            <a:pathLst>
+              <a:path w="5760" h="1377">
+                <a:moveTo>
+                  <a:pt x="5760" y="0"/>
+                </a:moveTo>
+                <a:lnTo>
+                  <a:pt x="0" y="0"/>
+                </a:lnTo>
+                <a:lnTo>
+                  <a:pt x="0" y="1189"/>
+                </a:lnTo>
+                <a:lnTo>
+                  <a:pt x="943" y="1189"/>
+                </a:lnTo>
+                <a:lnTo>
+                  <a:pt x="1123" y="1369"/>
+                </a:lnTo>
+                <a:lnTo>
+                  <a:pt x="1123" y="1369"/>
+                </a:lnTo>
+                <a:lnTo>
+                  <a:pt x="1127" y="1371"/>
+                </a:lnTo>
+                <a:lnTo>
+                  <a:pt x="1133" y="1374"/>
+                </a:lnTo>
+                <a:lnTo>
+                  <a:pt x="1139" y="1377"/>
+                </a:lnTo>
+                <a:lnTo>
+                  <a:pt x="1144" y="1377"/>
+                </a:lnTo>
+                <a:lnTo>
+                  <a:pt x="1150" y="1377"/>
+                </a:lnTo>
+                <a:lnTo>
+                  <a:pt x="1155" y="1374"/>
+                </a:lnTo>
+                <a:lnTo>
+                  <a:pt x="1161" y="1371"/>
+                </a:lnTo>
+                <a:lnTo>
+                  <a:pt x="1165" y="1369"/>
+                </a:lnTo>
+                <a:lnTo>
+                  <a:pt x="1345" y="1189"/>
+                </a:lnTo>
+                <a:lnTo>
+                  <a:pt x="5760" y="1189"/>
+                </a:lnTo>
+                <a:lnTo>
+                  <a:pt x="5760" y="0"/>
+                </a:lnTo>
+                <a:close/>
+              </a:path>
+            </a:pathLst>
+          </a:custGeom>
+          <a:ln/>
+          <a:extLst>
+            <a:ext uri="{91240B29-F687-4f45-9708-019B960494DF}">
+              <a14:hiddenLine xmlns:a14="http://schemas.microsoft.com/office/drawing/2010/main" xmlns="" w="9525">
+                <a:solidFill>
+                  <a:srgbClr val="000000"/>
+                </a:solidFill>
+                <a:round/>
+                <a:headEnd/>
+                <a:tailEnd/>
+              </a14:hiddenLine>
+            </a:ext>
+          </a:extLst>
+        </p:spPr>
+        <p:style>
+          <a:lnRef idx="1">
+            <a:schemeClr val="accent1"/>
+          </a:lnRef>
+          <a:fillRef idx="3">
+            <a:schemeClr val="accent1"/>
+          </a:fillRef>
+          <a:effectRef idx="2">
+            <a:schemeClr val="accent1"/>
+          </a:effectRef>
+          <a:fontRef idx="minor">
+            <a:schemeClr val="lt1"/>
+          </a:fontRef>
+        </p:style>
+      </p:sp>
+      <p:sp>
+        <p:nvSpPr>
+          <p:cNvPr id="2" name="Title 1"/>
           <p:cNvSpPr>
             <a:spLocks noGrp="1"/>
           </p:cNvSpPr>
@@ -1476,7 +3265,11 @@
         <p:spPr/>
         <p:txBody>
           <a:bodyPr/>
-          <a:lstStyle/>
+          <a:lstStyle>
+            <a:lvl1pPr>
+              <a:defRPr/>
+            </a:lvl1pPr>
+          </a:lstStyle>
           <a:p>
             <a:r>
               <a:rPr lang="en-US"/>
@@ -1498,28 +3291,18 @@
         </p:nvSpPr>
         <p:spPr>
           <a:xfrm>
-            <a:off x="3867912" y="1023586"/>
-            <a:ext cx="3474720" cy="807720"/>
+            <a:off x="814728" y="2174875"/>
+            <a:ext cx="5189857" cy="576262"/>
           </a:xfrm>
         </p:spPr>
         <p:txBody>
           <a:bodyPr anchor="b">
-            <a:normAutofit/>
+            <a:noAutofit/>
           </a:bodyPr>
           <a:lstStyle>
-            <a:lvl1pPr marL="0" indent="0">
-              <a:spcBef>
-                <a:spcPts val="0"/>
-              </a:spcBef>
-              <a:buNone/>
-              <a:defRPr sz="2000" b="1">
-                <a:solidFill>
-                  <a:schemeClr val="tx1">
-                    <a:lumMod val="65000"/>
-                    <a:lumOff val="35000"/>
-                  </a:schemeClr>
-                </a:solidFill>
-              </a:defRPr>
+            <a:lvl1pPr marL="0" indent="0" algn="ctr">
+              <a:buNone/>
+              <a:defRPr sz="2000" b="0"/>
             </a:lvl1pPr>
             <a:lvl2pPr marL="457200" indent="0">
               <a:buNone/>
@@ -1575,41 +3358,15 @@
         </p:nvSpPr>
         <p:spPr>
           <a:xfrm>
-            <a:off x="3867912" y="1930936"/>
-            <a:ext cx="3474720" cy="4023360"/>
+            <a:off x="814729" y="2751138"/>
+            <a:ext cx="5189856" cy="3109913"/>
           </a:xfrm>
         </p:spPr>
         <p:txBody>
-          <a:bodyPr/>
-          <a:lstStyle>
-            <a:lvl1pPr>
-              <a:defRPr sz="2000"/>
-            </a:lvl1pPr>
-            <a:lvl2pPr>
-              <a:defRPr sz="1800"/>
-            </a:lvl2pPr>
-            <a:lvl3pPr>
-              <a:defRPr sz="1600"/>
-            </a:lvl3pPr>
-            <a:lvl4pPr>
-              <a:defRPr sz="1400"/>
-            </a:lvl4pPr>
-            <a:lvl5pPr>
-              <a:defRPr sz="1400"/>
-            </a:lvl5pPr>
-            <a:lvl6pPr>
-              <a:defRPr sz="1400"/>
-            </a:lvl6pPr>
-            <a:lvl7pPr>
-              <a:defRPr sz="1400"/>
-            </a:lvl7pPr>
-            <a:lvl8pPr>
-              <a:defRPr sz="1400"/>
-            </a:lvl8pPr>
-            <a:lvl9pPr>
-              <a:defRPr sz="1400"/>
-            </a:lvl9pPr>
-          </a:lstStyle>
+          <a:bodyPr anchor="t">
+            <a:normAutofit/>
+          </a:bodyPr>
+          <a:lstStyle/>
           <a:p>
             <a:pPr lvl="0"/>
             <a:r>
@@ -1660,28 +3417,18 @@
         </p:nvSpPr>
         <p:spPr>
           <a:xfrm>
-            <a:off x="7818463" y="1023586"/>
-            <a:ext cx="3474720" cy="813171"/>
+            <a:off x="6187415" y="2174875"/>
+            <a:ext cx="5194583" cy="576262"/>
           </a:xfrm>
         </p:spPr>
         <p:txBody>
           <a:bodyPr anchor="b">
-            <a:normAutofit/>
+            <a:noAutofit/>
           </a:bodyPr>
           <a:lstStyle>
-            <a:lvl1pPr marL="0" indent="0">
-              <a:spcBef>
-                <a:spcPts val="0"/>
-              </a:spcBef>
-              <a:buNone/>
-              <a:defRPr sz="2000" b="1">
-                <a:solidFill>
-                  <a:schemeClr val="tx1">
-                    <a:lumMod val="65000"/>
-                    <a:lumOff val="35000"/>
-                  </a:schemeClr>
-                </a:solidFill>
-              </a:defRPr>
+            <a:lvl1pPr marL="0" indent="0" algn="ctr">
+              <a:buNone/>
+              <a:defRPr sz="2000" b="0"/>
             </a:lvl1pPr>
             <a:lvl2pPr marL="457200" indent="0">
               <a:buNone/>
@@ -1737,41 +3484,15 @@
         </p:nvSpPr>
         <p:spPr>
           <a:xfrm>
-            <a:off x="7818463" y="1930936"/>
-            <a:ext cx="3474720" cy="4023360"/>
+            <a:off x="6187415" y="2751138"/>
+            <a:ext cx="5194583" cy="3109913"/>
           </a:xfrm>
         </p:spPr>
         <p:txBody>
-          <a:bodyPr/>
-          <a:lstStyle>
-            <a:lvl1pPr>
-              <a:defRPr sz="2000"/>
-            </a:lvl1pPr>
-            <a:lvl2pPr>
-              <a:defRPr sz="1800"/>
-            </a:lvl2pPr>
-            <a:lvl3pPr>
-              <a:defRPr sz="1600"/>
-            </a:lvl3pPr>
-            <a:lvl4pPr>
-              <a:defRPr sz="1400"/>
-            </a:lvl4pPr>
-            <a:lvl5pPr>
-              <a:defRPr sz="1400"/>
-            </a:lvl5pPr>
-            <a:lvl6pPr>
-              <a:defRPr sz="1400"/>
-            </a:lvl6pPr>
-            <a:lvl7pPr>
-              <a:defRPr sz="1400"/>
-            </a:lvl7pPr>
-            <a:lvl8pPr>
-              <a:defRPr sz="1400"/>
-            </a:lvl8pPr>
-            <a:lvl9pPr>
-              <a:defRPr sz="1400"/>
-            </a:lvl9pPr>
-          </a:lstStyle>
+          <a:bodyPr anchor="t">
+            <a:normAutofit/>
+          </a:bodyPr>
+          <a:lstStyle/>
           <a:p>
             <a:pPr lvl="0"/>
             <a:r>
@@ -1812,7 +3533,7 @@
       </p:sp>
       <p:sp>
         <p:nvSpPr>
-          <p:cNvPr id="2" name="Date Placeholder 1"/>
+          <p:cNvPr id="7" name="Date Placeholder 6"/>
           <p:cNvSpPr>
             <a:spLocks noGrp="1"/>
           </p:cNvSpPr>
@@ -1825,10 +3546,10 @@
           <a:bodyPr/>
           <a:lstStyle/>
           <a:p>
-            <a:fld id="{5586B75A-687E-405C-8A0B-8D00578BA2C3}" type="datetimeFigureOut">
+            <a:fld id="{02640F58-564D-2B4F-AE67-E407BA4FCF45}" type="datetimeFigureOut">
               <a:rPr lang="en-US" dirty="0"/>
               <a:pPr/>
-              <a:t>12/26/2016</a:t>
+              <a:t>12/28/2016</a:t>
             </a:fld>
             <a:endParaRPr lang="en-US" dirty="0"/>
           </a:p>
@@ -1836,7 +3557,7 @@
       </p:sp>
       <p:sp>
         <p:nvSpPr>
-          <p:cNvPr id="11" name="Footer Placeholder 10"/>
+          <p:cNvPr id="8" name="Footer Placeholder 7"/>
           <p:cNvSpPr>
             <a:spLocks noGrp="1"/>
           </p:cNvSpPr>
@@ -1855,7 +3576,7 @@
       </p:sp>
       <p:sp>
         <p:nvSpPr>
-          <p:cNvPr id="12" name="Slide Number Placeholder 11"/>
+          <p:cNvPr id="9" name="Slide Number Placeholder 8"/>
           <p:cNvSpPr>
             <a:spLocks noGrp="1"/>
           </p:cNvSpPr>
@@ -1868,7 +3589,7 @@
           <a:bodyPr/>
           <a:lstStyle/>
           <a:p>
-            <a:fld id="{4FAB73BC-B049-4115-A692-8D63A059BFB8}" type="slidenum">
+            <a:fld id="{D57F1E4F-1CFF-5643-939E-217C01CDF565}" type="slidenum">
               <a:rPr lang="en-US" dirty="0"/>
               <a:pPr/>
               <a:t>‹#›</a:t>
@@ -1904,7 +3625,110 @@
       </p:grpSpPr>
       <p:sp>
         <p:nvSpPr>
-          <p:cNvPr id="6" name="Title 5"/>
+          <p:cNvPr id="6" name="Freeform 6"/>
+          <p:cNvSpPr/>
+          <p:nvPr/>
+        </p:nvSpPr>
+        <p:spPr bwMode="auto">
+          <a:xfrm>
+            <a:off x="0" y="0"/>
+            <a:ext cx="12192000" cy="2185988"/>
+          </a:xfrm>
+          <a:custGeom>
+            <a:avLst/>
+            <a:gdLst/>
+            <a:ahLst/>
+            <a:cxnLst/>
+            <a:rect l="0" t="0" r="r" b="b"/>
+            <a:pathLst>
+              <a:path w="5760" h="1377">
+                <a:moveTo>
+                  <a:pt x="5760" y="0"/>
+                </a:moveTo>
+                <a:lnTo>
+                  <a:pt x="0" y="0"/>
+                </a:lnTo>
+                <a:lnTo>
+                  <a:pt x="0" y="1189"/>
+                </a:lnTo>
+                <a:lnTo>
+                  <a:pt x="943" y="1189"/>
+                </a:lnTo>
+                <a:lnTo>
+                  <a:pt x="1123" y="1369"/>
+                </a:lnTo>
+                <a:lnTo>
+                  <a:pt x="1123" y="1369"/>
+                </a:lnTo>
+                <a:lnTo>
+                  <a:pt x="1127" y="1371"/>
+                </a:lnTo>
+                <a:lnTo>
+                  <a:pt x="1133" y="1374"/>
+                </a:lnTo>
+                <a:lnTo>
+                  <a:pt x="1139" y="1377"/>
+                </a:lnTo>
+                <a:lnTo>
+                  <a:pt x="1144" y="1377"/>
+                </a:lnTo>
+                <a:lnTo>
+                  <a:pt x="1150" y="1377"/>
+                </a:lnTo>
+                <a:lnTo>
+                  <a:pt x="1155" y="1374"/>
+                </a:lnTo>
+                <a:lnTo>
+                  <a:pt x="1161" y="1371"/>
+                </a:lnTo>
+                <a:lnTo>
+                  <a:pt x="1165" y="1369"/>
+                </a:lnTo>
+                <a:lnTo>
+                  <a:pt x="1345" y="1189"/>
+                </a:lnTo>
+                <a:lnTo>
+                  <a:pt x="5760" y="1189"/>
+                </a:lnTo>
+                <a:lnTo>
+                  <a:pt x="5760" y="0"/>
+                </a:lnTo>
+                <a:close/>
+              </a:path>
+            </a:pathLst>
+          </a:custGeom>
+          <a:ln/>
+          <a:extLst>
+            <a:ext uri="{91240B29-F687-4f45-9708-019B960494DF}">
+              <a14:hiddenLine xmlns:a14="http://schemas.microsoft.com/office/drawing/2010/main" xmlns="" w="9525">
+                <a:solidFill>
+                  <a:srgbClr val="000000"/>
+                </a:solidFill>
+                <a:round/>
+                <a:headEnd/>
+                <a:tailEnd/>
+              </a14:hiddenLine>
+            </a:ext>
+          </a:extLst>
+        </p:spPr>
+        <p:style>
+          <a:lnRef idx="1">
+            <a:schemeClr val="accent1"/>
+          </a:lnRef>
+          <a:fillRef idx="3">
+            <a:schemeClr val="accent1"/>
+          </a:fillRef>
+          <a:effectRef idx="2">
+            <a:schemeClr val="accent1"/>
+          </a:effectRef>
+          <a:fontRef idx="minor">
+            <a:schemeClr val="lt1"/>
+          </a:fontRef>
+        </p:style>
+      </p:sp>
+      <p:sp>
+        <p:nvSpPr>
+          <p:cNvPr id="2" name="Title 1"/>
           <p:cNvSpPr>
             <a:spLocks noGrp="1"/>
           </p:cNvSpPr>
@@ -1927,7 +3751,7 @@
       </p:sp>
       <p:sp>
         <p:nvSpPr>
-          <p:cNvPr id="2" name="Date Placeholder 1"/>
+          <p:cNvPr id="3" name="Date Placeholder 2"/>
           <p:cNvSpPr>
             <a:spLocks noGrp="1"/>
           </p:cNvSpPr>
@@ -1940,10 +3764,10 @@
           <a:bodyPr/>
           <a:lstStyle/>
           <a:p>
-            <a:fld id="{5586B75A-687E-405C-8A0B-8D00578BA2C3}" type="datetimeFigureOut">
+            <a:fld id="{F13A34C8-038E-2045-AF43-DF7DBB8E0E9E}" type="datetimeFigureOut">
               <a:rPr lang="en-US" dirty="0"/>
               <a:pPr/>
-              <a:t>12/26/2016</a:t>
+              <a:t>12/28/2016</a:t>
             </a:fld>
             <a:endParaRPr lang="en-US" dirty="0"/>
           </a:p>
@@ -1951,7 +3775,7 @@
       </p:sp>
       <p:sp>
         <p:nvSpPr>
-          <p:cNvPr id="7" name="Footer Placeholder 6"/>
+          <p:cNvPr id="4" name="Footer Placeholder 3"/>
           <p:cNvSpPr>
             <a:spLocks noGrp="1"/>
           </p:cNvSpPr>
@@ -1970,7 +3794,7 @@
       </p:sp>
       <p:sp>
         <p:nvSpPr>
-          <p:cNvPr id="8" name="Slide Number Placeholder 7"/>
+          <p:cNvPr id="5" name="Slide Number Placeholder 4"/>
           <p:cNvSpPr>
             <a:spLocks noGrp="1"/>
           </p:cNvSpPr>
@@ -1983,7 +3807,7 @@
           <a:bodyPr/>
           <a:lstStyle/>
           <a:p>
-            <a:fld id="{4FAB73BC-B049-4115-A692-8D63A059BFB8}" type="slidenum">
+            <a:fld id="{D57F1E4F-1CFF-5643-939E-217C01CDF565}" type="slidenum">
               <a:rPr lang="en-US" dirty="0"/>
               <a:pPr/>
               <a:t>‹#›</a:t>
@@ -2001,7 +3825,7 @@
 </file>
 
 <file path=ppt/slideLayouts/slideLayout7.xml><?xml version="1.0" encoding="utf-8"?>
-<p:sldLayout xmlns:a="http://schemas.openxmlformats.org/drawingml/2006/main" xmlns:r="http://schemas.openxmlformats.org/officeDocument/2006/relationships" xmlns:p="http://schemas.openxmlformats.org/presentationml/2006/main" showMasterSp="0" type="blank" preserve="1">
+<p:sldLayout xmlns:a="http://schemas.openxmlformats.org/drawingml/2006/main" xmlns:r="http://schemas.openxmlformats.org/officeDocument/2006/relationships" xmlns:p="http://schemas.openxmlformats.org/presentationml/2006/main" type="blank" preserve="1">
   <p:cSld name="Blank">
     <p:spTree>
       <p:nvGrpSpPr>
@@ -2019,7 +3843,7 @@
       </p:grpSpPr>
       <p:sp>
         <p:nvSpPr>
-          <p:cNvPr id="5" name="Date Placeholder 4"/>
+          <p:cNvPr id="2" name="Date Placeholder 1"/>
           <p:cNvSpPr>
             <a:spLocks noGrp="1"/>
           </p:cNvSpPr>
@@ -2032,10 +3856,10 @@
           <a:bodyPr/>
           <a:lstStyle/>
           <a:p>
-            <a:fld id="{5586B75A-687E-405C-8A0B-8D00578BA2C3}" type="datetimeFigureOut">
+            <a:fld id="{8818C68F-D26B-8F47-958C-23B49CF8A634}" type="datetimeFigureOut">
               <a:rPr lang="en-US" dirty="0"/>
               <a:pPr/>
-              <a:t>12/26/2016</a:t>
+              <a:t>12/28/2016</a:t>
             </a:fld>
             <a:endParaRPr lang="en-US" dirty="0"/>
           </a:p>
@@ -2043,7 +3867,7 @@
       </p:sp>
       <p:sp>
         <p:nvSpPr>
-          <p:cNvPr id="6" name="Footer Placeholder 5"/>
+          <p:cNvPr id="3" name="Footer Placeholder 2"/>
           <p:cNvSpPr>
             <a:spLocks noGrp="1"/>
           </p:cNvSpPr>
@@ -2062,7 +3886,7 @@
       </p:sp>
       <p:sp>
         <p:nvSpPr>
-          <p:cNvPr id="7" name="Slide Number Placeholder 6"/>
+          <p:cNvPr id="4" name="Slide Number Placeholder 3"/>
           <p:cNvSpPr>
             <a:spLocks noGrp="1"/>
           </p:cNvSpPr>
@@ -2075,7 +3899,7 @@
           <a:bodyPr/>
           <a:lstStyle/>
           <a:p>
-            <a:fld id="{4FAB73BC-B049-4115-A692-8D63A059BFB8}" type="slidenum">
+            <a:fld id="{D57F1E4F-1CFF-5643-939E-217C01CDF565}" type="slidenum">
               <a:rPr lang="en-US" dirty="0"/>
               <a:pPr/>
               <a:t>‹#›</a:t>
@@ -2111,6 +3935,222 @@
       </p:grpSpPr>
       <p:sp>
         <p:nvSpPr>
+          <p:cNvPr id="12" name="Freeform 6"/>
+          <p:cNvSpPr>
+            <a:spLocks noChangeAspect="1"/>
+          </p:cNvSpPr>
+          <p:nvPr/>
+        </p:nvSpPr>
+        <p:spPr bwMode="auto">
+          <a:xfrm>
+            <a:off x="1073151" y="446087"/>
+            <a:ext cx="3547533" cy="1814651"/>
+          </a:xfrm>
+          <a:custGeom>
+            <a:avLst/>
+            <a:gdLst/>
+            <a:ahLst/>
+            <a:cxnLst/>
+            <a:rect l="0" t="0" r="r" b="b"/>
+            <a:pathLst>
+              <a:path w="3384" h="2308">
+                <a:moveTo>
+                  <a:pt x="3340" y="0"/>
+                </a:moveTo>
+                <a:lnTo>
+                  <a:pt x="44" y="0"/>
+                </a:lnTo>
+                <a:lnTo>
+                  <a:pt x="44" y="0"/>
+                </a:lnTo>
+                <a:lnTo>
+                  <a:pt x="34" y="0"/>
+                </a:lnTo>
+                <a:lnTo>
+                  <a:pt x="26" y="4"/>
+                </a:lnTo>
+                <a:lnTo>
+                  <a:pt x="20" y="8"/>
+                </a:lnTo>
+                <a:lnTo>
+                  <a:pt x="12" y="12"/>
+                </a:lnTo>
+                <a:lnTo>
+                  <a:pt x="8" y="20"/>
+                </a:lnTo>
+                <a:lnTo>
+                  <a:pt x="4" y="26"/>
+                </a:lnTo>
+                <a:lnTo>
+                  <a:pt x="0" y="34"/>
+                </a:lnTo>
+                <a:lnTo>
+                  <a:pt x="0" y="44"/>
+                </a:lnTo>
+                <a:lnTo>
+                  <a:pt x="0" y="2076"/>
+                </a:lnTo>
+                <a:lnTo>
+                  <a:pt x="0" y="2076"/>
+                </a:lnTo>
+                <a:lnTo>
+                  <a:pt x="0" y="2086"/>
+                </a:lnTo>
+                <a:lnTo>
+                  <a:pt x="4" y="2094"/>
+                </a:lnTo>
+                <a:lnTo>
+                  <a:pt x="8" y="2100"/>
+                </a:lnTo>
+                <a:lnTo>
+                  <a:pt x="12" y="2108"/>
+                </a:lnTo>
+                <a:lnTo>
+                  <a:pt x="20" y="2112"/>
+                </a:lnTo>
+                <a:lnTo>
+                  <a:pt x="26" y="2116"/>
+                </a:lnTo>
+                <a:lnTo>
+                  <a:pt x="34" y="2120"/>
+                </a:lnTo>
+                <a:lnTo>
+                  <a:pt x="44" y="2120"/>
+                </a:lnTo>
+                <a:lnTo>
+                  <a:pt x="474" y="2120"/>
+                </a:lnTo>
+                <a:lnTo>
+                  <a:pt x="650" y="2296"/>
+                </a:lnTo>
+                <a:lnTo>
+                  <a:pt x="650" y="2296"/>
+                </a:lnTo>
+                <a:lnTo>
+                  <a:pt x="656" y="2300"/>
+                </a:lnTo>
+                <a:lnTo>
+                  <a:pt x="664" y="2304"/>
+                </a:lnTo>
+                <a:lnTo>
+                  <a:pt x="672" y="2308"/>
+                </a:lnTo>
+                <a:lnTo>
+                  <a:pt x="680" y="2308"/>
+                </a:lnTo>
+                <a:lnTo>
+                  <a:pt x="688" y="2308"/>
+                </a:lnTo>
+                <a:lnTo>
+                  <a:pt x="696" y="2304"/>
+                </a:lnTo>
+                <a:lnTo>
+                  <a:pt x="704" y="2300"/>
+                </a:lnTo>
+                <a:lnTo>
+                  <a:pt x="710" y="2296"/>
+                </a:lnTo>
+                <a:lnTo>
+                  <a:pt x="886" y="2120"/>
+                </a:lnTo>
+                <a:lnTo>
+                  <a:pt x="3340" y="2120"/>
+                </a:lnTo>
+                <a:lnTo>
+                  <a:pt x="3340" y="2120"/>
+                </a:lnTo>
+                <a:lnTo>
+                  <a:pt x="3350" y="2120"/>
+                </a:lnTo>
+                <a:lnTo>
+                  <a:pt x="3358" y="2116"/>
+                </a:lnTo>
+                <a:lnTo>
+                  <a:pt x="3364" y="2112"/>
+                </a:lnTo>
+                <a:lnTo>
+                  <a:pt x="3372" y="2108"/>
+                </a:lnTo>
+                <a:lnTo>
+                  <a:pt x="3376" y="2100"/>
+                </a:lnTo>
+                <a:lnTo>
+                  <a:pt x="3380" y="2094"/>
+                </a:lnTo>
+                <a:lnTo>
+                  <a:pt x="3384" y="2086"/>
+                </a:lnTo>
+                <a:lnTo>
+                  <a:pt x="3384" y="2076"/>
+                </a:lnTo>
+                <a:lnTo>
+                  <a:pt x="3384" y="44"/>
+                </a:lnTo>
+                <a:lnTo>
+                  <a:pt x="3384" y="44"/>
+                </a:lnTo>
+                <a:lnTo>
+                  <a:pt x="3384" y="34"/>
+                </a:lnTo>
+                <a:lnTo>
+                  <a:pt x="3380" y="26"/>
+                </a:lnTo>
+                <a:lnTo>
+                  <a:pt x="3376" y="20"/>
+                </a:lnTo>
+                <a:lnTo>
+                  <a:pt x="3372" y="12"/>
+                </a:lnTo>
+                <a:lnTo>
+                  <a:pt x="3364" y="8"/>
+                </a:lnTo>
+                <a:lnTo>
+                  <a:pt x="3358" y="4"/>
+                </a:lnTo>
+                <a:lnTo>
+                  <a:pt x="3350" y="0"/>
+                </a:lnTo>
+                <a:lnTo>
+                  <a:pt x="3340" y="0"/>
+                </a:lnTo>
+                <a:lnTo>
+                  <a:pt x="3340" y="0"/>
+                </a:lnTo>
+                <a:close/>
+              </a:path>
+            </a:pathLst>
+          </a:custGeom>
+          <a:ln/>
+          <a:extLst>
+            <a:ext uri="{91240B29-F687-4f45-9708-019B960494DF}">
+              <a14:hiddenLine xmlns:a14="http://schemas.microsoft.com/office/drawing/2010/main" xmlns="" w="9525">
+                <a:solidFill>
+                  <a:srgbClr val="000000"/>
+                </a:solidFill>
+                <a:round/>
+                <a:headEnd/>
+                <a:tailEnd/>
+              </a14:hiddenLine>
+            </a:ext>
+          </a:extLst>
+        </p:spPr>
+        <p:style>
+          <a:lnRef idx="1">
+            <a:schemeClr val="accent1"/>
+          </a:lnRef>
+          <a:fillRef idx="3">
+            <a:schemeClr val="accent1"/>
+          </a:fillRef>
+          <a:effectRef idx="2">
+            <a:schemeClr val="accent1"/>
+          </a:effectRef>
+          <a:fontRef idx="minor">
+            <a:schemeClr val="lt1"/>
+          </a:fontRef>
+        </p:style>
+      </p:sp>
+      <p:sp>
+        <p:nvSpPr>
           <p:cNvPr id="2" name="Title 1"/>
           <p:cNvSpPr>
             <a:spLocks noGrp="1"/>
@@ -2121,144 +4161,107 @@
         </p:nvSpPr>
         <p:spPr>
           <a:xfrm>
-            <a:off x="256032" y="1143000"/>
-            <a:ext cx="2834640" cy="2377440"/>
+            <a:off x="1073151" y="446088"/>
+            <a:ext cx="3547533" cy="1618396"/>
           </a:xfrm>
         </p:spPr>
         <p:txBody>
-          <a:bodyPr anchor="b">
+          <a:bodyPr anchor="b"/>
+          <a:lstStyle>
+            <a:lvl1pPr algn="l">
+              <a:defRPr sz="2000" b="1"/>
+            </a:lvl1pPr>
+          </a:lstStyle>
+          <a:p>
+            <a:r>
+              <a:rPr lang="en-US"/>
+              <a:t>Click to edit Master title style</a:t>
+            </a:r>
+            <a:endParaRPr lang="en-US" dirty="0"/>
+          </a:p>
+        </p:txBody>
+      </p:sp>
+      <p:sp>
+        <p:nvSpPr>
+          <p:cNvPr id="3" name="Content Placeholder 2"/>
+          <p:cNvSpPr>
+            <a:spLocks noGrp="1"/>
+          </p:cNvSpPr>
+          <p:nvPr>
+            <p:ph idx="1"/>
+          </p:nvPr>
+        </p:nvSpPr>
+        <p:spPr>
+          <a:xfrm>
+            <a:off x="4855633" y="446088"/>
+            <a:ext cx="6252633" cy="5414963"/>
+          </a:xfrm>
+        </p:spPr>
+        <p:txBody>
+          <a:bodyPr>
             <a:normAutofit/>
           </a:bodyPr>
-          <a:lstStyle>
-            <a:lvl1pPr>
-              <a:defRPr sz="3200" b="0" baseline="0"/>
-            </a:lvl1pPr>
-          </a:lstStyle>
-          <a:p>
-            <a:r>
-              <a:rPr lang="en-US"/>
-              <a:t>Click to edit Master title style</a:t>
-            </a:r>
-            <a:endParaRPr lang="en-US" dirty="0"/>
-          </a:p>
-        </p:txBody>
-      </p:sp>
-      <p:sp>
-        <p:nvSpPr>
-          <p:cNvPr id="3" name="Content Placeholder 2"/>
-          <p:cNvSpPr>
-            <a:spLocks noGrp="1"/>
-          </p:cNvSpPr>
-          <p:nvPr>
-            <p:ph idx="1"/>
+          <a:lstStyle/>
+          <a:p>
+            <a:pPr lvl="0"/>
+            <a:r>
+              <a:rPr lang="en-US"/>
+              <a:t>Edit Master text styles</a:t>
+            </a:r>
+          </a:p>
+          <a:p>
+            <a:pPr lvl="1"/>
+            <a:r>
+              <a:rPr lang="en-US"/>
+              <a:t>Second level</a:t>
+            </a:r>
+          </a:p>
+          <a:p>
+            <a:pPr lvl="2"/>
+            <a:r>
+              <a:rPr lang="en-US"/>
+              <a:t>Third level</a:t>
+            </a:r>
+          </a:p>
+          <a:p>
+            <a:pPr lvl="3"/>
+            <a:r>
+              <a:rPr lang="en-US"/>
+              <a:t>Fourth level</a:t>
+            </a:r>
+          </a:p>
+          <a:p>
+            <a:pPr lvl="4"/>
+            <a:r>
+              <a:rPr lang="en-US"/>
+              <a:t>Fifth level</a:t>
+            </a:r>
+            <a:endParaRPr lang="en-US" dirty="0"/>
+          </a:p>
+        </p:txBody>
+      </p:sp>
+      <p:sp>
+        <p:nvSpPr>
+          <p:cNvPr id="4" name="Text Placeholder 3"/>
+          <p:cNvSpPr>
+            <a:spLocks noGrp="1"/>
+          </p:cNvSpPr>
+          <p:nvPr>
+            <p:ph type="body" sz="half" idx="2"/>
           </p:nvPr>
         </p:nvSpPr>
         <p:spPr>
           <a:xfrm>
-            <a:off x="3867912" y="868680"/>
-            <a:ext cx="7315200" cy="5120640"/>
+            <a:off x="1073151" y="2260738"/>
+            <a:ext cx="3547533" cy="3600311"/>
           </a:xfrm>
         </p:spPr>
         <p:txBody>
           <a:bodyPr/>
           <a:lstStyle>
-            <a:lvl1pPr>
-              <a:defRPr sz="2000"/>
-            </a:lvl1pPr>
-            <a:lvl2pPr>
-              <a:defRPr sz="1800"/>
-            </a:lvl2pPr>
-            <a:lvl3pPr>
-              <a:defRPr sz="1600"/>
-            </a:lvl3pPr>
-            <a:lvl4pPr>
+            <a:lvl1pPr marL="0" indent="0">
+              <a:buNone/>
               <a:defRPr sz="1400"/>
-            </a:lvl4pPr>
-            <a:lvl5pPr>
-              <a:defRPr sz="1400"/>
-            </a:lvl5pPr>
-            <a:lvl6pPr>
-              <a:defRPr sz="1400"/>
-            </a:lvl6pPr>
-            <a:lvl7pPr>
-              <a:defRPr sz="1400"/>
-            </a:lvl7pPr>
-            <a:lvl8pPr>
-              <a:defRPr sz="1400"/>
-            </a:lvl8pPr>
-            <a:lvl9pPr>
-              <a:defRPr sz="1400"/>
-            </a:lvl9pPr>
-          </a:lstStyle>
-          <a:p>
-            <a:pPr lvl="0"/>
-            <a:r>
-              <a:rPr lang="en-US"/>
-              <a:t>Edit Master text styles</a:t>
-            </a:r>
-          </a:p>
-          <a:p>
-            <a:pPr lvl="1"/>
-            <a:r>
-              <a:rPr lang="en-US"/>
-              <a:t>Second level</a:t>
-            </a:r>
-          </a:p>
-          <a:p>
-            <a:pPr lvl="2"/>
-            <a:r>
-              <a:rPr lang="en-US"/>
-              <a:t>Third level</a:t>
-            </a:r>
-          </a:p>
-          <a:p>
-            <a:pPr lvl="3"/>
-            <a:r>
-              <a:rPr lang="en-US"/>
-              <a:t>Fourth level</a:t>
-            </a:r>
-          </a:p>
-          <a:p>
-            <a:pPr lvl="4"/>
-            <a:r>
-              <a:rPr lang="en-US"/>
-              <a:t>Fifth level</a:t>
-            </a:r>
-            <a:endParaRPr lang="en-US" dirty="0"/>
-          </a:p>
-        </p:txBody>
-      </p:sp>
-      <p:sp>
-        <p:nvSpPr>
-          <p:cNvPr id="4" name="Text Placeholder 3"/>
-          <p:cNvSpPr>
-            <a:spLocks noGrp="1"/>
-          </p:cNvSpPr>
-          <p:nvPr>
-            <p:ph type="body" sz="half" idx="2"/>
-          </p:nvPr>
-        </p:nvSpPr>
-        <p:spPr>
-          <a:xfrm>
-            <a:off x="256032" y="3494176"/>
-            <a:ext cx="2834640" cy="2321990"/>
-          </a:xfrm>
-        </p:spPr>
-        <p:txBody>
-          <a:bodyPr anchor="t">
-            <a:normAutofit/>
-          </a:bodyPr>
-          <a:lstStyle>
-            <a:lvl1pPr marL="0" indent="0">
-              <a:lnSpc>
-                <a:spcPct val="100000"/>
-              </a:lnSpc>
-              <a:buNone/>
-              <a:defRPr sz="1400">
-                <a:solidFill>
-                  <a:srgbClr val="FFFFFF"/>
-                </a:solidFill>
-              </a:defRPr>
             </a:lvl1pPr>
             <a:lvl2pPr marL="457200" indent="0">
               <a:buNone/>
@@ -2304,7 +4307,7 @@
       </p:sp>
       <p:sp>
         <p:nvSpPr>
-          <p:cNvPr id="8" name="Date Placeholder 7"/>
+          <p:cNvPr id="5" name="Date Placeholder 4"/>
           <p:cNvSpPr>
             <a:spLocks noGrp="1"/>
           </p:cNvSpPr>
@@ -2317,10 +4320,10 @@
           <a:bodyPr/>
           <a:lstStyle/>
           <a:p>
-            <a:fld id="{5586B75A-687E-405C-8A0B-8D00578BA2C3}" type="datetimeFigureOut">
+            <a:fld id="{D0DF5E60-9974-AC48-9591-99C2BB44B7CF}" type="datetimeFigureOut">
               <a:rPr lang="en-US" dirty="0"/>
               <a:pPr/>
-              <a:t>12/26/2016</a:t>
+              <a:t>12/28/2016</a:t>
             </a:fld>
             <a:endParaRPr lang="en-US" dirty="0"/>
           </a:p>
@@ -2328,7 +4331,7 @@
       </p:sp>
       <p:sp>
         <p:nvSpPr>
-          <p:cNvPr id="9" name="Footer Placeholder 8"/>
+          <p:cNvPr id="6" name="Footer Placeholder 5"/>
           <p:cNvSpPr>
             <a:spLocks noGrp="1"/>
           </p:cNvSpPr>
@@ -2347,7 +4350,7 @@
       </p:sp>
       <p:sp>
         <p:nvSpPr>
-          <p:cNvPr id="10" name="Slide Number Placeholder 9"/>
+          <p:cNvPr id="7" name="Slide Number Placeholder 6"/>
           <p:cNvSpPr>
             <a:spLocks noGrp="1"/>
           </p:cNvSpPr>
@@ -2360,7 +4363,7 @@
           <a:bodyPr/>
           <a:lstStyle/>
           <a:p>
-            <a:fld id="{4FAB73BC-B049-4115-A692-8D63A059BFB8}" type="slidenum">
+            <a:fld id="{D57F1E4F-1CFF-5643-939E-217C01CDF565}" type="slidenum">
               <a:rPr lang="en-US" dirty="0"/>
               <a:pPr/>
               <a:t>‹#›</a:t>
@@ -2406,8 +4409,8 @@
         </p:nvSpPr>
         <p:spPr>
           <a:xfrm>
-            <a:off x="256032" y="1143000"/>
-            <a:ext cx="2834640" cy="2377440"/>
+            <a:off x="814728" y="727522"/>
+            <a:ext cx="4852988" cy="1617163"/>
           </a:xfrm>
         </p:spPr>
         <p:txBody>
@@ -2415,8 +4418,8 @@
             <a:normAutofit/>
           </a:bodyPr>
           <a:lstStyle>
-            <a:lvl1pPr>
-              <a:defRPr sz="3200" b="0"/>
+            <a:lvl1pPr algn="l">
+              <a:defRPr sz="2400" b="0"/>
             </a:lvl1pPr>
           </a:lstStyle>
           <a:p>
@@ -2430,88 +4433,130 @@
       </p:sp>
       <p:sp>
         <p:nvSpPr>
-          <p:cNvPr id="3" name="Picture Placeholder 2"/>
+          <p:cNvPr id="9" name="Picture Placeholder 11"/>
           <p:cNvSpPr>
             <a:spLocks noGrp="1" noChangeAspect="1"/>
           </p:cNvSpPr>
           <p:nvPr>
-            <p:ph type="pic" idx="1"/>
+            <p:ph type="pic" sz="quarter" idx="13"/>
+          </p:nvPr>
+        </p:nvSpPr>
+        <p:spPr bwMode="auto">
+          <a:xfrm>
+            <a:off x="6098117" y="0"/>
+            <a:ext cx="6093883" cy="6858000"/>
+          </a:xfrm>
+          <a:custGeom>
+            <a:avLst/>
+            <a:gdLst/>
+            <a:ahLst/>
+            <a:cxnLst/>
+            <a:rect l="0" t="0" r="r" b="b"/>
+            <a:pathLst>
+              <a:path w="2879" h="4320">
+                <a:moveTo>
+                  <a:pt x="183" y="0"/>
+                </a:moveTo>
+                <a:lnTo>
+                  <a:pt x="183" y="1197"/>
+                </a:lnTo>
+                <a:lnTo>
+                  <a:pt x="8" y="1372"/>
+                </a:lnTo>
+                <a:lnTo>
+                  <a:pt x="8" y="1372"/>
+                </a:lnTo>
+                <a:lnTo>
+                  <a:pt x="6" y="1376"/>
+                </a:lnTo>
+                <a:lnTo>
+                  <a:pt x="3" y="1382"/>
+                </a:lnTo>
+                <a:lnTo>
+                  <a:pt x="0" y="1387"/>
+                </a:lnTo>
+                <a:lnTo>
+                  <a:pt x="0" y="1393"/>
+                </a:lnTo>
+                <a:lnTo>
+                  <a:pt x="0" y="1399"/>
+                </a:lnTo>
+                <a:lnTo>
+                  <a:pt x="3" y="1404"/>
+                </a:lnTo>
+                <a:lnTo>
+                  <a:pt x="6" y="1410"/>
+                </a:lnTo>
+                <a:lnTo>
+                  <a:pt x="8" y="1414"/>
+                </a:lnTo>
+                <a:lnTo>
+                  <a:pt x="183" y="1589"/>
+                </a:lnTo>
+                <a:lnTo>
+                  <a:pt x="183" y="4320"/>
+                </a:lnTo>
+                <a:lnTo>
+                  <a:pt x="2879" y="4320"/>
+                </a:lnTo>
+                <a:lnTo>
+                  <a:pt x="2879" y="0"/>
+                </a:lnTo>
+                <a:lnTo>
+                  <a:pt x="183" y="0"/>
+                </a:lnTo>
+                <a:close/>
+              </a:path>
+            </a:pathLst>
+          </a:custGeom>
+          <a:noFill/>
+          <a:ln w="9525">
+            <a:solidFill>
+              <a:schemeClr val="tx2"/>
+            </a:solidFill>
+            <a:round/>
+            <a:headEnd/>
+            <a:tailEnd/>
+          </a:ln>
+          <a:effectLst/>
+        </p:spPr>
+        <p:txBody>
+          <a:bodyPr wrap="square" numCol="1" anchor="t" anchorCtr="0" compatLnSpc="1">
+            <a:prstTxWarp prst="textNoShape">
+              <a:avLst/>
+            </a:prstTxWarp>
+            <a:normAutofit/>
+          </a:bodyPr>
+          <a:lstStyle>
+            <a:lvl1pPr algn="ctr">
+              <a:buFontTx/>
+              <a:buNone/>
+              <a:defRPr sz="1400"/>
+            </a:lvl1pPr>
+          </a:lstStyle>
+          <a:p>
+            <a:r>
+              <a:rPr lang="en-US"/>
+              <a:t>Click icon to add picture</a:t>
+            </a:r>
+            <a:endParaRPr lang="en-US" dirty="0"/>
+          </a:p>
+        </p:txBody>
+      </p:sp>
+      <p:sp>
+        <p:nvSpPr>
+          <p:cNvPr id="4" name="Text Placeholder 3"/>
+          <p:cNvSpPr>
+            <a:spLocks noGrp="1"/>
+          </p:cNvSpPr>
+          <p:nvPr>
+            <p:ph type="body" sz="half" idx="2"/>
           </p:nvPr>
         </p:nvSpPr>
         <p:spPr>
           <a:xfrm>
-            <a:off x="3570644" y="767419"/>
-            <a:ext cx="8115230" cy="5330952"/>
-          </a:xfrm>
-          <a:solidFill>
-            <a:schemeClr val="bg1">
-              <a:lumMod val="75000"/>
-            </a:schemeClr>
-          </a:solidFill>
-        </p:spPr>
-        <p:txBody>
-          <a:bodyPr anchor="t"/>
-          <a:lstStyle>
-            <a:lvl1pPr marL="0" indent="0">
-              <a:buNone/>
-              <a:defRPr sz="3200"/>
-            </a:lvl1pPr>
-            <a:lvl2pPr marL="457200" indent="0">
-              <a:buNone/>
-              <a:defRPr sz="2800"/>
-            </a:lvl2pPr>
-            <a:lvl3pPr marL="914400" indent="0">
-              <a:buNone/>
-              <a:defRPr sz="2400"/>
-            </a:lvl3pPr>
-            <a:lvl4pPr marL="1371600" indent="0">
-              <a:buNone/>
-              <a:defRPr sz="2000"/>
-            </a:lvl4pPr>
-            <a:lvl5pPr marL="1828800" indent="0">
-              <a:buNone/>
-              <a:defRPr sz="2000"/>
-            </a:lvl5pPr>
-            <a:lvl6pPr marL="2286000" indent="0">
-              <a:buNone/>
-              <a:defRPr sz="2000"/>
-            </a:lvl6pPr>
-            <a:lvl7pPr marL="2743200" indent="0">
-              <a:buNone/>
-              <a:defRPr sz="2000"/>
-            </a:lvl7pPr>
-            <a:lvl8pPr marL="3200400" indent="0">
-              <a:buNone/>
-              <a:defRPr sz="2000"/>
-            </a:lvl8pPr>
-            <a:lvl9pPr marL="3657600" indent="0">
-              <a:buNone/>
-              <a:defRPr sz="2000"/>
-            </a:lvl9pPr>
-          </a:lstStyle>
-          <a:p>
-            <a:r>
-              <a:rPr lang="en-US"/>
-              <a:t>Click icon to add picture</a:t>
-            </a:r>
-            <a:endParaRPr lang="en-US" dirty="0"/>
-          </a:p>
-        </p:txBody>
-      </p:sp>
-      <p:sp>
-        <p:nvSpPr>
-          <p:cNvPr id="4" name="Text Placeholder 3"/>
-          <p:cNvSpPr>
-            <a:spLocks noGrp="1"/>
-          </p:cNvSpPr>
-          <p:nvPr>
-            <p:ph type="body" sz="half" idx="2"/>
-          </p:nvPr>
-        </p:nvSpPr>
-        <p:spPr>
-          <a:xfrm>
-            <a:off x="256032" y="3493008"/>
-            <a:ext cx="2834640" cy="2322576"/>
+            <a:off x="814728" y="2344684"/>
+            <a:ext cx="4852988" cy="3516365"/>
           </a:xfrm>
         </p:spPr>
         <p:txBody>
@@ -2520,15 +4565,8 @@
           </a:bodyPr>
           <a:lstStyle>
             <a:lvl1pPr marL="0" indent="0">
-              <a:lnSpc>
-                <a:spcPct val="100000"/>
-              </a:lnSpc>
-              <a:buNone/>
-              <a:defRPr sz="1400">
-                <a:solidFill>
-                  <a:srgbClr val="FFFFFF"/>
-                </a:solidFill>
-              </a:defRPr>
+              <a:buNone/>
+              <a:defRPr sz="1200"/>
             </a:lvl1pPr>
             <a:lvl2pPr marL="457200" indent="0">
               <a:buNone/>
@@ -2574,7 +4612,7 @@
       </p:sp>
       <p:sp>
         <p:nvSpPr>
-          <p:cNvPr id="8" name="Date Placeholder 7"/>
+          <p:cNvPr id="5" name="Date Placeholder 4"/>
           <p:cNvSpPr>
             <a:spLocks noGrp="1"/>
           </p:cNvSpPr>
@@ -2582,15 +4620,20 @@
             <p:ph type="dt" sz="half" idx="10"/>
           </p:nvPr>
         </p:nvSpPr>
-        <p:spPr/>
-        <p:txBody>
-          <a:bodyPr/>
-          <a:lstStyle/>
-          <a:p>
-            <a:fld id="{5586B75A-687E-405C-8A0B-8D00578BA2C3}" type="datetimeFigureOut">
+        <p:spPr>
+          <a:xfrm>
+            <a:off x="3885810" y="6041362"/>
+            <a:ext cx="976879" cy="365125"/>
+          </a:xfrm>
+        </p:spPr>
+        <p:txBody>
+          <a:bodyPr/>
+          <a:lstStyle/>
+          <a:p>
+            <a:fld id="{18C79C5D-2A6F-F04D-97DA-BEF2467B64E4}" type="datetimeFigureOut">
               <a:rPr lang="en-US" dirty="0"/>
               <a:pPr/>
-              <a:t>12/26/2016</a:t>
+              <a:t>12/28/2016</a:t>
             </a:fld>
             <a:endParaRPr lang="en-US" dirty="0"/>
           </a:p>
@@ -2598,7 +4641,7 @@
       </p:sp>
       <p:sp>
         <p:nvSpPr>
-          <p:cNvPr id="9" name="Footer Placeholder 8"/>
+          <p:cNvPr id="6" name="Footer Placeholder 5"/>
           <p:cNvSpPr>
             <a:spLocks noGrp="1"/>
           </p:cNvSpPr>
@@ -2608,8 +4651,8 @@
         </p:nvSpPr>
         <p:spPr>
           <a:xfrm>
-            <a:off x="3499101" y="6356350"/>
-            <a:ext cx="5911517" cy="365125"/>
+            <a:off x="590396" y="6041362"/>
+            <a:ext cx="3295413" cy="365125"/>
           </a:xfrm>
         </p:spPr>
         <p:txBody>
@@ -2622,7 +4665,7 @@
       </p:sp>
       <p:sp>
         <p:nvSpPr>
-          <p:cNvPr id="10" name="Slide Number Placeholder 9"/>
+          <p:cNvPr id="7" name="Slide Number Placeholder 6"/>
           <p:cNvSpPr>
             <a:spLocks noGrp="1"/>
           </p:cNvSpPr>
@@ -2630,12 +4673,17 @@
             <p:ph type="sldNum" sz="quarter" idx="12"/>
           </p:nvPr>
         </p:nvSpPr>
-        <p:spPr/>
-        <p:txBody>
-          <a:bodyPr/>
-          <a:lstStyle/>
-          <a:p>
-            <a:fld id="{4FAB73BC-B049-4115-A692-8D63A059BFB8}" type="slidenum">
+        <p:spPr>
+          <a:xfrm>
+            <a:off x="4862689" y="5915888"/>
+            <a:ext cx="1062155" cy="490599"/>
+          </a:xfrm>
+        </p:spPr>
+        <p:txBody>
+          <a:bodyPr/>
+          <a:lstStyle/>
+          <a:p>
+            <a:fld id="{D57F1E4F-1CFF-5643-939E-217C01CDF565}" type="slidenum">
               <a:rPr lang="en-US" dirty="0"/>
               <a:pPr/>
               <a:t>‹#›</a:t>
@@ -2657,7 +4705,7 @@
   <p:cSld>
     <p:bg>
       <p:bgRef idx="1001">
-        <a:schemeClr val="bg1"/>
+        <a:schemeClr val="bg2"/>
       </p:bgRef>
     </p:bg>
     <p:spTree>
@@ -2676,282 +4724,212 @@
       </p:grpSpPr>
       <p:sp>
         <p:nvSpPr>
-          <p:cNvPr id="7" name="Rectangle 6"/>
-          <p:cNvSpPr/>
-          <p:nvPr/>
+          <p:cNvPr id="2" name="Title Placeholder 1"/>
+          <p:cNvSpPr>
+            <a:spLocks noGrp="1"/>
+          </p:cNvSpPr>
+          <p:nvPr>
+            <p:ph type="title"/>
+          </p:nvPr>
         </p:nvSpPr>
         <p:spPr>
           <a:xfrm>
-            <a:off x="1" y="758952"/>
-            <a:ext cx="3443590" cy="5330952"/>
+            <a:off x="810000" y="447188"/>
+            <a:ext cx="10571998" cy="970450"/>
           </a:xfrm>
           <a:prstGeom prst="rect">
             <a:avLst/>
           </a:prstGeom>
-          <a:solidFill>
-            <a:schemeClr val="accent1"/>
-          </a:solidFill>
-          <a:ln>
-            <a:noFill/>
-          </a:ln>
+          <a:effectLst>
+            <a:outerShdw blurRad="50800" dir="14400000">
+              <a:srgbClr val="000000">
+                <a:alpha val="60000"/>
+              </a:srgbClr>
+            </a:outerShdw>
+          </a:effectLst>
         </p:spPr>
-        <p:style>
-          <a:lnRef idx="2">
-            <a:schemeClr val="accent1">
-              <a:shade val="50000"/>
-            </a:schemeClr>
-          </a:lnRef>
-          <a:fillRef idx="1">
-            <a:schemeClr val="accent1"/>
-          </a:fillRef>
-          <a:effectRef idx="0">
-            <a:schemeClr val="accent1"/>
-          </a:effectRef>
-          <a:fontRef idx="minor">
-            <a:schemeClr val="lt1"/>
-          </a:fontRef>
-        </p:style>
-      </p:sp>
-      <p:sp>
-        <p:nvSpPr>
-          <p:cNvPr id="2" name="Title Placeholder 1"/>
-          <p:cNvSpPr>
-            <a:spLocks noGrp="1"/>
-          </p:cNvSpPr>
-          <p:nvPr>
-            <p:ph type="title"/>
+        <p:txBody>
+          <a:bodyPr vert="horz" lIns="91440" tIns="45720" rIns="91440" bIns="45720" rtlCol="0" anchor="b">
+            <a:noAutofit/>
+          </a:bodyPr>
+          <a:lstStyle/>
+          <a:p>
+            <a:r>
+              <a:rPr lang="en-US"/>
+              <a:t>Click to edit Master title style</a:t>
+            </a:r>
+            <a:endParaRPr lang="en-US" dirty="0"/>
+          </a:p>
+        </p:txBody>
+      </p:sp>
+      <p:sp>
+        <p:nvSpPr>
+          <p:cNvPr id="3" name="Text Placeholder 2"/>
+          <p:cNvSpPr>
+            <a:spLocks noGrp="1"/>
+          </p:cNvSpPr>
+          <p:nvPr>
+            <p:ph type="body" idx="1"/>
           </p:nvPr>
         </p:nvSpPr>
         <p:spPr>
           <a:xfrm>
-            <a:off x="252919" y="1123837"/>
-            <a:ext cx="2947482" cy="4601183"/>
+            <a:off x="810000" y="2184401"/>
+            <a:ext cx="10563285" cy="3674397"/>
+          </a:xfrm>
+          <a:prstGeom prst="rect">
+            <a:avLst/>
+          </a:prstGeom>
+          <a:effectLst>
+            <a:outerShdw blurRad="50800" dir="14400000">
+              <a:srgbClr val="000000">
+                <a:alpha val="40000"/>
+              </a:srgbClr>
+            </a:outerShdw>
+          </a:effectLst>
+        </p:spPr>
+        <p:txBody>
+          <a:bodyPr vert="horz" lIns="91440" tIns="45720" rIns="91440" bIns="45720" rtlCol="0" anchor="ctr">
+            <a:normAutofit/>
+          </a:bodyPr>
+          <a:lstStyle/>
+          <a:p>
+            <a:pPr lvl="0"/>
+            <a:r>
+              <a:rPr lang="en-US"/>
+              <a:t>Edit Master text styles</a:t>
+            </a:r>
+          </a:p>
+          <a:p>
+            <a:pPr lvl="1"/>
+            <a:r>
+              <a:rPr lang="en-US"/>
+              <a:t>Second level</a:t>
+            </a:r>
+          </a:p>
+          <a:p>
+            <a:pPr lvl="2"/>
+            <a:r>
+              <a:rPr lang="en-US"/>
+              <a:t>Third level</a:t>
+            </a:r>
+          </a:p>
+          <a:p>
+            <a:pPr lvl="3"/>
+            <a:r>
+              <a:rPr lang="en-US"/>
+              <a:t>Fourth level</a:t>
+            </a:r>
+          </a:p>
+          <a:p>
+            <a:pPr lvl="4"/>
+            <a:r>
+              <a:rPr lang="en-US"/>
+              <a:t>Fifth level</a:t>
+            </a:r>
+            <a:endParaRPr lang="en-US" dirty="0"/>
+          </a:p>
+        </p:txBody>
+      </p:sp>
+      <p:sp>
+        <p:nvSpPr>
+          <p:cNvPr id="5" name="Footer Placeholder 4"/>
+          <p:cNvSpPr>
+            <a:spLocks noGrp="1"/>
+          </p:cNvSpPr>
+          <p:nvPr>
+            <p:ph type="ftr" sz="quarter" idx="3"/>
+          </p:nvPr>
+        </p:nvSpPr>
+        <p:spPr>
+          <a:xfrm>
+            <a:off x="451514" y="6041362"/>
+            <a:ext cx="8644320" cy="365125"/>
           </a:xfrm>
           <a:prstGeom prst="rect">
             <a:avLst/>
           </a:prstGeom>
         </p:spPr>
         <p:txBody>
-          <a:bodyPr vert="horz" lIns="91440" tIns="45720" rIns="91440" bIns="45720" rtlCol="0" anchor="ctr">
-            <a:normAutofit/>
-          </a:bodyPr>
-          <a:lstStyle/>
-          <a:p>
-            <a:r>
-              <a:rPr lang="en-US"/>
-              <a:t>Click to edit Master title style</a:t>
-            </a:r>
-            <a:endParaRPr lang="en-US" dirty="0"/>
-          </a:p>
-        </p:txBody>
-      </p:sp>
-      <p:sp>
-        <p:nvSpPr>
-          <p:cNvPr id="38" name="Rectangle 37"/>
-          <p:cNvSpPr/>
-          <p:nvPr/>
+          <a:bodyPr vert="horz" lIns="91440" tIns="45720" rIns="91440" bIns="45720" rtlCol="0" anchor="b"/>
+          <a:lstStyle>
+            <a:lvl1pPr algn="l">
+              <a:defRPr sz="900">
+                <a:solidFill>
+                  <a:schemeClr val="tx1"/>
+                </a:solidFill>
+              </a:defRPr>
+            </a:lvl1pPr>
+          </a:lstStyle>
+          <a:p>
+            <a:endParaRPr lang="en-US" dirty="0"/>
+          </a:p>
+        </p:txBody>
+      </p:sp>
+      <p:sp>
+        <p:nvSpPr>
+          <p:cNvPr id="4" name="Date Placeholder 3"/>
+          <p:cNvSpPr>
+            <a:spLocks noGrp="1"/>
+          </p:cNvSpPr>
+          <p:nvPr>
+            <p:ph type="dt" sz="half" idx="2"/>
+          </p:nvPr>
         </p:nvSpPr>
         <p:spPr>
           <a:xfrm>
-            <a:off x="11815864" y="758952"/>
-            <a:ext cx="384048" cy="5330952"/>
-          </a:xfrm>
-          <a:prstGeom prst="rect">
-            <a:avLst/>
-          </a:prstGeom>
-          <a:solidFill>
-            <a:srgbClr val="C8C8C8">
-              <a:alpha val="49804"/>
-            </a:srgbClr>
-          </a:solidFill>
-          <a:ln>
-            <a:noFill/>
-          </a:ln>
-        </p:spPr>
-        <p:style>
-          <a:lnRef idx="2">
-            <a:schemeClr val="accent1">
-              <a:shade val="50000"/>
-            </a:schemeClr>
-          </a:lnRef>
-          <a:fillRef idx="1">
-            <a:schemeClr val="accent1"/>
-          </a:fillRef>
-          <a:effectRef idx="0">
-            <a:schemeClr val="accent1"/>
-          </a:effectRef>
-          <a:fontRef idx="minor">
-            <a:schemeClr val="lt1"/>
-          </a:fontRef>
-        </p:style>
-      </p:sp>
-      <p:sp>
-        <p:nvSpPr>
-          <p:cNvPr id="3" name="Text Placeholder 2"/>
-          <p:cNvSpPr>
-            <a:spLocks noGrp="1"/>
-          </p:cNvSpPr>
-          <p:nvPr>
-            <p:ph type="body" idx="1"/>
-          </p:nvPr>
-        </p:nvSpPr>
-        <p:spPr>
-          <a:xfrm>
-            <a:off x="3869268" y="864108"/>
-            <a:ext cx="7315200" cy="5120640"/>
+            <a:off x="9334626" y="6041362"/>
+            <a:ext cx="1343706" cy="365125"/>
           </a:xfrm>
           <a:prstGeom prst="rect">
             <a:avLst/>
           </a:prstGeom>
         </p:spPr>
         <p:txBody>
-          <a:bodyPr vert="horz" lIns="91440" tIns="45720" rIns="91440" bIns="45720" rtlCol="0" anchor="ctr">
-            <a:normAutofit/>
-          </a:bodyPr>
-          <a:lstStyle/>
-          <a:p>
-            <a:pPr lvl="0"/>
-            <a:r>
-              <a:rPr lang="en-US"/>
-              <a:t>Edit Master text styles</a:t>
-            </a:r>
-          </a:p>
-          <a:p>
-            <a:pPr lvl="1"/>
-            <a:r>
-              <a:rPr lang="en-US"/>
-              <a:t>Second level</a:t>
-            </a:r>
-          </a:p>
-          <a:p>
-            <a:pPr lvl="2"/>
-            <a:r>
-              <a:rPr lang="en-US"/>
-              <a:t>Third level</a:t>
-            </a:r>
-          </a:p>
-          <a:p>
-            <a:pPr lvl="3"/>
-            <a:r>
-              <a:rPr lang="en-US"/>
-              <a:t>Fourth level</a:t>
-            </a:r>
-          </a:p>
-          <a:p>
-            <a:pPr lvl="4"/>
-            <a:r>
-              <a:rPr lang="en-US"/>
-              <a:t>Fifth level</a:t>
-            </a:r>
-            <a:endParaRPr lang="en-US" dirty="0"/>
-          </a:p>
-        </p:txBody>
-      </p:sp>
-      <p:sp>
-        <p:nvSpPr>
-          <p:cNvPr id="4" name="Date Placeholder 3"/>
-          <p:cNvSpPr>
-            <a:spLocks noGrp="1"/>
-          </p:cNvSpPr>
-          <p:nvPr>
-            <p:ph type="dt" sz="half" idx="2"/>
+          <a:bodyPr vert="horz" lIns="91440" tIns="45720" rIns="91440" bIns="45720" rtlCol="0" anchor="b"/>
+          <a:lstStyle>
+            <a:lvl1pPr algn="r">
+              <a:defRPr sz="900">
+                <a:solidFill>
+                  <a:schemeClr val="tx1"/>
+                </a:solidFill>
+              </a:defRPr>
+            </a:lvl1pPr>
+          </a:lstStyle>
+          <a:p>
+            <a:fld id="{09B482E8-6E0E-1B4F-B1FD-C69DB9E858D9}" type="datetimeFigureOut">
+              <a:rPr lang="en-US" dirty="0"/>
+              <a:pPr/>
+              <a:t>12/28/2016</a:t>
+            </a:fld>
+            <a:endParaRPr lang="en-US" dirty="0"/>
+          </a:p>
+        </p:txBody>
+      </p:sp>
+      <p:sp>
+        <p:nvSpPr>
+          <p:cNvPr id="6" name="Slide Number Placeholder 5"/>
+          <p:cNvSpPr>
+            <a:spLocks noGrp="1"/>
+          </p:cNvSpPr>
+          <p:nvPr>
+            <p:ph type="sldNum" sz="quarter" idx="4"/>
           </p:nvPr>
         </p:nvSpPr>
         <p:spPr>
           <a:xfrm>
-            <a:off x="262465" y="6356350"/>
-            <a:ext cx="2743200" cy="365125"/>
+            <a:off x="10678331" y="5915888"/>
+            <a:ext cx="1062155" cy="490599"/>
           </a:xfrm>
           <a:prstGeom prst="rect">
             <a:avLst/>
           </a:prstGeom>
         </p:spPr>
         <p:txBody>
-          <a:bodyPr vert="horz" lIns="91440" tIns="45720" rIns="91440" bIns="45720" rtlCol="0" anchor="ctr"/>
-          <a:lstStyle>
-            <a:lvl1pPr algn="l">
-              <a:defRPr sz="1100">
-                <a:solidFill>
-                  <a:schemeClr val="tx1">
-                    <a:lumMod val="50000"/>
-                    <a:lumOff val="50000"/>
-                  </a:schemeClr>
-                </a:solidFill>
-              </a:defRPr>
-            </a:lvl1pPr>
-          </a:lstStyle>
-          <a:p>
-            <a:fld id="{5586B75A-687E-405C-8A0B-8D00578BA2C3}" type="datetimeFigureOut">
-              <a:rPr lang="en-US" dirty="0"/>
-              <a:pPr/>
-              <a:t>12/26/2016</a:t>
-            </a:fld>
-            <a:endParaRPr lang="en-US" dirty="0"/>
-          </a:p>
-        </p:txBody>
-      </p:sp>
-      <p:sp>
-        <p:nvSpPr>
-          <p:cNvPr id="5" name="Footer Placeholder 4"/>
-          <p:cNvSpPr>
-            <a:spLocks noGrp="1"/>
-          </p:cNvSpPr>
-          <p:nvPr>
-            <p:ph type="ftr" sz="quarter" idx="3"/>
-          </p:nvPr>
-        </p:nvSpPr>
-        <p:spPr>
-          <a:xfrm>
-            <a:off x="3869268" y="6356350"/>
-            <a:ext cx="5911517" cy="365125"/>
-          </a:xfrm>
-          <a:prstGeom prst="rect">
-            <a:avLst/>
-          </a:prstGeom>
-        </p:spPr>
-        <p:txBody>
-          <a:bodyPr vert="horz" lIns="91440" tIns="45720" rIns="91440" bIns="45720" rtlCol="0" anchor="ctr"/>
-          <a:lstStyle>
-            <a:lvl1pPr algn="l">
-              <a:defRPr sz="1100">
-                <a:solidFill>
-                  <a:schemeClr val="tx1">
-                    <a:lumMod val="50000"/>
-                    <a:lumOff val="50000"/>
-                  </a:schemeClr>
-                </a:solidFill>
-              </a:defRPr>
-            </a:lvl1pPr>
-          </a:lstStyle>
-          <a:p>
-            <a:endParaRPr lang="en-US" dirty="0"/>
-          </a:p>
-        </p:txBody>
-      </p:sp>
-      <p:sp>
-        <p:nvSpPr>
-          <p:cNvPr id="6" name="Slide Number Placeholder 5"/>
-          <p:cNvSpPr>
-            <a:spLocks noGrp="1"/>
-          </p:cNvSpPr>
-          <p:nvPr>
-            <p:ph type="sldNum" sz="quarter" idx="4"/>
-          </p:nvPr>
-        </p:nvSpPr>
-        <p:spPr>
-          <a:xfrm>
-            <a:off x="10634135" y="6356350"/>
-            <a:ext cx="1530927" cy="365125"/>
-          </a:xfrm>
-          <a:prstGeom prst="rect">
-            <a:avLst/>
-          </a:prstGeom>
-        </p:spPr>
-        <p:txBody>
-          <a:bodyPr vert="horz" lIns="91440" tIns="45720" rIns="91440" bIns="45720" rtlCol="0" anchor="ctr"/>
+          <a:bodyPr vert="horz" lIns="91440" tIns="45720" rIns="91440" bIns="10800" rtlCol="0" anchor="b"/>
           <a:lstStyle>
             <a:lvl1pPr algn="r">
-              <a:defRPr sz="1200" b="1">
+              <a:defRPr sz="2000">
                 <a:solidFill>
                   <a:schemeClr val="accent1"/>
                 </a:solidFill>
@@ -2959,7 +4937,7 @@
             </a:lvl1pPr>
           </a:lstStyle>
           <a:p>
-            <a:fld id="{4FAB73BC-B049-4115-A692-8D63A059BFB8}" type="slidenum">
+            <a:fld id="{D57F1E4F-1CFF-5643-939E-217C01CDF565}" type="slidenum">
               <a:rPr lang="en-US" dirty="0"/>
               <a:pPr/>
               <a:t>‹#›</a:t>
@@ -2970,276 +4948,281 @@
       </p:sp>
     </p:spTree>
   </p:cSld>
-  <p:clrMap bg1="lt1" tx1="dk1" bg2="lt2" tx2="dk2" accent1="accent1" accent2="accent2" accent3="accent3" accent4="accent4" accent5="accent5" accent6="accent6" hlink="hlink" folHlink="folHlink"/>
+  <p:clrMap bg1="dk1" tx1="lt1" bg2="dk2" tx2="lt2" accent1="accent1" accent2="accent2" accent3="accent3" accent4="accent4" accent5="accent5" accent6="accent6" hlink="hlink" folHlink="folHlink"/>
   <p:sldLayoutIdLst>
-    <p:sldLayoutId id="2147483841" r:id="rId1"/>
-    <p:sldLayoutId id="2147483842" r:id="rId2"/>
-    <p:sldLayoutId id="2147483843" r:id="rId3"/>
-    <p:sldLayoutId id="2147483844" r:id="rId4"/>
-    <p:sldLayoutId id="2147483845" r:id="rId5"/>
-    <p:sldLayoutId id="2147483846" r:id="rId6"/>
-    <p:sldLayoutId id="2147483847" r:id="rId7"/>
-    <p:sldLayoutId id="2147483848" r:id="rId8"/>
-    <p:sldLayoutId id="2147483849" r:id="rId9"/>
-    <p:sldLayoutId id="2147483850" r:id="rId10"/>
-    <p:sldLayoutId id="2147483851" r:id="rId11"/>
+    <p:sldLayoutId id="2147483649" r:id="rId1"/>
+    <p:sldLayoutId id="2147483650" r:id="rId2"/>
+    <p:sldLayoutId id="2147483651" r:id="rId3"/>
+    <p:sldLayoutId id="2147483652" r:id="rId4"/>
+    <p:sldLayoutId id="2147483653" r:id="rId5"/>
+    <p:sldLayoutId id="2147483654" r:id="rId6"/>
+    <p:sldLayoutId id="2147483655" r:id="rId7"/>
+    <p:sldLayoutId id="2147483656" r:id="rId8"/>
+    <p:sldLayoutId id="2147483663" r:id="rId9"/>
+    <p:sldLayoutId id="2147483657" r:id="rId10"/>
+    <p:sldLayoutId id="2147483666" r:id="rId11"/>
+    <p:sldLayoutId id="2147483661" r:id="rId12"/>
+    <p:sldLayoutId id="2147483658" r:id="rId13"/>
+    <p:sldLayoutId id="2147483659" r:id="rId14"/>
   </p:sldLayoutIdLst>
   <p:hf sldNum="0" hdr="0" ftr="0" dt="0"/>
   <p:txStyles>
     <p:titleStyle>
-      <a:lvl1pPr algn="l" defTabSz="914400" rtl="0" eaLnBrk="1" latinLnBrk="0" hangingPunct="1">
-        <a:lnSpc>
-          <a:spcPct val="90000"/>
-        </a:lnSpc>
+      <a:lvl1pPr algn="l" defTabSz="457200" rtl="0" eaLnBrk="1" latinLnBrk="0" hangingPunct="1">
         <a:spcBef>
           <a:spcPct val="0"/>
         </a:spcBef>
         <a:buNone/>
-        <a:defRPr sz="3600" kern="1200" spc="-60" baseline="0">
+        <a:defRPr sz="4000" b="1" kern="1200">
           <a:solidFill>
-            <a:srgbClr val="FFFFFF"/>
+            <a:srgbClr val="FEFEFE"/>
           </a:solidFill>
           <a:latin typeface="+mj-lt"/>
           <a:ea typeface="+mj-ea"/>
           <a:cs typeface="+mj-cs"/>
         </a:defRPr>
       </a:lvl1pPr>
+      <a:lvl2pPr eaLnBrk="1" hangingPunct="1">
+        <a:defRPr>
+          <a:solidFill>
+            <a:schemeClr val="tx2"/>
+          </a:solidFill>
+        </a:defRPr>
+      </a:lvl2pPr>
+      <a:lvl3pPr eaLnBrk="1" hangingPunct="1">
+        <a:defRPr>
+          <a:solidFill>
+            <a:schemeClr val="tx2"/>
+          </a:solidFill>
+        </a:defRPr>
+      </a:lvl3pPr>
+      <a:lvl4pPr eaLnBrk="1" hangingPunct="1">
+        <a:defRPr>
+          <a:solidFill>
+            <a:schemeClr val="tx2"/>
+          </a:solidFill>
+        </a:defRPr>
+      </a:lvl4pPr>
+      <a:lvl5pPr eaLnBrk="1" hangingPunct="1">
+        <a:defRPr>
+          <a:solidFill>
+            <a:schemeClr val="tx2"/>
+          </a:solidFill>
+        </a:defRPr>
+      </a:lvl5pPr>
+      <a:lvl6pPr eaLnBrk="1" hangingPunct="1">
+        <a:defRPr>
+          <a:solidFill>
+            <a:schemeClr val="tx2"/>
+          </a:solidFill>
+        </a:defRPr>
+      </a:lvl6pPr>
+      <a:lvl7pPr eaLnBrk="1" hangingPunct="1">
+        <a:defRPr>
+          <a:solidFill>
+            <a:schemeClr val="tx2"/>
+          </a:solidFill>
+        </a:defRPr>
+      </a:lvl7pPr>
+      <a:lvl8pPr eaLnBrk="1" hangingPunct="1">
+        <a:defRPr>
+          <a:solidFill>
+            <a:schemeClr val="tx2"/>
+          </a:solidFill>
+        </a:defRPr>
+      </a:lvl8pPr>
+      <a:lvl9pPr eaLnBrk="1" hangingPunct="1">
+        <a:defRPr>
+          <a:solidFill>
+            <a:schemeClr val="tx2"/>
+          </a:solidFill>
+        </a:defRPr>
+      </a:lvl9pPr>
     </p:titleStyle>
     <p:bodyStyle>
-      <a:lvl1pPr marL="182880" indent="-182880" algn="l" defTabSz="914400" rtl="0" eaLnBrk="1" latinLnBrk="0" hangingPunct="1">
-        <a:lnSpc>
-          <a:spcPct val="90000"/>
-        </a:lnSpc>
+      <a:lvl1pPr marL="342900" indent="-342900" algn="l" defTabSz="457200" rtl="0" eaLnBrk="1" latinLnBrk="0" hangingPunct="1">
         <a:spcBef>
-          <a:spcPts val="1200"/>
+          <a:spcPct val="20000"/>
         </a:spcBef>
+        <a:spcAft>
+          <a:spcPts val="600"/>
+        </a:spcAft>
         <a:buClr>
           <a:schemeClr val="accent1"/>
         </a:buClr>
-        <a:buFont typeface="Wingdings 2" pitchFamily="18" charset="2"/>
-        <a:buChar char=""/>
-        <a:defRPr sz="2000" kern="1200">
+        <a:buFont typeface="Wingdings 2" charset="2"/>
+        <a:buChar char=""/>
+        <a:defRPr sz="1800" kern="1200">
           <a:solidFill>
-            <a:schemeClr val="tx1">
-              <a:lumMod val="65000"/>
-              <a:lumOff val="35000"/>
-            </a:schemeClr>
+            <a:schemeClr val="tx1"/>
           </a:solidFill>
           <a:latin typeface="+mn-lt"/>
           <a:ea typeface="+mn-ea"/>
           <a:cs typeface="+mn-cs"/>
         </a:defRPr>
       </a:lvl1pPr>
-      <a:lvl2pPr marL="685800" indent="-182880" algn="l" defTabSz="914400" rtl="0" eaLnBrk="1" latinLnBrk="0" hangingPunct="1">
-        <a:lnSpc>
-          <a:spcPct val="90000"/>
-        </a:lnSpc>
+      <a:lvl2pPr marL="742950" indent="-285750" algn="l" defTabSz="457200" rtl="0" eaLnBrk="1" latinLnBrk="0" hangingPunct="1">
         <a:spcBef>
-          <a:spcPts val="250"/>
+          <a:spcPct val="20000"/>
         </a:spcBef>
         <a:spcAft>
-          <a:spcPts val="250"/>
+          <a:spcPts val="600"/>
         </a:spcAft>
         <a:buClr>
           <a:schemeClr val="accent1"/>
         </a:buClr>
-        <a:buFont typeface="Wingdings 2" pitchFamily="18" charset="2"/>
-        <a:buChar char=""/>
-        <a:defRPr sz="1800" kern="1200">
+        <a:buFont typeface="Wingdings 2" charset="2"/>
+        <a:buChar char=""/>
+        <a:defRPr sz="1600" kern="1200">
           <a:solidFill>
-            <a:schemeClr val="tx1">
-              <a:lumMod val="65000"/>
-              <a:lumOff val="35000"/>
-            </a:schemeClr>
+            <a:schemeClr val="tx1"/>
           </a:solidFill>
           <a:latin typeface="+mn-lt"/>
           <a:ea typeface="+mn-ea"/>
           <a:cs typeface="+mn-cs"/>
         </a:defRPr>
       </a:lvl2pPr>
-      <a:lvl3pPr marL="1143000" indent="-182880" algn="l" defTabSz="914400" rtl="0" eaLnBrk="1" latinLnBrk="0" hangingPunct="1">
-        <a:lnSpc>
-          <a:spcPct val="90000"/>
-        </a:lnSpc>
+      <a:lvl3pPr marL="1143000" indent="-228600" algn="l" defTabSz="457200" rtl="0" eaLnBrk="1" latinLnBrk="0" hangingPunct="1">
         <a:spcBef>
-          <a:spcPts val="250"/>
+          <a:spcPct val="20000"/>
         </a:spcBef>
         <a:spcAft>
-          <a:spcPts val="250"/>
+          <a:spcPts val="600"/>
         </a:spcAft>
         <a:buClr>
           <a:schemeClr val="accent1"/>
         </a:buClr>
-        <a:buFont typeface="Wingdings 2" pitchFamily="18" charset="2"/>
-        <a:buChar char=""/>
-        <a:defRPr sz="1600" kern="1200">
+        <a:buFont typeface="Wingdings 2" charset="2"/>
+        <a:buChar char=""/>
+        <a:defRPr sz="1400" kern="1200">
           <a:solidFill>
-            <a:schemeClr val="tx1">
-              <a:lumMod val="65000"/>
-              <a:lumOff val="35000"/>
-            </a:schemeClr>
+            <a:schemeClr val="tx1"/>
           </a:solidFill>
           <a:latin typeface="+mn-lt"/>
           <a:ea typeface="+mn-ea"/>
           <a:cs typeface="+mn-cs"/>
         </a:defRPr>
       </a:lvl3pPr>
-      <a:lvl4pPr marL="1600200" indent="-182880" algn="l" defTabSz="914400" rtl="0" eaLnBrk="1" latinLnBrk="0" hangingPunct="1">
-        <a:lnSpc>
-          <a:spcPct val="90000"/>
-        </a:lnSpc>
+      <a:lvl4pPr marL="1600200" indent="-228600" algn="l" defTabSz="457200" rtl="0" eaLnBrk="1" latinLnBrk="0" hangingPunct="1">
         <a:spcBef>
-          <a:spcPts val="250"/>
+          <a:spcPct val="20000"/>
         </a:spcBef>
         <a:spcAft>
-          <a:spcPts val="250"/>
+          <a:spcPts val="600"/>
         </a:spcAft>
         <a:buClr>
           <a:schemeClr val="accent1"/>
         </a:buClr>
-        <a:buFont typeface="Wingdings 2" pitchFamily="18" charset="2"/>
-        <a:buChar char=""/>
-        <a:defRPr sz="1400" kern="1200">
+        <a:buFont typeface="Wingdings 2" charset="2"/>
+        <a:buChar char=""/>
+        <a:defRPr sz="1200" kern="1200">
           <a:solidFill>
-            <a:schemeClr val="tx1">
-              <a:lumMod val="65000"/>
-              <a:lumOff val="35000"/>
-            </a:schemeClr>
+            <a:schemeClr val="tx1"/>
           </a:solidFill>
           <a:latin typeface="+mn-lt"/>
           <a:ea typeface="+mn-ea"/>
           <a:cs typeface="+mn-cs"/>
         </a:defRPr>
       </a:lvl4pPr>
-      <a:lvl5pPr marL="2057400" indent="-182880" algn="l" defTabSz="914400" rtl="0" eaLnBrk="1" latinLnBrk="0" hangingPunct="1">
-        <a:lnSpc>
-          <a:spcPct val="90000"/>
-        </a:lnSpc>
+      <a:lvl5pPr marL="2057400" indent="-228600" algn="l" defTabSz="457200" rtl="0" eaLnBrk="1" latinLnBrk="0" hangingPunct="1">
         <a:spcBef>
-          <a:spcPts val="250"/>
+          <a:spcPct val="20000"/>
         </a:spcBef>
         <a:spcAft>
-          <a:spcPts val="250"/>
+          <a:spcPts val="600"/>
         </a:spcAft>
         <a:buClr>
           <a:schemeClr val="accent1"/>
         </a:buClr>
-        <a:buFont typeface="Wingdings 2" pitchFamily="18" charset="2"/>
-        <a:buChar char=""/>
-        <a:defRPr sz="1400" kern="1200">
+        <a:buFont typeface="Wingdings 2" charset="2"/>
+        <a:buChar char=""/>
+        <a:defRPr sz="1200" kern="1200">
           <a:solidFill>
-            <a:schemeClr val="tx1">
-              <a:lumMod val="65000"/>
-              <a:lumOff val="35000"/>
-            </a:schemeClr>
+            <a:schemeClr val="tx1"/>
           </a:solidFill>
           <a:latin typeface="+mn-lt"/>
           <a:ea typeface="+mn-ea"/>
           <a:cs typeface="+mn-cs"/>
         </a:defRPr>
       </a:lvl5pPr>
-      <a:lvl6pPr marL="2514600" indent="-228600" algn="l" defTabSz="914400" rtl="0" eaLnBrk="1" latinLnBrk="0" hangingPunct="1">
-        <a:lnSpc>
-          <a:spcPct val="90000"/>
-        </a:lnSpc>
+      <a:lvl6pPr marL="2400000" indent="-228600" algn="l" defTabSz="457200" rtl="0" eaLnBrk="1" latinLnBrk="0" hangingPunct="1">
         <a:spcBef>
-          <a:spcPts val="250"/>
+          <a:spcPct val="20000"/>
         </a:spcBef>
         <a:spcAft>
-          <a:spcPts val="250"/>
+          <a:spcPts val="600"/>
         </a:spcAft>
         <a:buClr>
           <a:schemeClr val="accent1"/>
         </a:buClr>
-        <a:buFont typeface="Wingdings 2" pitchFamily="18" charset="2"/>
-        <a:buChar char=""/>
-        <a:defRPr sz="1400" kern="1200">
+        <a:buFont typeface="Wingdings 2" charset="2"/>
+        <a:buChar char=""/>
+        <a:defRPr sz="1200" kern="1200">
           <a:solidFill>
-            <a:schemeClr val="tx1">
-              <a:lumMod val="65000"/>
-              <a:lumOff val="35000"/>
-            </a:schemeClr>
+            <a:schemeClr val="tx1"/>
           </a:solidFill>
           <a:latin typeface="+mn-lt"/>
           <a:ea typeface="+mn-ea"/>
           <a:cs typeface="+mn-cs"/>
         </a:defRPr>
       </a:lvl6pPr>
-      <a:lvl7pPr marL="2971800" indent="-228600" algn="l" defTabSz="914400" rtl="0" eaLnBrk="1" latinLnBrk="0" hangingPunct="1">
-        <a:lnSpc>
-          <a:spcPct val="90000"/>
-        </a:lnSpc>
+      <a:lvl7pPr marL="2800000" indent="-228600" algn="l" defTabSz="457200" rtl="0" eaLnBrk="1" latinLnBrk="0" hangingPunct="1">
         <a:spcBef>
-          <a:spcPts val="250"/>
+          <a:spcPct val="20000"/>
         </a:spcBef>
         <a:spcAft>
-          <a:spcPts val="250"/>
+          <a:spcPts val="600"/>
         </a:spcAft>
         <a:buClr>
           <a:schemeClr val="accent1"/>
         </a:buClr>
-        <a:buFont typeface="Wingdings 2" pitchFamily="18" charset="2"/>
-        <a:buChar char=""/>
-        <a:defRPr sz="1400" kern="1200">
+        <a:buFont typeface="Wingdings 2" charset="2"/>
+        <a:buChar char=""/>
+        <a:defRPr sz="1200" kern="1200">
           <a:solidFill>
-            <a:schemeClr val="tx1">
-              <a:lumMod val="65000"/>
-              <a:lumOff val="35000"/>
-            </a:schemeClr>
+            <a:schemeClr val="tx1"/>
           </a:solidFill>
           <a:latin typeface="+mn-lt"/>
           <a:ea typeface="+mn-ea"/>
           <a:cs typeface="+mn-cs"/>
         </a:defRPr>
       </a:lvl7pPr>
-      <a:lvl8pPr marL="3429000" indent="-228600" algn="l" defTabSz="914400" rtl="0" eaLnBrk="1" latinLnBrk="0" hangingPunct="1">
-        <a:lnSpc>
-          <a:spcPct val="90000"/>
-        </a:lnSpc>
+      <a:lvl8pPr marL="3200000" indent="-228600" algn="l" defTabSz="457200" rtl="0" eaLnBrk="1" latinLnBrk="0" hangingPunct="1">
         <a:spcBef>
-          <a:spcPts val="250"/>
+          <a:spcPct val="20000"/>
         </a:spcBef>
         <a:spcAft>
-          <a:spcPts val="250"/>
+          <a:spcPts val="600"/>
         </a:spcAft>
         <a:buClr>
           <a:schemeClr val="accent1"/>
         </a:buClr>
-        <a:buFont typeface="Wingdings 2" pitchFamily="18" charset="2"/>
-        <a:buChar char=""/>
-        <a:defRPr sz="1400" kern="1200">
+        <a:buFont typeface="Wingdings 2" charset="2"/>
+        <a:buChar char=""/>
+        <a:defRPr sz="1200" kern="1200">
           <a:solidFill>
-            <a:schemeClr val="tx1">
-              <a:lumMod val="65000"/>
-              <a:lumOff val="35000"/>
-            </a:schemeClr>
+            <a:schemeClr val="tx1"/>
           </a:solidFill>
           <a:latin typeface="+mn-lt"/>
           <a:ea typeface="+mn-ea"/>
           <a:cs typeface="+mn-cs"/>
         </a:defRPr>
       </a:lvl8pPr>
-      <a:lvl9pPr marL="3886200" indent="-228600" algn="l" defTabSz="914400" rtl="0" eaLnBrk="1" latinLnBrk="0" hangingPunct="1">
-        <a:lnSpc>
-          <a:spcPct val="90000"/>
-        </a:lnSpc>
+      <a:lvl9pPr marL="3600000" indent="-228600" algn="l" defTabSz="457200" rtl="0" eaLnBrk="1" latinLnBrk="0" hangingPunct="1">
         <a:spcBef>
-          <a:spcPts val="250"/>
+          <a:spcPct val="20000"/>
         </a:spcBef>
         <a:spcAft>
-          <a:spcPts val="250"/>
+          <a:spcPts val="600"/>
         </a:spcAft>
         <a:buClr>
           <a:schemeClr val="accent1"/>
         </a:buClr>
-        <a:buFont typeface="Wingdings 2" pitchFamily="18" charset="2"/>
-        <a:buChar char=""/>
-        <a:defRPr sz="1400" kern="1200">
+        <a:buFont typeface="Wingdings 2" charset="2"/>
+        <a:buChar char=""/>
+        <a:defRPr sz="1200" kern="1200">
           <a:solidFill>
-            <a:schemeClr val="tx1">
-              <a:lumMod val="65000"/>
-              <a:lumOff val="35000"/>
-            </a:schemeClr>
+            <a:schemeClr val="tx1"/>
           </a:solidFill>
           <a:latin typeface="+mn-lt"/>
           <a:ea typeface="+mn-ea"/>
@@ -3251,7 +5234,7 @@
       <a:defPPr>
         <a:defRPr lang="en-US"/>
       </a:defPPr>
-      <a:lvl1pPr marL="0" algn="l" defTabSz="914400" rtl="0" eaLnBrk="1" latinLnBrk="0" hangingPunct="1">
+      <a:lvl1pPr marL="0" algn="l" defTabSz="457200" rtl="0" eaLnBrk="1" latinLnBrk="0" hangingPunct="1">
         <a:defRPr sz="1800" kern="1200">
           <a:solidFill>
             <a:schemeClr val="tx1"/>
@@ -3261,7 +5244,7 @@
           <a:cs typeface="+mn-cs"/>
         </a:defRPr>
       </a:lvl1pPr>
-      <a:lvl2pPr marL="457200" algn="l" defTabSz="914400" rtl="0" eaLnBrk="1" latinLnBrk="0" hangingPunct="1">
+      <a:lvl2pPr marL="457200" algn="l" defTabSz="457200" rtl="0" eaLnBrk="1" latinLnBrk="0" hangingPunct="1">
         <a:defRPr sz="1800" kern="1200">
           <a:solidFill>
             <a:schemeClr val="tx1"/>
@@ -3271,7 +5254,7 @@
           <a:cs typeface="+mn-cs"/>
         </a:defRPr>
       </a:lvl2pPr>
-      <a:lvl3pPr marL="914400" algn="l" defTabSz="914400" rtl="0" eaLnBrk="1" latinLnBrk="0" hangingPunct="1">
+      <a:lvl3pPr marL="914400" algn="l" defTabSz="457200" rtl="0" eaLnBrk="1" latinLnBrk="0" hangingPunct="1">
         <a:defRPr sz="1800" kern="1200">
           <a:solidFill>
             <a:schemeClr val="tx1"/>
@@ -3281,7 +5264,7 @@
           <a:cs typeface="+mn-cs"/>
         </a:defRPr>
       </a:lvl3pPr>
-      <a:lvl4pPr marL="1371600" algn="l" defTabSz="914400" rtl="0" eaLnBrk="1" latinLnBrk="0" hangingPunct="1">
+      <a:lvl4pPr marL="1371600" algn="l" defTabSz="457200" rtl="0" eaLnBrk="1" latinLnBrk="0" hangingPunct="1">
         <a:defRPr sz="1800" kern="1200">
           <a:solidFill>
             <a:schemeClr val="tx1"/>
@@ -3291,7 +5274,7 @@
           <a:cs typeface="+mn-cs"/>
         </a:defRPr>
       </a:lvl4pPr>
-      <a:lvl5pPr marL="1828800" algn="l" defTabSz="914400" rtl="0" eaLnBrk="1" latinLnBrk="0" hangingPunct="1">
+      <a:lvl5pPr marL="1828800" algn="l" defTabSz="457200" rtl="0" eaLnBrk="1" latinLnBrk="0" hangingPunct="1">
         <a:defRPr sz="1800" kern="1200">
           <a:solidFill>
             <a:schemeClr val="tx1"/>
@@ -3301,7 +5284,7 @@
           <a:cs typeface="+mn-cs"/>
         </a:defRPr>
       </a:lvl5pPr>
-      <a:lvl6pPr marL="2286000" algn="l" defTabSz="914400" rtl="0" eaLnBrk="1" latinLnBrk="0" hangingPunct="1">
+      <a:lvl6pPr marL="2286000" algn="l" defTabSz="457200" rtl="0" eaLnBrk="1" latinLnBrk="0" hangingPunct="1">
         <a:defRPr sz="1800" kern="1200">
           <a:solidFill>
             <a:schemeClr val="tx1"/>
@@ -3311,7 +5294,7 @@
           <a:cs typeface="+mn-cs"/>
         </a:defRPr>
       </a:lvl6pPr>
-      <a:lvl7pPr marL="2743200" algn="l" defTabSz="914400" rtl="0" eaLnBrk="1" latinLnBrk="0" hangingPunct="1">
+      <a:lvl7pPr marL="2743200" algn="l" defTabSz="457200" rtl="0" eaLnBrk="1" latinLnBrk="0" hangingPunct="1">
         <a:defRPr sz="1800" kern="1200">
           <a:solidFill>
             <a:schemeClr val="tx1"/>
@@ -3321,7 +5304,7 @@
           <a:cs typeface="+mn-cs"/>
         </a:defRPr>
       </a:lvl7pPr>
-      <a:lvl8pPr marL="3200400" algn="l" defTabSz="914400" rtl="0" eaLnBrk="1" latinLnBrk="0" hangingPunct="1">
+      <a:lvl8pPr marL="3200400" algn="l" defTabSz="457200" rtl="0" eaLnBrk="1" latinLnBrk="0" hangingPunct="1">
         <a:defRPr sz="1800" kern="1200">
           <a:solidFill>
             <a:schemeClr val="tx1"/>
@@ -3331,7 +5314,7 @@
           <a:cs typeface="+mn-cs"/>
         </a:defRPr>
       </a:lvl8pPr>
-      <a:lvl9pPr marL="3657600" algn="l" defTabSz="914400" rtl="0" eaLnBrk="1" latinLnBrk="0" hangingPunct="1">
+      <a:lvl9pPr marL="3657600" algn="l" defTabSz="457200" rtl="0" eaLnBrk="1" latinLnBrk="0" hangingPunct="1">
         <a:defRPr sz="1800" kern="1200">
           <a:solidFill>
             <a:schemeClr val="tx1"/>
@@ -3380,12 +5363,15 @@
           <a:p>
             <a:r>
               <a:rPr lang="en-US" dirty="0"/>
-              <a:t>Predicting Air Quality in Salt Lake City</a:t>
+              <a:t>Predicting Air Quality in </a:t>
             </a:r>
             <a:br>
               <a:rPr lang="en-US" dirty="0"/>
             </a:br>
-            <a:endParaRPr lang="en-US" dirty="0"/>
+            <a:r>
+              <a:rPr lang="en-US" dirty="0"/>
+              <a:t>Salt Lake City</a:t>
+            </a:r>
           </a:p>
         </p:txBody>
       </p:sp>
@@ -3399,10 +5385,15 @@
             <p:ph type="subTitle" idx="1"/>
           </p:nvPr>
         </p:nvSpPr>
-        <p:spPr/>
+        <p:spPr>
+          <a:xfrm>
+            <a:off x="810001" y="5280847"/>
+            <a:ext cx="10572000" cy="1163496"/>
+          </a:xfrm>
+        </p:spPr>
         <p:txBody>
           <a:bodyPr>
-            <a:normAutofit fontScale="70000" lnSpcReduction="20000"/>
+            <a:normAutofit lnSpcReduction="10000"/>
           </a:bodyPr>
           <a:lstStyle/>
           <a:p>
@@ -3418,10 +5409,7 @@
               <a:rPr lang="en-US" dirty="0" err="1"/>
               <a:t>Fitozovic</a:t>
             </a:r>
-            <a:r>
-              <a:rPr lang="en-US" dirty="0"/>
-              <a:t>, </a:t>
-            </a:r>
+            <a:endParaRPr lang="en-US" dirty="0"/>
           </a:p>
           <a:p>
             <a:r>
@@ -3432,7 +5420,7 @@
           <a:p>
             <a:r>
               <a:rPr lang="en-US" dirty="0"/>
-              <a:t> Rob Olsen</a:t>
+              <a:t>Grant(Rob) Olsen</a:t>
             </a:r>
           </a:p>
         </p:txBody>
@@ -3440,7 +5428,7 @@
     </p:spTree>
     <p:extLst>
       <p:ext uri="{BB962C8B-B14F-4D97-AF65-F5344CB8AC3E}">
-        <p14:creationId xmlns:p14="http://schemas.microsoft.com/office/powerpoint/2010/main" val="4240207975"/>
+        <p14:creationId xmlns:p14="http://schemas.microsoft.com/office/powerpoint/2010/main" val="2868616126"/>
       </p:ext>
     </p:extLst>
   </p:cSld>
@@ -3484,7 +5472,7 @@
           <a:p>
             <a:r>
               <a:rPr lang="en-US" dirty="0"/>
-              <a:t>Introduction</a:t>
+              <a:t>The Idea</a:t>
             </a:r>
           </a:p>
         </p:txBody>
@@ -3511,7 +5499,7 @@
     </p:spTree>
     <p:extLst>
       <p:ext uri="{BB962C8B-B14F-4D97-AF65-F5344CB8AC3E}">
-        <p14:creationId xmlns:p14="http://schemas.microsoft.com/office/powerpoint/2010/main" val="401573138"/>
+        <p14:creationId xmlns:p14="http://schemas.microsoft.com/office/powerpoint/2010/main" val="3422452107"/>
       </p:ext>
     </p:extLst>
   </p:cSld>
@@ -3548,19 +5536,14 @@
             <p:ph type="title"/>
           </p:nvPr>
         </p:nvSpPr>
-        <p:spPr>
-          <a:xfrm>
-            <a:off x="252918" y="1123837"/>
-            <a:ext cx="3186967" cy="4601183"/>
-          </a:xfrm>
-        </p:spPr>
+        <p:spPr/>
         <p:txBody>
           <a:bodyPr/>
           <a:lstStyle/>
           <a:p>
             <a:r>
               <a:rPr lang="en-US" dirty="0"/>
-              <a:t>Data Collection/ Cleaning</a:t>
+              <a:t>Data Sources, Collection, and Cleaning</a:t>
             </a:r>
           </a:p>
         </p:txBody>
@@ -3580,14 +5563,14 @@
           <a:bodyPr/>
           <a:lstStyle/>
           <a:p>
-            <a:endParaRPr lang="en-US" dirty="0"/>
+            <a:endParaRPr lang="en-US"/>
           </a:p>
         </p:txBody>
       </p:sp>
     </p:spTree>
     <p:extLst>
       <p:ext uri="{BB962C8B-B14F-4D97-AF65-F5344CB8AC3E}">
-        <p14:creationId xmlns:p14="http://schemas.microsoft.com/office/powerpoint/2010/main" val="4109136505"/>
+        <p14:creationId xmlns:p14="http://schemas.microsoft.com/office/powerpoint/2010/main" val="2013565401"/>
       </p:ext>
     </p:extLst>
   </p:cSld>
@@ -3651,14 +5634,14 @@
           <a:bodyPr/>
           <a:lstStyle/>
           <a:p>
-            <a:endParaRPr lang="en-US" dirty="0"/>
+            <a:endParaRPr lang="en-US"/>
           </a:p>
         </p:txBody>
       </p:sp>
     </p:spTree>
     <p:extLst>
       <p:ext uri="{BB962C8B-B14F-4D97-AF65-F5344CB8AC3E}">
-        <p14:creationId xmlns:p14="http://schemas.microsoft.com/office/powerpoint/2010/main" val="1407544623"/>
+        <p14:creationId xmlns:p14="http://schemas.microsoft.com/office/powerpoint/2010/main" val="1921106764"/>
       </p:ext>
     </p:extLst>
   </p:cSld>
@@ -3729,7 +5712,7 @@
     </p:spTree>
     <p:extLst>
       <p:ext uri="{BB962C8B-B14F-4D97-AF65-F5344CB8AC3E}">
-        <p14:creationId xmlns:p14="http://schemas.microsoft.com/office/powerpoint/2010/main" val="3069479242"/>
+        <p14:creationId xmlns:p14="http://schemas.microsoft.com/office/powerpoint/2010/main" val="1040328746"/>
       </p:ext>
     </p:extLst>
   </p:cSld>
@@ -3800,7 +5783,7 @@
     </p:spTree>
     <p:extLst>
       <p:ext uri="{BB962C8B-B14F-4D97-AF65-F5344CB8AC3E}">
-        <p14:creationId xmlns:p14="http://schemas.microsoft.com/office/powerpoint/2010/main" val="1171515177"/>
+        <p14:creationId xmlns:p14="http://schemas.microsoft.com/office/powerpoint/2010/main" val="337747022"/>
       </p:ext>
     </p:extLst>
   </p:cSld>
@@ -3829,27 +5812,50 @@
       </p:grpSpPr>
       <p:sp>
         <p:nvSpPr>
-          <p:cNvPr id="4" name="Title 3"/>
-          <p:cNvSpPr>
-            <a:spLocks noGrp="1"/>
-          </p:cNvSpPr>
-          <p:nvPr>
-            <p:ph type="ctrTitle"/>
-          </p:nvPr>
-        </p:nvSpPr>
-        <p:spPr>
-          <a:xfrm>
-            <a:off x="1069848" y="1298448"/>
-            <a:ext cx="7315200" cy="4391152"/>
-          </a:xfrm>
-        </p:spPr>
-        <p:txBody>
-          <a:bodyPr anchor="ctr"/>
-          <a:lstStyle/>
-          <a:p>
-            <a:pPr algn="ctr"/>
-            <a:r>
-              <a:rPr lang="en-US" dirty="0"/>
+          <p:cNvPr id="2" name="Title 1"/>
+          <p:cNvSpPr>
+            <a:spLocks noGrp="1"/>
+          </p:cNvSpPr>
+          <p:nvPr>
+            <p:ph type="title"/>
+          </p:nvPr>
+        </p:nvSpPr>
+        <p:spPr/>
+        <p:txBody>
+          <a:bodyPr/>
+          <a:lstStyle/>
+          <a:p>
+            <a:r>
+              <a:rPr lang="en-US" sz="4800" dirty="0"/>
+              <a:t>Thank you for your time</a:t>
+            </a:r>
+          </a:p>
+        </p:txBody>
+      </p:sp>
+      <p:sp>
+        <p:nvSpPr>
+          <p:cNvPr id="3" name="Text Placeholder 2"/>
+          <p:cNvSpPr>
+            <a:spLocks noGrp="1"/>
+          </p:cNvSpPr>
+          <p:nvPr>
+            <p:ph type="body" sz="quarter" idx="16"/>
+          </p:nvPr>
+        </p:nvSpPr>
+        <p:spPr/>
+        <p:txBody>
+          <a:bodyPr>
+            <a:normAutofit/>
+          </a:bodyPr>
+          <a:lstStyle/>
+          <a:p>
+            <a:pPr>
+              <a:lnSpc>
+                <a:spcPct val="250000"/>
+              </a:lnSpc>
+            </a:pPr>
+            <a:r>
+              <a:rPr lang="en-US" sz="4800" dirty="0"/>
               <a:t>Questions?</a:t>
             </a:r>
           </a:p>
@@ -3858,7 +5864,7 @@
     </p:spTree>
     <p:extLst>
       <p:ext uri="{BB962C8B-B14F-4D97-AF65-F5344CB8AC3E}">
-        <p14:creationId xmlns:p14="http://schemas.microsoft.com/office/powerpoint/2010/main" val="3607604008"/>
+        <p14:creationId xmlns:p14="http://schemas.microsoft.com/office/powerpoint/2010/main" val="2961838120"/>
       </p:ext>
     </p:extLst>
   </p:cSld>
@@ -3869,55 +5875,55 @@
 </file>
 
 <file path=ppt/theme/theme1.xml><?xml version="1.0" encoding="utf-8"?>
-<a:theme xmlns:a="http://schemas.openxmlformats.org/drawingml/2006/main" name="Frame">
+<a:theme xmlns:a="http://schemas.openxmlformats.org/drawingml/2006/main" name="Quotable">
   <a:themeElements>
-    <a:clrScheme name="Frame">
+    <a:clrScheme name="Quotable">
       <a:dk1>
-        <a:srgbClr val="000000"/>
+        <a:sysClr val="windowText" lastClr="000000"/>
       </a:dk1>
       <a:lt1>
-        <a:srgbClr val="FFFFFF"/>
+        <a:sysClr val="window" lastClr="FFFFFF"/>
       </a:lt1>
       <a:dk2>
-        <a:srgbClr val="545454"/>
+        <a:srgbClr val="212121"/>
       </a:dk2>
       <a:lt2>
-        <a:srgbClr val="BFBFBF"/>
+        <a:srgbClr val="636363"/>
       </a:lt2>
       <a:accent1>
-        <a:srgbClr val="40BAD2"/>
+        <a:srgbClr val="00C6BB"/>
       </a:accent1>
       <a:accent2>
-        <a:srgbClr val="FAB900"/>
+        <a:srgbClr val="6FEBA0"/>
       </a:accent2>
       <a:accent3>
-        <a:srgbClr val="90BB23"/>
+        <a:srgbClr val="B6DF5E"/>
       </a:accent3>
       <a:accent4>
-        <a:srgbClr val="EE7008"/>
+        <a:srgbClr val="EFB251"/>
       </a:accent4>
       <a:accent5>
-        <a:srgbClr val="1AB39F"/>
+        <a:srgbClr val="EF755F"/>
       </a:accent5>
       <a:accent6>
-        <a:srgbClr val="D5393D"/>
+        <a:srgbClr val="ED515C"/>
       </a:accent6>
       <a:hlink>
-        <a:srgbClr val="90BB23"/>
+        <a:srgbClr val="8F8F8F"/>
       </a:hlink>
       <a:folHlink>
-        <a:srgbClr val="EE7008"/>
+        <a:srgbClr val="A5A5A5"/>
       </a:folHlink>
     </a:clrScheme>
-    <a:fontScheme name="Frame">
+    <a:fontScheme name="Quotable">
       <a:majorFont>
-        <a:latin typeface="Corbel" panose="020B0503020204020204"/>
+        <a:latin typeface="Century Gothic" panose="020B0502020202020204"/>
         <a:ea typeface=""/>
         <a:cs typeface=""/>
         <a:font script="Jpan" typeface="ＭＳ ゴシック"/>
-        <a:font script="Hang" typeface="HY중고딕"/>
-        <a:font script="Hans" typeface="幼圆"/>
-        <a:font script="Hant" typeface="微軟正黑體"/>
+        <a:font script="Hang" typeface="맑은 고딕"/>
+        <a:font script="Hans" typeface="宋体"/>
+        <a:font script="Hant" typeface="新細明體"/>
         <a:font script="Arab" typeface="Tahoma"/>
         <a:font script="Hebr" typeface="Gisha"/>
         <a:font script="Thai" typeface="DilleniaUPC"/>
@@ -3946,13 +5952,13 @@
         <a:font script="Geor" typeface="Sylfaen"/>
       </a:majorFont>
       <a:minorFont>
-        <a:latin typeface="Corbel" panose="020B0503020204020204"/>
+        <a:latin typeface="Century Gothic" panose="020B0502020202020204"/>
         <a:ea typeface=""/>
         <a:cs typeface=""/>
         <a:font script="Jpan" typeface="ＭＳ ゴシック"/>
-        <a:font script="Hang" typeface="HY중고딕"/>
-        <a:font script="Hans" typeface="幼圆"/>
-        <a:font script="Hant" typeface="微軟正黑體"/>
+        <a:font script="Hang" typeface="맑은 고딕"/>
+        <a:font script="Hans" typeface="宋体"/>
+        <a:font script="Hant" typeface="新細明體"/>
         <a:font script="Arab" typeface="Tahoma"/>
         <a:font script="Hebr" typeface="Gisha"/>
         <a:font script="Thai" typeface="DilleniaUPC"/>
@@ -3981,43 +5987,59 @@
         <a:font script="Geor" typeface="Sylfaen"/>
       </a:minorFont>
     </a:fontScheme>
-    <a:fmtScheme name="Frame">
+    <a:fmtScheme name="Quotable">
       <a:fillStyleLst>
         <a:solidFill>
           <a:schemeClr val="phClr"/>
         </a:solidFill>
-        <a:solidFill>
-          <a:schemeClr val="phClr">
-            <a:tint val="65000"/>
-          </a:schemeClr>
-        </a:solidFill>
-        <a:solidFill>
-          <a:schemeClr val="phClr">
-            <a:shade val="80000"/>
-            <a:satMod val="150000"/>
-          </a:schemeClr>
-        </a:solidFill>
+        <a:gradFill rotWithShape="1">
+          <a:gsLst>
+            <a:gs pos="0">
+              <a:schemeClr val="phClr">
+                <a:tint val="80000"/>
+                <a:lumMod val="105000"/>
+              </a:schemeClr>
+            </a:gs>
+            <a:gs pos="100000">
+              <a:schemeClr val="phClr">
+                <a:tint val="90000"/>
+              </a:schemeClr>
+            </a:gs>
+          </a:gsLst>
+          <a:lin ang="5400000" scaled="0"/>
+        </a:gradFill>
+        <a:blipFill rotWithShape="1">
+          <a:blip xmlns:r="http://schemas.openxmlformats.org/officeDocument/2006/relationships" r:embed="rId1">
+            <a:duotone>
+              <a:schemeClr val="phClr">
+                <a:tint val="98000"/>
+                <a:lumMod val="102000"/>
+              </a:schemeClr>
+              <a:schemeClr val="phClr">
+                <a:shade val="98000"/>
+                <a:lumMod val="98000"/>
+              </a:schemeClr>
+            </a:duotone>
+          </a:blip>
+          <a:tile tx="0" ty="0" sx="100000" sy="100000" flip="none" algn="tl"/>
+        </a:blipFill>
       </a:fillStyleLst>
       <a:lnStyleLst>
-        <a:ln w="9525" cap="flat" cmpd="sng" algn="ctr">
+        <a:ln w="9525" cap="rnd" cmpd="sng" algn="ctr">
           <a:solidFill>
             <a:schemeClr val="phClr"/>
           </a:solidFill>
           <a:prstDash val="solid"/>
         </a:ln>
-        <a:ln w="10795" cap="flat" cmpd="sng" algn="ctr">
+        <a:ln w="15875" cap="rnd" cmpd="sng" algn="ctr">
           <a:solidFill>
             <a:schemeClr val="phClr"/>
           </a:solidFill>
           <a:prstDash val="solid"/>
         </a:ln>
-        <a:ln w="17145" cap="flat" cmpd="sng" algn="ctr">
+        <a:ln w="25400" cap="rnd" cmpd="sng" algn="ctr">
           <a:solidFill>
-            <a:schemeClr val="phClr">
-              <a:shade val="95000"/>
-              <a:alpha val="50000"/>
-              <a:satMod val="150000"/>
-            </a:schemeClr>
+            <a:schemeClr val="phClr"/>
           </a:solidFill>
           <a:prstDash val="solid"/>
         </a:ln>
@@ -4031,57 +6053,47 @@
         </a:effectStyle>
         <a:effectStyle>
           <a:effectLst>
-            <a:outerShdw blurRad="44450" dist="13970" dir="5400000" algn="ctr" rotWithShape="0">
+            <a:innerShdw blurRad="63500" dist="25400" dir="13500000">
               <a:srgbClr val="000000">
-                <a:alpha val="45000"/>
+                <a:alpha val="75000"/>
               </a:srgbClr>
-            </a:outerShdw>
+            </a:innerShdw>
           </a:effectLst>
-          <a:scene3d>
-            <a:camera prst="orthographicFront">
-              <a:rot lat="0" lon="0" rev="0"/>
-            </a:camera>
-            <a:lightRig rig="twoPt" dir="tl"/>
-          </a:scene3d>
-          <a:sp3d prstMaterial="flat">
-            <a:bevelT w="12700" h="25400" prst="coolSlant"/>
-          </a:sp3d>
         </a:effectStyle>
       </a:effectStyleLst>
       <a:bgFillStyleLst>
         <a:solidFill>
           <a:schemeClr val="phClr"/>
         </a:solidFill>
-        <a:solidFill>
-          <a:schemeClr val="phClr">
-            <a:tint val="95000"/>
-            <a:satMod val="170000"/>
-          </a:schemeClr>
-        </a:solidFill>
         <a:gradFill rotWithShape="1">
           <a:gsLst>
             <a:gs pos="0">
               <a:schemeClr val="phClr">
-                <a:tint val="93000"/>
-                <a:shade val="98000"/>
-                <a:satMod val="120000"/>
-                <a:lumMod val="102000"/>
-              </a:schemeClr>
-            </a:gs>
-            <a:gs pos="48000">
-              <a:schemeClr val="phClr">
-                <a:tint val="98000"/>
-                <a:shade val="90000"/>
-                <a:satMod val="110000"/>
-                <a:lumMod val="103000"/>
+                <a:tint val="100000"/>
               </a:schemeClr>
             </a:gs>
             <a:gs pos="100000">
               <a:schemeClr val="phClr">
-                <a:tint val="98000"/>
-                <a:shade val="80000"/>
-                <a:satMod val="100000"/>
+                <a:tint val="84000"/>
+                <a:shade val="84000"/>
+                <a:lumMod val="90000"/>
               </a:schemeClr>
+            </a:gs>
+          </a:gsLst>
+          <a:lin ang="5400000" scaled="0"/>
+        </a:gradFill>
+        <a:gradFill rotWithShape="1">
+          <a:gsLst>
+            <a:gs pos="0">
+              <a:schemeClr val="phClr">
+                <a:tint val="84000"/>
+                <a:shade val="90000"/>
+                <a:satMod val="120000"/>
+                <a:lumMod val="90000"/>
+              </a:schemeClr>
+            </a:gs>
+            <a:gs pos="100000">
+              <a:schemeClr val="phClr"/>
             </a:gs>
           </a:gsLst>
           <a:lin ang="5400000" scaled="0"/>
@@ -4093,7 +6105,7 @@
   <a:extraClrSchemeLst/>
   <a:extLst>
     <a:ext uri="{05A4C25C-085E-4340-85A3-A5531E510DB2}">
-      <thm15:themeFamily xmlns:thm15="http://schemas.microsoft.com/office/thememl/2012/main" name="Frame" id="{F226E7A2-7162-461C-9490-D27D9DC04E43}" vid="{629A0216-3BBD-45C0-B63F-2683BEA18F60}"/>
+      <thm15:themeFamily xmlns:thm15="http://schemas.microsoft.com/office/thememl/2012/main" name="Quotable" id="{39EC5628-30ED-4578-ACD8-9820EDB8E15A}" vid="{6F3559E9-1A4C-49D8-94D4-F41003531C49}"/>
     </a:ext>
   </a:extLst>
 </a:theme>

--- a/Predicting Air Quality in Salt Lake City PowerPoint.pptx
+++ b/Predicting Air Quality in Salt Lake City PowerPoint.pptx
@@ -6,12 +6,16 @@
   </p:sldMasterIdLst>
   <p:sldIdLst>
     <p:sldId id="256" r:id="rId2"/>
-    <p:sldId id="257" r:id="rId3"/>
-    <p:sldId id="258" r:id="rId4"/>
-    <p:sldId id="259" r:id="rId5"/>
-    <p:sldId id="260" r:id="rId6"/>
-    <p:sldId id="261" r:id="rId7"/>
-    <p:sldId id="262" r:id="rId8"/>
+    <p:sldId id="263" r:id="rId3"/>
+    <p:sldId id="264" r:id="rId4"/>
+    <p:sldId id="265" r:id="rId5"/>
+    <p:sldId id="258" r:id="rId6"/>
+    <p:sldId id="266" r:id="rId7"/>
+    <p:sldId id="267" r:id="rId8"/>
+    <p:sldId id="268" r:id="rId9"/>
+    <p:sldId id="269" r:id="rId10"/>
+    <p:sldId id="270" r:id="rId11"/>
+    <p:sldId id="262" r:id="rId12"/>
   </p:sldIdLst>
   <p:sldSz cx="12192000" cy="6858000"/>
   <p:notesSz cx="6858000" cy="9144000"/>
@@ -110,6 +114,11 @@
       </a:defRPr>
     </a:lvl9pPr>
   </p:defaultTextStyle>
+  <p:extLst>
+    <p:ext uri="{EFAFB233-063F-42B5-8137-9DF3F51BA10A}">
+      <p15:sldGuideLst xmlns:p15="http://schemas.microsoft.com/office/powerpoint/2012/main"/>
+    </p:ext>
+  </p:extLst>
 </p:presentation>
 </file>
 
@@ -208,7 +217,7 @@
           <a:effectLst/>
           <a:extLst>
             <a:ext uri="{91240B29-F687-4f45-9708-019B960494DF}">
-              <a14:hiddenLine xmlns:a14="http://schemas.microsoft.com/office/drawing/2010/main" xmlns="" w="9525">
+              <a14:hiddenLine xmlns="" xmlns:a14="http://schemas.microsoft.com/office/drawing/2010/main" w="9525">
                 <a:solidFill>
                   <a:srgbClr val="000000"/>
                 </a:solidFill>
@@ -1718,7 +1727,7 @@
           <a:ln/>
           <a:extLst>
             <a:ext uri="{91240B29-F687-4f45-9708-019B960494DF}">
-              <a14:hiddenLine xmlns:a14="http://schemas.microsoft.com/office/drawing/2010/main" xmlns="" w="9525">
+              <a14:hiddenLine xmlns="" xmlns:a14="http://schemas.microsoft.com/office/drawing/2010/main" w="9525">
                 <a:solidFill>
                   <a:srgbClr val="000000"/>
                 </a:solidFill>
@@ -1990,7 +1999,7 @@
           <a:ln/>
           <a:extLst>
             <a:ext uri="{91240B29-F687-4f45-9708-019B960494DF}">
-              <a14:hiddenLine xmlns:a14="http://schemas.microsoft.com/office/drawing/2010/main" xmlns="" w="9525">
+              <a14:hiddenLine xmlns="" xmlns:a14="http://schemas.microsoft.com/office/drawing/2010/main" w="9525">
                 <a:solidFill>
                   <a:srgbClr val="000000"/>
                 </a:solidFill>
@@ -2270,7 +2279,7 @@
           <a:ln/>
           <a:extLst>
             <a:ext uri="{91240B29-F687-4f45-9708-019B960494DF}">
-              <a14:hiddenLine xmlns:a14="http://schemas.microsoft.com/office/drawing/2010/main" xmlns="" w="9525">
+              <a14:hiddenLine xmlns="" xmlns:a14="http://schemas.microsoft.com/office/drawing/2010/main" w="9525">
                 <a:solidFill>
                   <a:srgbClr val="000000"/>
                 </a:solidFill>
@@ -2890,7 +2899,7 @@
           <a:ln/>
           <a:extLst>
             <a:ext uri="{91240B29-F687-4f45-9708-019B960494DF}">
-              <a14:hiddenLine xmlns:a14="http://schemas.microsoft.com/office/drawing/2010/main" xmlns="" w="9525">
+              <a14:hiddenLine xmlns="" xmlns:a14="http://schemas.microsoft.com/office/drawing/2010/main" w="9525">
                 <a:solidFill>
                   <a:srgbClr val="000000"/>
                 </a:solidFill>
@@ -3226,7 +3235,7 @@
           <a:ln/>
           <a:extLst>
             <a:ext uri="{91240B29-F687-4f45-9708-019B960494DF}">
-              <a14:hiddenLine xmlns:a14="http://schemas.microsoft.com/office/drawing/2010/main" xmlns="" w="9525">
+              <a14:hiddenLine xmlns="" xmlns:a14="http://schemas.microsoft.com/office/drawing/2010/main" w="9525">
                 <a:solidFill>
                   <a:srgbClr val="000000"/>
                 </a:solidFill>
@@ -3700,7 +3709,7 @@
           <a:ln/>
           <a:extLst>
             <a:ext uri="{91240B29-F687-4f45-9708-019B960494DF}">
-              <a14:hiddenLine xmlns:a14="http://schemas.microsoft.com/office/drawing/2010/main" xmlns="" w="9525">
+              <a14:hiddenLine xmlns="" xmlns:a14="http://schemas.microsoft.com/office/drawing/2010/main" w="9525">
                 <a:solidFill>
                   <a:srgbClr val="000000"/>
                 </a:solidFill>
@@ -4123,7 +4132,7 @@
           <a:ln/>
           <a:extLst>
             <a:ext uri="{91240B29-F687-4f45-9708-019B960494DF}">
-              <a14:hiddenLine xmlns:a14="http://schemas.microsoft.com/office/drawing/2010/main" xmlns="" w="9525">
+              <a14:hiddenLine xmlns="" xmlns:a14="http://schemas.microsoft.com/office/drawing/2010/main" w="9525">
                 <a:solidFill>
                   <a:srgbClr val="000000"/>
                 </a:solidFill>
@@ -5438,6 +5447,155 @@
 </p:sld>
 </file>
 
+<file path=ppt/slides/slide10.xml><?xml version="1.0" encoding="utf-8"?>
+<p:sld xmlns:a="http://schemas.openxmlformats.org/drawingml/2006/main" xmlns:r="http://schemas.openxmlformats.org/officeDocument/2006/relationships" xmlns:p="http://schemas.openxmlformats.org/presentationml/2006/main">
+  <p:cSld>
+    <p:spTree>
+      <p:nvGrpSpPr>
+        <p:cNvPr id="1" name=""/>
+        <p:cNvGrpSpPr/>
+        <p:nvPr/>
+      </p:nvGrpSpPr>
+      <p:grpSpPr>
+        <a:xfrm>
+          <a:off x="0" y="0"/>
+          <a:ext cx="0" cy="0"/>
+          <a:chOff x="0" y="0"/>
+          <a:chExt cx="0" cy="0"/>
+        </a:xfrm>
+      </p:grpSpPr>
+      <p:sp>
+        <p:nvSpPr>
+          <p:cNvPr id="2" name="Title 1"/>
+          <p:cNvSpPr>
+            <a:spLocks noGrp="1"/>
+          </p:cNvSpPr>
+          <p:nvPr>
+            <p:ph type="title"/>
+          </p:nvPr>
+        </p:nvSpPr>
+        <p:spPr/>
+        <p:txBody>
+          <a:bodyPr/>
+          <a:lstStyle/>
+          <a:p>
+            <a:r>
+              <a:rPr lang="en-US" sz="6000" dirty="0"/>
+              <a:t>Results</a:t>
+            </a:r>
+          </a:p>
+        </p:txBody>
+      </p:sp>
+      <p:sp>
+        <p:nvSpPr>
+          <p:cNvPr id="3" name="Text Placeholder 2"/>
+          <p:cNvSpPr>
+            <a:spLocks noGrp="1"/>
+          </p:cNvSpPr>
+          <p:nvPr>
+            <p:ph type="body" idx="1"/>
+          </p:nvPr>
+        </p:nvSpPr>
+        <p:spPr/>
+        <p:txBody>
+          <a:bodyPr/>
+          <a:lstStyle/>
+          <a:p>
+            <a:endParaRPr lang="en-US" dirty="0"/>
+          </a:p>
+        </p:txBody>
+      </p:sp>
+    </p:spTree>
+    <p:extLst>
+      <p:ext uri="{BB962C8B-B14F-4D97-AF65-F5344CB8AC3E}">
+        <p14:creationId xmlns:p14="http://schemas.microsoft.com/office/powerpoint/2010/main" val="3332299719"/>
+      </p:ext>
+    </p:extLst>
+  </p:cSld>
+  <p:clrMapOvr>
+    <a:masterClrMapping/>
+  </p:clrMapOvr>
+</p:sld>
+</file>
+
+<file path=ppt/slides/slide11.xml><?xml version="1.0" encoding="utf-8"?>
+<p:sld xmlns:a="http://schemas.openxmlformats.org/drawingml/2006/main" xmlns:r="http://schemas.openxmlformats.org/officeDocument/2006/relationships" xmlns:p="http://schemas.openxmlformats.org/presentationml/2006/main">
+  <p:cSld>
+    <p:spTree>
+      <p:nvGrpSpPr>
+        <p:cNvPr id="1" name=""/>
+        <p:cNvGrpSpPr/>
+        <p:nvPr/>
+      </p:nvGrpSpPr>
+      <p:grpSpPr>
+        <a:xfrm>
+          <a:off x="0" y="0"/>
+          <a:ext cx="0" cy="0"/>
+          <a:chOff x="0" y="0"/>
+          <a:chExt cx="0" cy="0"/>
+        </a:xfrm>
+      </p:grpSpPr>
+      <p:sp>
+        <p:nvSpPr>
+          <p:cNvPr id="2" name="Title 1"/>
+          <p:cNvSpPr>
+            <a:spLocks noGrp="1"/>
+          </p:cNvSpPr>
+          <p:nvPr>
+            <p:ph type="title"/>
+          </p:nvPr>
+        </p:nvSpPr>
+        <p:spPr/>
+        <p:txBody>
+          <a:bodyPr anchor="ctr"/>
+          <a:lstStyle/>
+          <a:p>
+            <a:pPr algn="ctr"/>
+            <a:r>
+              <a:rPr lang="en-US" sz="5400" dirty="0"/>
+              <a:t>Thank you for your time</a:t>
+            </a:r>
+          </a:p>
+        </p:txBody>
+      </p:sp>
+      <p:sp>
+        <p:nvSpPr>
+          <p:cNvPr id="3" name="Text Placeholder 2"/>
+          <p:cNvSpPr>
+            <a:spLocks noGrp="1"/>
+          </p:cNvSpPr>
+          <p:nvPr>
+            <p:ph type="body" sz="quarter" idx="16"/>
+          </p:nvPr>
+        </p:nvSpPr>
+        <p:spPr/>
+        <p:txBody>
+          <a:bodyPr anchor="ctr">
+            <a:normAutofit/>
+          </a:bodyPr>
+          <a:lstStyle/>
+          <a:p>
+            <a:pPr algn="ctr"/>
+            <a:r>
+              <a:rPr lang="en-US" sz="6000" dirty="0"/>
+              <a:t>Questions?</a:t>
+            </a:r>
+          </a:p>
+        </p:txBody>
+      </p:sp>
+    </p:spTree>
+    <p:extLst>
+      <p:ext uri="{BB962C8B-B14F-4D97-AF65-F5344CB8AC3E}">
+        <p14:creationId xmlns:p14="http://schemas.microsoft.com/office/powerpoint/2010/main" val="2961838120"/>
+      </p:ext>
+    </p:extLst>
+  </p:cSld>
+  <p:clrMapOvr>
+    <a:masterClrMapping/>
+  </p:clrMapOvr>
+</p:sld>
+</file>
+
 <file path=ppt/slides/slide2.xml><?xml version="1.0" encoding="utf-8"?>
 <p:sld xmlns:a="http://schemas.openxmlformats.org/drawingml/2006/main" xmlns:r="http://schemas.openxmlformats.org/officeDocument/2006/relationships" xmlns:p="http://schemas.openxmlformats.org/presentationml/2006/main">
   <p:cSld>
@@ -5471,35 +5629,39 @@
           <a:lstStyle/>
           <a:p>
             <a:r>
+              <a:rPr lang="en-US" sz="6600" dirty="0"/>
+              <a:t>Objective</a:t>
+            </a:r>
+            <a:endParaRPr lang="en-US" sz="6600" dirty="0"/>
+          </a:p>
+        </p:txBody>
+      </p:sp>
+      <p:sp>
+        <p:nvSpPr>
+          <p:cNvPr id="3" name="Text Placeholder 2"/>
+          <p:cNvSpPr>
+            <a:spLocks noGrp="1"/>
+          </p:cNvSpPr>
+          <p:nvPr>
+            <p:ph type="body" idx="1"/>
+          </p:nvPr>
+        </p:nvSpPr>
+        <p:spPr/>
+        <p:txBody>
+          <a:bodyPr/>
+          <a:lstStyle/>
+          <a:p>
+            <a:r>
               <a:rPr lang="en-US" dirty="0"/>
-              <a:t>The Idea</a:t>
-            </a:r>
-          </a:p>
-        </p:txBody>
-      </p:sp>
-      <p:sp>
-        <p:nvSpPr>
-          <p:cNvPr id="3" name="Content Placeholder 2"/>
-          <p:cNvSpPr>
-            <a:spLocks noGrp="1"/>
-          </p:cNvSpPr>
-          <p:nvPr>
-            <p:ph idx="1"/>
-          </p:nvPr>
-        </p:nvSpPr>
-        <p:spPr/>
-        <p:txBody>
-          <a:bodyPr/>
-          <a:lstStyle/>
-          <a:p>
-            <a:endParaRPr lang="en-US" dirty="0"/>
+              <a:t>Create an air quality forecast for Salt Lake City </a:t>
+            </a:r>
           </a:p>
         </p:txBody>
       </p:sp>
     </p:spTree>
     <p:extLst>
       <p:ext uri="{BB962C8B-B14F-4D97-AF65-F5344CB8AC3E}">
-        <p14:creationId xmlns:p14="http://schemas.microsoft.com/office/powerpoint/2010/main" val="3422452107"/>
+        <p14:creationId xmlns:p14="http://schemas.microsoft.com/office/powerpoint/2010/main" val="1098480779"/>
       </p:ext>
     </p:extLst>
   </p:cSld>
@@ -5538,39 +5700,69 @@
         </p:nvSpPr>
         <p:spPr/>
         <p:txBody>
-          <a:bodyPr/>
-          <a:lstStyle/>
-          <a:p>
-            <a:r>
-              <a:rPr lang="en-US" dirty="0"/>
-              <a:t>Data Sources, Collection, and Cleaning</a:t>
-            </a:r>
-          </a:p>
-        </p:txBody>
-      </p:sp>
-      <p:sp>
-        <p:nvSpPr>
-          <p:cNvPr id="3" name="Content Placeholder 2"/>
-          <p:cNvSpPr>
-            <a:spLocks noGrp="1"/>
-          </p:cNvSpPr>
+          <a:bodyPr anchor="ctr"/>
+          <a:lstStyle/>
+          <a:p>
+            <a:pPr algn="ctr"/>
+            <a:r>
+              <a:rPr lang="en-US" sz="4000" dirty="0"/>
+              <a:t>The Idea</a:t>
+            </a:r>
+          </a:p>
+        </p:txBody>
+      </p:sp>
+      <p:pic>
+        <p:nvPicPr>
+          <p:cNvPr id="5" name="Content Placeholder 4"/>
+          <p:cNvPicPr>
+            <a:picLocks noGrp="1" noChangeAspect="1"/>
+          </p:cNvPicPr>
           <p:nvPr>
             <p:ph idx="1"/>
           </p:nvPr>
+        </p:nvPicPr>
+        <p:blipFill>
+          <a:blip r:embed="rId2"/>
+          <a:stretch>
+            <a:fillRect/>
+          </a:stretch>
+        </p:blipFill>
+        <p:spPr>
+          <a:xfrm>
+            <a:off x="4801453" y="1255286"/>
+            <a:ext cx="6960479" cy="3921070"/>
+          </a:xfrm>
+        </p:spPr>
+      </p:pic>
+      <p:sp>
+        <p:nvSpPr>
+          <p:cNvPr id="4" name="Text Placeholder 3"/>
+          <p:cNvSpPr>
+            <a:spLocks noGrp="1"/>
+          </p:cNvSpPr>
+          <p:nvPr>
+            <p:ph type="body" sz="half" idx="2"/>
+          </p:nvPr>
         </p:nvSpPr>
         <p:spPr/>
         <p:txBody>
-          <a:bodyPr/>
-          <a:lstStyle/>
-          <a:p>
-            <a:endParaRPr lang="en-US"/>
+          <a:bodyPr>
+            <a:noAutofit/>
+          </a:bodyPr>
+          <a:lstStyle/>
+          <a:p>
+            <a:r>
+              <a:rPr lang="en-US" sz="1700" dirty="0"/>
+              <a:t>Our primary objective is to devise a model to obtain an air quality forecast much like we have a weather forecast. We did not find any source for an air quality forecast that goes beyond one day.  A short term model can be useful in warning sensitive groups of upcoming poor air quality days.  As a result, we decided to do a five day forecast. </a:t>
+            </a:r>
+            <a:endParaRPr lang="en-US" sz="1700" dirty="0"/>
           </a:p>
         </p:txBody>
       </p:sp>
     </p:spTree>
     <p:extLst>
       <p:ext uri="{BB962C8B-B14F-4D97-AF65-F5344CB8AC3E}">
-        <p14:creationId xmlns:p14="http://schemas.microsoft.com/office/powerpoint/2010/main" val="2013565401"/>
+        <p14:creationId xmlns:p14="http://schemas.microsoft.com/office/powerpoint/2010/main" val="3134956732"/>
       </p:ext>
     </p:extLst>
   </p:cSld>
@@ -5607,6 +5799,34 @@
             <p:ph type="title"/>
           </p:nvPr>
         </p:nvSpPr>
+        <p:spPr>
+          <a:xfrm>
+            <a:off x="6008914" y="2951396"/>
+            <a:ext cx="5362504" cy="1468800"/>
+          </a:xfrm>
+        </p:spPr>
+        <p:txBody>
+          <a:bodyPr/>
+          <a:lstStyle/>
+          <a:p>
+            <a:r>
+              <a:rPr lang="en-US" sz="6000" dirty="0"/>
+              <a:t>Data Sources, Collection, and Cleaning</a:t>
+            </a:r>
+            <a:endParaRPr lang="en-US" sz="6000" dirty="0"/>
+          </a:p>
+        </p:txBody>
+      </p:sp>
+      <p:sp>
+        <p:nvSpPr>
+          <p:cNvPr id="3" name="Text Placeholder 2"/>
+          <p:cNvSpPr>
+            <a:spLocks noGrp="1"/>
+          </p:cNvSpPr>
+          <p:nvPr>
+            <p:ph type="body" idx="1"/>
+          </p:nvPr>
+        </p:nvSpPr>
         <p:spPr/>
         <p:txBody>
           <a:bodyPr/>
@@ -5614,34 +5834,15 @@
           <a:p>
             <a:r>
               <a:rPr lang="en-US" dirty="0"/>
-              <a:t>Preliminary Analysis</a:t>
-            </a:r>
-          </a:p>
-        </p:txBody>
-      </p:sp>
-      <p:sp>
-        <p:nvSpPr>
-          <p:cNvPr id="3" name="Content Placeholder 2"/>
-          <p:cNvSpPr>
-            <a:spLocks noGrp="1"/>
-          </p:cNvSpPr>
-          <p:nvPr>
-            <p:ph idx="1"/>
-          </p:nvPr>
-        </p:nvSpPr>
-        <p:spPr/>
-        <p:txBody>
-          <a:bodyPr/>
-          <a:lstStyle/>
-          <a:p>
-            <a:endParaRPr lang="en-US"/>
+              <a:t>What data do we use, how do we collect it, and how do we organize it for analysis</a:t>
+            </a:r>
           </a:p>
         </p:txBody>
       </p:sp>
     </p:spTree>
     <p:extLst>
       <p:ext uri="{BB962C8B-B14F-4D97-AF65-F5344CB8AC3E}">
-        <p14:creationId xmlns:p14="http://schemas.microsoft.com/office/powerpoint/2010/main" val="1921106764"/>
+        <p14:creationId xmlns:p14="http://schemas.microsoft.com/office/powerpoint/2010/main" val="1860038862"/>
       </p:ext>
     </p:extLst>
   </p:cSld>
@@ -5684,8 +5885,8 @@
           <a:lstStyle/>
           <a:p>
             <a:r>
-              <a:rPr lang="en-US" dirty="0"/>
-              <a:t>Model Selection</a:t>
+              <a:rPr lang="en-US" sz="6000" dirty="0"/>
+              <a:t>Data Sources</a:t>
             </a:r>
           </a:p>
         </p:txBody>
@@ -5705,14 +5906,14 @@
           <a:bodyPr/>
           <a:lstStyle/>
           <a:p>
-            <a:endParaRPr lang="en-US"/>
+            <a:endParaRPr lang="en-US" dirty="0"/>
           </a:p>
         </p:txBody>
       </p:sp>
     </p:spTree>
     <p:extLst>
       <p:ext uri="{BB962C8B-B14F-4D97-AF65-F5344CB8AC3E}">
-        <p14:creationId xmlns:p14="http://schemas.microsoft.com/office/powerpoint/2010/main" val="1040328746"/>
+        <p14:creationId xmlns:p14="http://schemas.microsoft.com/office/powerpoint/2010/main" val="2013565401"/>
       </p:ext>
     </p:extLst>
   </p:cSld>
@@ -5755,8 +5956,8 @@
           <a:lstStyle/>
           <a:p>
             <a:r>
-              <a:rPr lang="en-US" dirty="0"/>
-              <a:t>Results</a:t>
+              <a:rPr lang="en-US" sz="6000" dirty="0"/>
+              <a:t>Data Collection</a:t>
             </a:r>
           </a:p>
         </p:txBody>
@@ -5783,7 +5984,7 @@
     </p:spTree>
     <p:extLst>
       <p:ext uri="{BB962C8B-B14F-4D97-AF65-F5344CB8AC3E}">
-        <p14:creationId xmlns:p14="http://schemas.microsoft.com/office/powerpoint/2010/main" val="337747022"/>
+        <p14:creationId xmlns:p14="http://schemas.microsoft.com/office/powerpoint/2010/main" val="629659559"/>
       </p:ext>
     </p:extLst>
   </p:cSld>
@@ -5826,45 +6027,177 @@
           <a:lstStyle/>
           <a:p>
             <a:r>
-              <a:rPr lang="en-US" sz="4800" dirty="0"/>
-              <a:t>Thank you for your time</a:t>
-            </a:r>
-          </a:p>
-        </p:txBody>
-      </p:sp>
-      <p:sp>
-        <p:nvSpPr>
-          <p:cNvPr id="3" name="Text Placeholder 2"/>
-          <p:cNvSpPr>
-            <a:spLocks noGrp="1"/>
-          </p:cNvSpPr>
-          <p:nvPr>
-            <p:ph type="body" sz="quarter" idx="16"/>
+              <a:rPr lang="en-US" sz="6000" dirty="0"/>
+              <a:t>Data Cleaning</a:t>
+            </a:r>
+          </a:p>
+        </p:txBody>
+      </p:sp>
+      <p:sp>
+        <p:nvSpPr>
+          <p:cNvPr id="3" name="Content Placeholder 2"/>
+          <p:cNvSpPr>
+            <a:spLocks noGrp="1"/>
+          </p:cNvSpPr>
+          <p:nvPr>
+            <p:ph idx="1"/>
           </p:nvPr>
         </p:nvSpPr>
         <p:spPr/>
         <p:txBody>
-          <a:bodyPr>
-            <a:normAutofit/>
-          </a:bodyPr>
-          <a:lstStyle/>
-          <a:p>
-            <a:pPr>
-              <a:lnSpc>
-                <a:spcPct val="250000"/>
-              </a:lnSpc>
-            </a:pPr>
-            <a:r>
-              <a:rPr lang="en-US" sz="4800" dirty="0"/>
-              <a:t>Questions?</a:t>
-            </a:r>
+          <a:bodyPr/>
+          <a:lstStyle/>
+          <a:p>
+            <a:endParaRPr lang="en-US"/>
           </a:p>
         </p:txBody>
       </p:sp>
     </p:spTree>
     <p:extLst>
       <p:ext uri="{BB962C8B-B14F-4D97-AF65-F5344CB8AC3E}">
-        <p14:creationId xmlns:p14="http://schemas.microsoft.com/office/powerpoint/2010/main" val="2961838120"/>
+        <p14:creationId xmlns:p14="http://schemas.microsoft.com/office/powerpoint/2010/main" val="2138150528"/>
+      </p:ext>
+    </p:extLst>
+  </p:cSld>
+  <p:clrMapOvr>
+    <a:masterClrMapping/>
+  </p:clrMapOvr>
+</p:sld>
+</file>
+
+<file path=ppt/slides/slide8.xml><?xml version="1.0" encoding="utf-8"?>
+<p:sld xmlns:a="http://schemas.openxmlformats.org/drawingml/2006/main" xmlns:r="http://schemas.openxmlformats.org/officeDocument/2006/relationships" xmlns:p="http://schemas.openxmlformats.org/presentationml/2006/main">
+  <p:cSld>
+    <p:spTree>
+      <p:nvGrpSpPr>
+        <p:cNvPr id="1" name=""/>
+        <p:cNvGrpSpPr/>
+        <p:nvPr/>
+      </p:nvGrpSpPr>
+      <p:grpSpPr>
+        <a:xfrm>
+          <a:off x="0" y="0"/>
+          <a:ext cx="0" cy="0"/>
+          <a:chOff x="0" y="0"/>
+          <a:chExt cx="0" cy="0"/>
+        </a:xfrm>
+      </p:grpSpPr>
+      <p:sp>
+        <p:nvSpPr>
+          <p:cNvPr id="2" name="Title 1"/>
+          <p:cNvSpPr>
+            <a:spLocks noGrp="1"/>
+          </p:cNvSpPr>
+          <p:nvPr>
+            <p:ph type="title"/>
+          </p:nvPr>
+        </p:nvSpPr>
+        <p:spPr/>
+        <p:txBody>
+          <a:bodyPr/>
+          <a:lstStyle/>
+          <a:p>
+            <a:r>
+              <a:rPr lang="en-US" sz="6000" dirty="0"/>
+              <a:t>Preliminary Analysis</a:t>
+            </a:r>
+          </a:p>
+        </p:txBody>
+      </p:sp>
+      <p:sp>
+        <p:nvSpPr>
+          <p:cNvPr id="3" name="Text Placeholder 2"/>
+          <p:cNvSpPr>
+            <a:spLocks noGrp="1"/>
+          </p:cNvSpPr>
+          <p:nvPr>
+            <p:ph type="body" idx="1"/>
+          </p:nvPr>
+        </p:nvSpPr>
+        <p:spPr/>
+        <p:txBody>
+          <a:bodyPr/>
+          <a:lstStyle/>
+          <a:p>
+            <a:endParaRPr lang="en-US"/>
+          </a:p>
+        </p:txBody>
+      </p:sp>
+    </p:spTree>
+    <p:extLst>
+      <p:ext uri="{BB962C8B-B14F-4D97-AF65-F5344CB8AC3E}">
+        <p14:creationId xmlns:p14="http://schemas.microsoft.com/office/powerpoint/2010/main" val="812089888"/>
+      </p:ext>
+    </p:extLst>
+  </p:cSld>
+  <p:clrMapOvr>
+    <a:masterClrMapping/>
+  </p:clrMapOvr>
+</p:sld>
+</file>
+
+<file path=ppt/slides/slide9.xml><?xml version="1.0" encoding="utf-8"?>
+<p:sld xmlns:a="http://schemas.openxmlformats.org/drawingml/2006/main" xmlns:r="http://schemas.openxmlformats.org/officeDocument/2006/relationships" xmlns:p="http://schemas.openxmlformats.org/presentationml/2006/main">
+  <p:cSld>
+    <p:spTree>
+      <p:nvGrpSpPr>
+        <p:cNvPr id="1" name=""/>
+        <p:cNvGrpSpPr/>
+        <p:nvPr/>
+      </p:nvGrpSpPr>
+      <p:grpSpPr>
+        <a:xfrm>
+          <a:off x="0" y="0"/>
+          <a:ext cx="0" cy="0"/>
+          <a:chOff x="0" y="0"/>
+          <a:chExt cx="0" cy="0"/>
+        </a:xfrm>
+      </p:grpSpPr>
+      <p:sp>
+        <p:nvSpPr>
+          <p:cNvPr id="2" name="Title 1"/>
+          <p:cNvSpPr>
+            <a:spLocks noGrp="1"/>
+          </p:cNvSpPr>
+          <p:nvPr>
+            <p:ph type="title"/>
+          </p:nvPr>
+        </p:nvSpPr>
+        <p:spPr/>
+        <p:txBody>
+          <a:bodyPr/>
+          <a:lstStyle/>
+          <a:p>
+            <a:r>
+              <a:rPr lang="en-US" sz="6000" dirty="0"/>
+              <a:t>Model Selection</a:t>
+            </a:r>
+          </a:p>
+        </p:txBody>
+      </p:sp>
+      <p:sp>
+        <p:nvSpPr>
+          <p:cNvPr id="3" name="Text Placeholder 2"/>
+          <p:cNvSpPr>
+            <a:spLocks noGrp="1"/>
+          </p:cNvSpPr>
+          <p:nvPr>
+            <p:ph type="body" idx="1"/>
+          </p:nvPr>
+        </p:nvSpPr>
+        <p:spPr/>
+        <p:txBody>
+          <a:bodyPr/>
+          <a:lstStyle/>
+          <a:p>
+            <a:endParaRPr lang="en-US"/>
+          </a:p>
+        </p:txBody>
+      </p:sp>
+    </p:spTree>
+    <p:extLst>
+      <p:ext uri="{BB962C8B-B14F-4D97-AF65-F5344CB8AC3E}">
+        <p14:creationId xmlns:p14="http://schemas.microsoft.com/office/powerpoint/2010/main" val="3202397597"/>
       </p:ext>
     </p:extLst>
   </p:cSld>
